--- a/Conteudo/Classe_de_Dominio_explicacao.pptx
+++ b/Conteudo/Classe_de_Dominio_explicacao.pptx
@@ -84,73 +84,7 @@
                 <a:uFillTx/>
                 <a:latin typeface="Calibri"/>
               </a:rPr>
-              <a:t>Clic</a:t>
-            </a:r>
-            <a:r>
-              <a:rPr lang="pt-BR" sz="1800" b="0" u="none" strike="noStrike">
-                <a:solidFill>
-                  <a:schemeClr val="dk1"/>
-                </a:solidFill>
-                <a:effectLst/>
-                <a:uFillTx/>
-                <a:latin typeface="Calibri"/>
-              </a:rPr>
-              <a:t>k to </a:t>
-            </a:r>
-            <a:r>
-              <a:rPr lang="pt-BR" sz="1800" b="0" u="none" strike="noStrike">
-                <a:solidFill>
-                  <a:schemeClr val="dk1"/>
-                </a:solidFill>
-                <a:effectLst/>
-                <a:uFillTx/>
-                <a:latin typeface="Calibri"/>
-              </a:rPr>
-              <a:t>mov</a:t>
-            </a:r>
-            <a:r>
-              <a:rPr lang="pt-BR" sz="1800" b="0" u="none" strike="noStrike">
-                <a:solidFill>
-                  <a:schemeClr val="dk1"/>
-                </a:solidFill>
-                <a:effectLst/>
-                <a:uFillTx/>
-                <a:latin typeface="Calibri"/>
-              </a:rPr>
-              <a:t>e </a:t>
-            </a:r>
-            <a:r>
-              <a:rPr lang="pt-BR" sz="1800" b="0" u="none" strike="noStrike">
-                <a:solidFill>
-                  <a:schemeClr val="dk1"/>
-                </a:solidFill>
-                <a:effectLst/>
-                <a:uFillTx/>
-                <a:latin typeface="Calibri"/>
-              </a:rPr>
-              <a:t>the </a:t>
-            </a:r>
-            <a:r>
-              <a:rPr lang="pt-BR" sz="1800" b="0" u="none" strike="noStrike">
-                <a:solidFill>
-                  <a:schemeClr val="dk1"/>
-                </a:solidFill>
-                <a:effectLst/>
-                <a:uFillTx/>
-                <a:latin typeface="Calibri"/>
-              </a:rPr>
-              <a:t>slid</a:t>
-            </a:r>
-            <a:r>
-              <a:rPr lang="pt-BR" sz="1800" b="0" u="none" strike="noStrike">
-                <a:solidFill>
-                  <a:schemeClr val="dk1"/>
-                </a:solidFill>
-                <a:effectLst/>
-                <a:uFillTx/>
-                <a:latin typeface="Calibri"/>
-              </a:rPr>
-              <a:t>e</a:t>
+              <a:t>Click to move the slide</a:t>
             </a:r>
             <a:endParaRPr lang="pt-BR" sz="1800" b="0" u="none" strike="noStrike">
               <a:solidFill>
@@ -445,7 +379,7 @@
             <a:pPr indent="0" algn="r">
               <a:buNone/>
             </a:pPr>
-            <a:fld id="{95D6585D-DB47-42E9-B3C8-8EE100EE2526}" type="slidenum">
+            <a:fld id="{5A68D3C0-E88E-41FF-81EC-699C72163E3D}" type="slidenum">
               <a:rPr lang="pt-BR" sz="1400" b="0" u="none" strike="noStrike">
                 <a:solidFill>
                   <a:srgbClr val="000000"/>
@@ -503,7 +437,7 @@
         <p:spPr>
           <a:xfrm>
             <a:off x="685800" y="1143000"/>
-            <a:ext cx="5486040" cy="3085920"/>
+            <a:ext cx="5485680" cy="3085560"/>
           </a:xfrm>
           <a:prstGeom prst="rect">
             <a:avLst/>
@@ -526,7 +460,7 @@
         <p:spPr>
           <a:xfrm>
             <a:off x="685800" y="4400640"/>
-            <a:ext cx="5486040" cy="3600000"/>
+            <a:ext cx="5485680" cy="3599640"/>
           </a:xfrm>
           <a:prstGeom prst="rect">
             <a:avLst/>
@@ -546,9 +480,12 @@
                 <a:spcPct val="100000"/>
               </a:lnSpc>
               <a:buNone/>
-            </a:pPr>
-            <a:r>
-              <a:rPr lang="en-US" sz="2000" b="0" u="none" strike="noStrike">
+              <a:tabLst>
+                <a:tab pos="0" algn="l"/>
+              </a:tabLst>
+            </a:pPr>
+            <a:r>
+              <a:rPr lang="pt-BR" sz="2000" b="0" u="none" strike="noStrike">
                 <a:solidFill>
                   <a:srgbClr val="000000"/>
                 </a:solidFill>
@@ -582,7 +519,7 @@
         <p:spPr>
           <a:xfrm>
             <a:off x="3884760" y="8685360"/>
-            <a:ext cx="2971440" cy="458280"/>
+            <a:ext cx="2971080" cy="457920"/>
           </a:xfrm>
           <a:prstGeom prst="rect">
             <a:avLst/>
@@ -602,7 +539,10 @@
                 <a:spcPct val="100000"/>
               </a:lnSpc>
               <a:buNone/>
-              <a:defRPr lang="en-US" sz="1200" b="0" u="none" strike="noStrike">
+              <a:tabLst>
+                <a:tab pos="0" algn="l"/>
+              </a:tabLst>
+              <a:defRPr lang="pt-BR" sz="1200" b="0" u="none" strike="noStrike">
                 <a:solidFill>
                   <a:schemeClr val="dk1"/>
                 </a:solidFill>
@@ -619,9 +559,12 @@
                 <a:spcPct val="100000"/>
               </a:lnSpc>
               <a:buNone/>
-            </a:pPr>
-            <a:fld id="{FCBB516A-A5B6-4F98-B548-9A2B489D528A}" type="slidenum">
-              <a:rPr lang="en-US" sz="1200" b="0" u="none" strike="noStrike">
+              <a:tabLst>
+                <a:tab pos="0" algn="l"/>
+              </a:tabLst>
+            </a:pPr>
+            <a:fld id="{43F6F0D9-0DB2-41F7-92EE-4F32B1242C1C}" type="slidenum">
+              <a:rPr lang="pt-BR" sz="1200" b="0" u="none" strike="noStrike">
                 <a:solidFill>
                   <a:schemeClr val="dk1"/>
                 </a:solidFill>
@@ -630,7 +573,7 @@
                 <a:latin typeface="+mn-lt"/>
                 <a:ea typeface="+mn-ea"/>
               </a:rPr>
-              <a:t>&lt;number&gt;</a:t>
+              <a:t>1</a:t>
             </a:fld>
             <a:endParaRPr lang="pt-BR" sz="1200" b="0" u="none" strike="noStrike">
               <a:solidFill>
@@ -678,7 +621,7 @@
         <p:spPr>
           <a:xfrm>
             <a:off x="685800" y="1143000"/>
-            <a:ext cx="5486040" cy="3085920"/>
+            <a:ext cx="5485680" cy="3085560"/>
           </a:xfrm>
           <a:prstGeom prst="rect">
             <a:avLst/>
@@ -701,7 +644,7 @@
         <p:spPr>
           <a:xfrm>
             <a:off x="685800" y="4400640"/>
-            <a:ext cx="5486040" cy="3600000"/>
+            <a:ext cx="5485680" cy="3599640"/>
           </a:xfrm>
           <a:prstGeom prst="rect">
             <a:avLst/>
@@ -721,9 +664,12 @@
                 <a:spcPct val="100000"/>
               </a:lnSpc>
               <a:buNone/>
-            </a:pPr>
-            <a:r>
-              <a:rPr lang="en-US" sz="2000" b="0" u="none" strike="noStrike">
+              <a:tabLst>
+                <a:tab pos="0" algn="l"/>
+              </a:tabLst>
+            </a:pPr>
+            <a:r>
+              <a:rPr lang="pt-BR" sz="2000" b="0" u="none" strike="noStrike">
                 <a:solidFill>
                   <a:srgbClr val="000000"/>
                 </a:solidFill>
@@ -757,7 +703,7 @@
         <p:spPr>
           <a:xfrm>
             <a:off x="3884760" y="8685360"/>
-            <a:ext cx="2971440" cy="458280"/>
+            <a:ext cx="2971080" cy="457920"/>
           </a:xfrm>
           <a:prstGeom prst="rect">
             <a:avLst/>
@@ -777,7 +723,10 @@
                 <a:spcPct val="100000"/>
               </a:lnSpc>
               <a:buNone/>
-              <a:defRPr lang="en-US" sz="1200" b="0" u="none" strike="noStrike">
+              <a:tabLst>
+                <a:tab pos="0" algn="l"/>
+              </a:tabLst>
+              <a:defRPr lang="pt-BR" sz="1200" b="0" u="none" strike="noStrike">
                 <a:solidFill>
                   <a:schemeClr val="dk1"/>
                 </a:solidFill>
@@ -794,9 +743,12 @@
                 <a:spcPct val="100000"/>
               </a:lnSpc>
               <a:buNone/>
-            </a:pPr>
-            <a:fld id="{8BBB217D-862F-4604-81F2-99EE782E0C8C}" type="slidenum">
-              <a:rPr lang="en-US" sz="1200" b="0" u="none" strike="noStrike">
+              <a:tabLst>
+                <a:tab pos="0" algn="l"/>
+              </a:tabLst>
+            </a:pPr>
+            <a:fld id="{18B0AC10-C6AC-4437-BC7A-C16B9F64045C}" type="slidenum">
+              <a:rPr lang="pt-BR" sz="1200" b="0" u="none" strike="noStrike">
                 <a:solidFill>
                   <a:schemeClr val="dk1"/>
                 </a:solidFill>
@@ -805,7 +757,7 @@
                 <a:latin typeface="+mn-lt"/>
                 <a:ea typeface="+mn-ea"/>
               </a:rPr>
-              <a:t>&lt;number&gt;</a:t>
+              <a:t>1</a:t>
             </a:fld>
             <a:endParaRPr lang="pt-BR" sz="1200" b="0" u="none" strike="noStrike">
               <a:solidFill>
@@ -853,7 +805,7 @@
         <p:spPr>
           <a:xfrm>
             <a:off x="685800" y="1143000"/>
-            <a:ext cx="5486040" cy="3085920"/>
+            <a:ext cx="5485680" cy="3085560"/>
           </a:xfrm>
           <a:prstGeom prst="rect">
             <a:avLst/>
@@ -876,7 +828,7 @@
         <p:spPr>
           <a:xfrm>
             <a:off x="685800" y="4400640"/>
-            <a:ext cx="5486040" cy="3600000"/>
+            <a:ext cx="5485680" cy="3599640"/>
           </a:xfrm>
           <a:prstGeom prst="rect">
             <a:avLst/>
@@ -896,9 +848,12 @@
                 <a:spcPct val="100000"/>
               </a:lnSpc>
               <a:buNone/>
-            </a:pPr>
-            <a:r>
-              <a:rPr lang="en-US" sz="2000" b="0" u="none" strike="noStrike">
+              <a:tabLst>
+                <a:tab pos="0" algn="l"/>
+              </a:tabLst>
+            </a:pPr>
+            <a:r>
+              <a:rPr lang="pt-BR" sz="2000" b="0" u="none" strike="noStrike">
                 <a:solidFill>
                   <a:srgbClr val="000000"/>
                 </a:solidFill>
@@ -932,7 +887,7 @@
         <p:spPr>
           <a:xfrm>
             <a:off x="3884760" y="8685360"/>
-            <a:ext cx="2971440" cy="458280"/>
+            <a:ext cx="2971080" cy="457920"/>
           </a:xfrm>
           <a:prstGeom prst="rect">
             <a:avLst/>
@@ -952,7 +907,10 @@
                 <a:spcPct val="100000"/>
               </a:lnSpc>
               <a:buNone/>
-              <a:defRPr lang="en-US" sz="1200" b="0" u="none" strike="noStrike">
+              <a:tabLst>
+                <a:tab pos="0" algn="l"/>
+              </a:tabLst>
+              <a:defRPr lang="pt-BR" sz="1200" b="0" u="none" strike="noStrike">
                 <a:solidFill>
                   <a:schemeClr val="dk1"/>
                 </a:solidFill>
@@ -969,9 +927,12 @@
                 <a:spcPct val="100000"/>
               </a:lnSpc>
               <a:buNone/>
-            </a:pPr>
-            <a:fld id="{A7A5DC62-3124-489D-A4A0-94484C058B30}" type="slidenum">
-              <a:rPr lang="en-US" sz="1200" b="0" u="none" strike="noStrike">
+              <a:tabLst>
+                <a:tab pos="0" algn="l"/>
+              </a:tabLst>
+            </a:pPr>
+            <a:fld id="{D015AC3A-8D10-4F74-A025-D062CB5A3033}" type="slidenum">
+              <a:rPr lang="pt-BR" sz="1200" b="0" u="none" strike="noStrike">
                 <a:solidFill>
                   <a:schemeClr val="dk1"/>
                 </a:solidFill>
@@ -980,7 +941,7 @@
                 <a:latin typeface="+mn-lt"/>
                 <a:ea typeface="+mn-ea"/>
               </a:rPr>
-              <a:t>&lt;number&gt;</a:t>
+              <a:t>1</a:t>
             </a:fld>
             <a:endParaRPr lang="pt-BR" sz="1200" b="0" u="none" strike="noStrike">
               <a:solidFill>
@@ -1028,7 +989,7 @@
         <p:spPr>
           <a:xfrm>
             <a:off x="685800" y="1143000"/>
-            <a:ext cx="5486040" cy="3085920"/>
+            <a:ext cx="5485680" cy="3085560"/>
           </a:xfrm>
           <a:prstGeom prst="rect">
             <a:avLst/>
@@ -1051,7 +1012,7 @@
         <p:spPr>
           <a:xfrm>
             <a:off x="685800" y="4400640"/>
-            <a:ext cx="5486040" cy="3600000"/>
+            <a:ext cx="5485680" cy="3599640"/>
           </a:xfrm>
           <a:prstGeom prst="rect">
             <a:avLst/>
@@ -1071,9 +1032,12 @@
                 <a:spcPct val="100000"/>
               </a:lnSpc>
               <a:buNone/>
-            </a:pPr>
-            <a:r>
-              <a:rPr lang="en-US" sz="2000" b="0" u="none" strike="noStrike">
+              <a:tabLst>
+                <a:tab pos="0" algn="l"/>
+              </a:tabLst>
+            </a:pPr>
+            <a:r>
+              <a:rPr lang="pt-BR" sz="2000" b="0" u="none" strike="noStrike">
                 <a:solidFill>
                   <a:srgbClr val="000000"/>
                 </a:solidFill>
@@ -1107,7 +1071,7 @@
         <p:spPr>
           <a:xfrm>
             <a:off x="3884760" y="8685360"/>
-            <a:ext cx="2971440" cy="458280"/>
+            <a:ext cx="2971080" cy="457920"/>
           </a:xfrm>
           <a:prstGeom prst="rect">
             <a:avLst/>
@@ -1127,7 +1091,10 @@
                 <a:spcPct val="100000"/>
               </a:lnSpc>
               <a:buNone/>
-              <a:defRPr lang="en-US" sz="1200" b="0" u="none" strike="noStrike">
+              <a:tabLst>
+                <a:tab pos="0" algn="l"/>
+              </a:tabLst>
+              <a:defRPr lang="pt-BR" sz="1200" b="0" u="none" strike="noStrike">
                 <a:solidFill>
                   <a:schemeClr val="dk1"/>
                 </a:solidFill>
@@ -1144,9 +1111,12 @@
                 <a:spcPct val="100000"/>
               </a:lnSpc>
               <a:buNone/>
-            </a:pPr>
-            <a:fld id="{796B0DA0-0103-4417-B095-D68FB651611B}" type="slidenum">
-              <a:rPr lang="en-US" sz="1200" b="0" u="none" strike="noStrike">
+              <a:tabLst>
+                <a:tab pos="0" algn="l"/>
+              </a:tabLst>
+            </a:pPr>
+            <a:fld id="{203A3508-EB85-4A5E-942C-6D160A2940EB}" type="slidenum">
+              <a:rPr lang="pt-BR" sz="1200" b="0" u="none" strike="noStrike">
                 <a:solidFill>
                   <a:schemeClr val="dk1"/>
                 </a:solidFill>
@@ -1155,7 +1125,7 @@
                 <a:latin typeface="+mn-lt"/>
                 <a:ea typeface="+mn-ea"/>
               </a:rPr>
-              <a:t>&lt;number&gt;</a:t>
+              <a:t>1</a:t>
             </a:fld>
             <a:endParaRPr lang="pt-BR" sz="1200" b="0" u="none" strike="noStrike">
               <a:solidFill>
@@ -1203,7 +1173,7 @@
         <p:spPr>
           <a:xfrm>
             <a:off x="685800" y="1143000"/>
-            <a:ext cx="5486040" cy="3085920"/>
+            <a:ext cx="5485680" cy="3085560"/>
           </a:xfrm>
           <a:prstGeom prst="rect">
             <a:avLst/>
@@ -1226,7 +1196,7 @@
         <p:spPr>
           <a:xfrm>
             <a:off x="685800" y="4400640"/>
-            <a:ext cx="5486040" cy="3600000"/>
+            <a:ext cx="5485680" cy="3599640"/>
           </a:xfrm>
           <a:prstGeom prst="rect">
             <a:avLst/>
@@ -1246,9 +1216,12 @@
                 <a:spcPct val="100000"/>
               </a:lnSpc>
               <a:buNone/>
-            </a:pPr>
-            <a:r>
-              <a:rPr lang="en-US" sz="2000" b="0" u="none" strike="noStrike">
+              <a:tabLst>
+                <a:tab pos="0" algn="l"/>
+              </a:tabLst>
+            </a:pPr>
+            <a:r>
+              <a:rPr lang="pt-BR" sz="2000" b="0" u="none" strike="noStrike">
                 <a:solidFill>
                   <a:srgbClr val="000000"/>
                 </a:solidFill>
@@ -1282,7 +1255,7 @@
         <p:spPr>
           <a:xfrm>
             <a:off x="3884760" y="8685360"/>
-            <a:ext cx="2971440" cy="458280"/>
+            <a:ext cx="2971080" cy="457920"/>
           </a:xfrm>
           <a:prstGeom prst="rect">
             <a:avLst/>
@@ -1302,7 +1275,10 @@
                 <a:spcPct val="100000"/>
               </a:lnSpc>
               <a:buNone/>
-              <a:defRPr lang="en-US" sz="1200" b="0" u="none" strike="noStrike">
+              <a:tabLst>
+                <a:tab pos="0" algn="l"/>
+              </a:tabLst>
+              <a:defRPr lang="pt-BR" sz="1200" b="0" u="none" strike="noStrike">
                 <a:solidFill>
                   <a:schemeClr val="dk1"/>
                 </a:solidFill>
@@ -1319,9 +1295,12 @@
                 <a:spcPct val="100000"/>
               </a:lnSpc>
               <a:buNone/>
-            </a:pPr>
-            <a:fld id="{438704C1-53BA-4CB4-BA4E-DEB0B8F154B3}" type="slidenum">
-              <a:rPr lang="en-US" sz="1200" b="0" u="none" strike="noStrike">
+              <a:tabLst>
+                <a:tab pos="0" algn="l"/>
+              </a:tabLst>
+            </a:pPr>
+            <a:fld id="{196622D9-AF22-42A7-8CD8-F4B5EF8D044C}" type="slidenum">
+              <a:rPr lang="pt-BR" sz="1200" b="0" u="none" strike="noStrike">
                 <a:solidFill>
                   <a:schemeClr val="dk1"/>
                 </a:solidFill>
@@ -1330,7 +1309,7 @@
                 <a:latin typeface="+mn-lt"/>
                 <a:ea typeface="+mn-ea"/>
               </a:rPr>
-              <a:t>&lt;number&gt;</a:t>
+              <a:t>1</a:t>
             </a:fld>
             <a:endParaRPr lang="pt-BR" sz="1200" b="0" u="none" strike="noStrike">
               <a:solidFill>
@@ -1378,7 +1357,7 @@
         <p:spPr>
           <a:xfrm>
             <a:off x="685800" y="1143000"/>
-            <a:ext cx="5486040" cy="3085920"/>
+            <a:ext cx="5485680" cy="3085560"/>
           </a:xfrm>
           <a:prstGeom prst="rect">
             <a:avLst/>
@@ -1401,7 +1380,7 @@
         <p:spPr>
           <a:xfrm>
             <a:off x="685800" y="4400640"/>
-            <a:ext cx="5486040" cy="3600000"/>
+            <a:ext cx="5485680" cy="3599640"/>
           </a:xfrm>
           <a:prstGeom prst="rect">
             <a:avLst/>
@@ -1421,9 +1400,12 @@
                 <a:spcPct val="100000"/>
               </a:lnSpc>
               <a:buNone/>
-            </a:pPr>
-            <a:r>
-              <a:rPr lang="en-US" sz="2000" b="0" u="none" strike="noStrike">
+              <a:tabLst>
+                <a:tab pos="0" algn="l"/>
+              </a:tabLst>
+            </a:pPr>
+            <a:r>
+              <a:rPr lang="pt-BR" sz="2000" b="0" u="none" strike="noStrike">
                 <a:solidFill>
                   <a:srgbClr val="000000"/>
                 </a:solidFill>
@@ -1457,7 +1439,7 @@
         <p:spPr>
           <a:xfrm>
             <a:off x="3884760" y="8685360"/>
-            <a:ext cx="2971440" cy="458280"/>
+            <a:ext cx="2971080" cy="457920"/>
           </a:xfrm>
           <a:prstGeom prst="rect">
             <a:avLst/>
@@ -1477,7 +1459,10 @@
                 <a:spcPct val="100000"/>
               </a:lnSpc>
               <a:buNone/>
-              <a:defRPr lang="en-US" sz="1200" b="0" u="none" strike="noStrike">
+              <a:tabLst>
+                <a:tab pos="0" algn="l"/>
+              </a:tabLst>
+              <a:defRPr lang="pt-BR" sz="1200" b="0" u="none" strike="noStrike">
                 <a:solidFill>
                   <a:schemeClr val="dk1"/>
                 </a:solidFill>
@@ -1494,9 +1479,12 @@
                 <a:spcPct val="100000"/>
               </a:lnSpc>
               <a:buNone/>
-            </a:pPr>
-            <a:fld id="{B65419AA-9B65-4346-A9A5-53B0DB991D44}" type="slidenum">
-              <a:rPr lang="en-US" sz="1200" b="0" u="none" strike="noStrike">
+              <a:tabLst>
+                <a:tab pos="0" algn="l"/>
+              </a:tabLst>
+            </a:pPr>
+            <a:fld id="{3D75B714-1985-4421-8A05-D9425D0CADB0}" type="slidenum">
+              <a:rPr lang="pt-BR" sz="1200" b="0" u="none" strike="noStrike">
                 <a:solidFill>
                   <a:schemeClr val="dk1"/>
                 </a:solidFill>
@@ -1505,7 +1493,7 @@
                 <a:latin typeface="+mn-lt"/>
                 <a:ea typeface="+mn-ea"/>
               </a:rPr>
-              <a:t>&lt;number&gt;</a:t>
+              <a:t>1</a:t>
             </a:fld>
             <a:endParaRPr lang="pt-BR" sz="1200" b="0" u="none" strike="noStrike">
               <a:solidFill>
@@ -1553,7 +1541,7 @@
         <p:spPr>
           <a:xfrm>
             <a:off x="685800" y="1143000"/>
-            <a:ext cx="5486040" cy="3085920"/>
+            <a:ext cx="5485680" cy="3085560"/>
           </a:xfrm>
           <a:prstGeom prst="rect">
             <a:avLst/>
@@ -1576,7 +1564,7 @@
         <p:spPr>
           <a:xfrm>
             <a:off x="685800" y="4400640"/>
-            <a:ext cx="5486040" cy="3600000"/>
+            <a:ext cx="5485680" cy="3599640"/>
           </a:xfrm>
           <a:prstGeom prst="rect">
             <a:avLst/>
@@ -1596,9 +1584,12 @@
                 <a:spcPct val="100000"/>
               </a:lnSpc>
               <a:buNone/>
-            </a:pPr>
-            <a:r>
-              <a:rPr lang="en-US" sz="2000" b="0" u="none" strike="noStrike">
+              <a:tabLst>
+                <a:tab pos="0" algn="l"/>
+              </a:tabLst>
+            </a:pPr>
+            <a:r>
+              <a:rPr lang="pt-BR" sz="2000" b="0" u="none" strike="noStrike">
                 <a:solidFill>
                   <a:srgbClr val="000000"/>
                 </a:solidFill>
@@ -1632,7 +1623,7 @@
         <p:spPr>
           <a:xfrm>
             <a:off x="3884760" y="8685360"/>
-            <a:ext cx="2971440" cy="458280"/>
+            <a:ext cx="2971080" cy="457920"/>
           </a:xfrm>
           <a:prstGeom prst="rect">
             <a:avLst/>
@@ -1652,7 +1643,10 @@
                 <a:spcPct val="100000"/>
               </a:lnSpc>
               <a:buNone/>
-              <a:defRPr lang="en-US" sz="1200" b="0" u="none" strike="noStrike">
+              <a:tabLst>
+                <a:tab pos="0" algn="l"/>
+              </a:tabLst>
+              <a:defRPr lang="pt-BR" sz="1200" b="0" u="none" strike="noStrike">
                 <a:solidFill>
                   <a:schemeClr val="dk1"/>
                 </a:solidFill>
@@ -1669,9 +1663,12 @@
                 <a:spcPct val="100000"/>
               </a:lnSpc>
               <a:buNone/>
-            </a:pPr>
-            <a:fld id="{BA5890CB-A561-474F-A145-5D5CA32F440C}" type="slidenum">
-              <a:rPr lang="en-US" sz="1200" b="0" u="none" strike="noStrike">
+              <a:tabLst>
+                <a:tab pos="0" algn="l"/>
+              </a:tabLst>
+            </a:pPr>
+            <a:fld id="{53D35C8A-3CD4-4D4A-98A9-EE32F23EED71}" type="slidenum">
+              <a:rPr lang="pt-BR" sz="1200" b="0" u="none" strike="noStrike">
                 <a:solidFill>
                   <a:schemeClr val="dk1"/>
                 </a:solidFill>
@@ -1680,7 +1677,7 @@
                 <a:latin typeface="+mn-lt"/>
                 <a:ea typeface="+mn-ea"/>
               </a:rPr>
-              <a:t>&lt;number&gt;</a:t>
+              <a:t>1</a:t>
             </a:fld>
             <a:endParaRPr lang="pt-BR" sz="1200" b="0" u="none" strike="noStrike">
               <a:solidFill>
@@ -1728,7 +1725,7 @@
         <p:spPr>
           <a:xfrm>
             <a:off x="685800" y="1143000"/>
-            <a:ext cx="5486040" cy="3085920"/>
+            <a:ext cx="5485680" cy="3085560"/>
           </a:xfrm>
           <a:prstGeom prst="rect">
             <a:avLst/>
@@ -1751,7 +1748,7 @@
         <p:spPr>
           <a:xfrm>
             <a:off x="685800" y="4400640"/>
-            <a:ext cx="5486040" cy="3600000"/>
+            <a:ext cx="5485680" cy="3599640"/>
           </a:xfrm>
           <a:prstGeom prst="rect">
             <a:avLst/>
@@ -1793,7 +1790,7 @@
         <p:spPr>
           <a:xfrm>
             <a:off x="3884760" y="8685360"/>
-            <a:ext cx="2971440" cy="458280"/>
+            <a:ext cx="2971080" cy="457920"/>
           </a:xfrm>
           <a:prstGeom prst="rect">
             <a:avLst/>
@@ -1813,7 +1810,10 @@
                 <a:spcPct val="100000"/>
               </a:lnSpc>
               <a:buNone/>
-              <a:defRPr lang="en-US" sz="1200" b="0" u="none" strike="noStrike">
+              <a:tabLst>
+                <a:tab pos="0" algn="l"/>
+              </a:tabLst>
+              <a:defRPr lang="pt-BR" sz="1200" b="0" u="none" strike="noStrike">
                 <a:solidFill>
                   <a:schemeClr val="dk1"/>
                 </a:solidFill>
@@ -1830,9 +1830,12 @@
                 <a:spcPct val="100000"/>
               </a:lnSpc>
               <a:buNone/>
-            </a:pPr>
-            <a:fld id="{52F1A227-5BBF-4FD4-9EF2-1D66ACB9B0CF}" type="slidenum">
-              <a:rPr lang="en-US" sz="1200" b="0" u="none" strike="noStrike">
+              <a:tabLst>
+                <a:tab pos="0" algn="l"/>
+              </a:tabLst>
+            </a:pPr>
+            <a:fld id="{30C9B0CA-B372-4F39-957E-67C24F03D663}" type="slidenum">
+              <a:rPr lang="pt-BR" sz="1200" b="0" u="none" strike="noStrike">
                 <a:solidFill>
                   <a:schemeClr val="dk1"/>
                 </a:solidFill>
@@ -1889,7 +1892,7 @@
         <p:spPr>
           <a:xfrm>
             <a:off x="685800" y="1143000"/>
-            <a:ext cx="5486040" cy="3085920"/>
+            <a:ext cx="5485680" cy="3085560"/>
           </a:xfrm>
           <a:prstGeom prst="rect">
             <a:avLst/>
@@ -1912,7 +1915,7 @@
         <p:spPr>
           <a:xfrm>
             <a:off x="685800" y="4400640"/>
-            <a:ext cx="5486040" cy="3600000"/>
+            <a:ext cx="5485680" cy="3599640"/>
           </a:xfrm>
           <a:prstGeom prst="rect">
             <a:avLst/>
@@ -1932,9 +1935,12 @@
                 <a:spcPct val="100000"/>
               </a:lnSpc>
               <a:buNone/>
-            </a:pPr>
-            <a:r>
-              <a:rPr lang="en-US" sz="2000" b="0" u="none" strike="noStrike">
+              <a:tabLst>
+                <a:tab pos="0" algn="l"/>
+              </a:tabLst>
+            </a:pPr>
+            <a:r>
+              <a:rPr lang="pt-BR" sz="2000" b="0" u="none" strike="noStrike">
                 <a:solidFill>
                   <a:srgbClr val="000000"/>
                 </a:solidFill>
@@ -1968,7 +1974,7 @@
         <p:spPr>
           <a:xfrm>
             <a:off x="3884760" y="8685360"/>
-            <a:ext cx="2971440" cy="458280"/>
+            <a:ext cx="2971080" cy="457920"/>
           </a:xfrm>
           <a:prstGeom prst="rect">
             <a:avLst/>
@@ -1988,7 +1994,10 @@
                 <a:spcPct val="100000"/>
               </a:lnSpc>
               <a:buNone/>
-              <a:defRPr lang="en-US" sz="1200" b="0" u="none" strike="noStrike">
+              <a:tabLst>
+                <a:tab pos="0" algn="l"/>
+              </a:tabLst>
+              <a:defRPr lang="pt-BR" sz="1200" b="0" u="none" strike="noStrike">
                 <a:solidFill>
                   <a:schemeClr val="dk1"/>
                 </a:solidFill>
@@ -2005,9 +2014,12 @@
                 <a:spcPct val="100000"/>
               </a:lnSpc>
               <a:buNone/>
-            </a:pPr>
-            <a:fld id="{917529DC-96B1-4C83-824F-3DDAA93AA940}" type="slidenum">
-              <a:rPr lang="en-US" sz="1200" b="0" u="none" strike="noStrike">
+              <a:tabLst>
+                <a:tab pos="0" algn="l"/>
+              </a:tabLst>
+            </a:pPr>
+            <a:fld id="{3C0F3271-0007-46FD-B2AE-932BED389825}" type="slidenum">
+              <a:rPr lang="pt-BR" sz="1200" b="0" u="none" strike="noStrike">
                 <a:solidFill>
                   <a:schemeClr val="dk1"/>
                 </a:solidFill>
@@ -2016,7 +2028,7 @@
                 <a:latin typeface="+mn-lt"/>
                 <a:ea typeface="+mn-ea"/>
               </a:rPr>
-              <a:t>&lt;number&gt;</a:t>
+              <a:t>1</a:t>
             </a:fld>
             <a:endParaRPr lang="pt-BR" sz="1200" b="0" u="none" strike="noStrike">
               <a:solidFill>
@@ -2064,7 +2076,7 @@
         <p:spPr>
           <a:xfrm>
             <a:off x="685800" y="1143000"/>
-            <a:ext cx="5486040" cy="3085920"/>
+            <a:ext cx="5485680" cy="3085560"/>
           </a:xfrm>
           <a:prstGeom prst="rect">
             <a:avLst/>
@@ -2087,7 +2099,7 @@
         <p:spPr>
           <a:xfrm>
             <a:off x="685800" y="4400640"/>
-            <a:ext cx="5486040" cy="3600000"/>
+            <a:ext cx="5485680" cy="3599640"/>
           </a:xfrm>
           <a:prstGeom prst="rect">
             <a:avLst/>
@@ -2107,9 +2119,12 @@
                 <a:spcPct val="100000"/>
               </a:lnSpc>
               <a:buNone/>
-            </a:pPr>
-            <a:r>
-              <a:rPr lang="en-US" sz="2000" b="0" u="none" strike="noStrike">
+              <a:tabLst>
+                <a:tab pos="0" algn="l"/>
+              </a:tabLst>
+            </a:pPr>
+            <a:r>
+              <a:rPr lang="pt-BR" sz="2000" b="0" u="none" strike="noStrike">
                 <a:solidFill>
                   <a:srgbClr val="000000"/>
                 </a:solidFill>
@@ -2143,7 +2158,7 @@
         <p:spPr>
           <a:xfrm>
             <a:off x="3884760" y="8685360"/>
-            <a:ext cx="2971440" cy="458280"/>
+            <a:ext cx="2971080" cy="457920"/>
           </a:xfrm>
           <a:prstGeom prst="rect">
             <a:avLst/>
@@ -2163,7 +2178,10 @@
                 <a:spcPct val="100000"/>
               </a:lnSpc>
               <a:buNone/>
-              <a:defRPr lang="en-US" sz="1200" b="0" u="none" strike="noStrike">
+              <a:tabLst>
+                <a:tab pos="0" algn="l"/>
+              </a:tabLst>
+              <a:defRPr lang="pt-BR" sz="1200" b="0" u="none" strike="noStrike">
                 <a:solidFill>
                   <a:schemeClr val="dk1"/>
                 </a:solidFill>
@@ -2180,9 +2198,12 @@
                 <a:spcPct val="100000"/>
               </a:lnSpc>
               <a:buNone/>
-            </a:pPr>
-            <a:fld id="{C3562841-8B01-4F02-ADE1-3B5E510AD193}" type="slidenum">
-              <a:rPr lang="en-US" sz="1200" b="0" u="none" strike="noStrike">
+              <a:tabLst>
+                <a:tab pos="0" algn="l"/>
+              </a:tabLst>
+            </a:pPr>
+            <a:fld id="{59B6C602-B6F5-4D55-B6D0-C481DE221947}" type="slidenum">
+              <a:rPr lang="pt-BR" sz="1200" b="0" u="none" strike="noStrike">
                 <a:solidFill>
                   <a:schemeClr val="dk1"/>
                 </a:solidFill>
@@ -2191,7 +2212,7 @@
                 <a:latin typeface="+mn-lt"/>
                 <a:ea typeface="+mn-ea"/>
               </a:rPr>
-              <a:t>&lt;number&gt;</a:t>
+              <a:t>1</a:t>
             </a:fld>
             <a:endParaRPr lang="pt-BR" sz="1200" b="0" u="none" strike="noStrike">
               <a:solidFill>
@@ -2239,7 +2260,7 @@
         <p:spPr>
           <a:xfrm>
             <a:off x="685800" y="1143000"/>
-            <a:ext cx="5486040" cy="3085920"/>
+            <a:ext cx="5485680" cy="3085560"/>
           </a:xfrm>
           <a:prstGeom prst="rect">
             <a:avLst/>
@@ -2262,7 +2283,7 @@
         <p:spPr>
           <a:xfrm>
             <a:off x="685800" y="4400640"/>
-            <a:ext cx="5486040" cy="3600000"/>
+            <a:ext cx="5485680" cy="3599640"/>
           </a:xfrm>
           <a:prstGeom prst="rect">
             <a:avLst/>
@@ -2282,9 +2303,12 @@
                 <a:spcPct val="100000"/>
               </a:lnSpc>
               <a:buNone/>
-            </a:pPr>
-            <a:r>
-              <a:rPr lang="en-US" sz="2000" b="0" u="none" strike="noStrike">
+              <a:tabLst>
+                <a:tab pos="0" algn="l"/>
+              </a:tabLst>
+            </a:pPr>
+            <a:r>
+              <a:rPr lang="pt-BR" sz="2000" b="0" u="none" strike="noStrike">
                 <a:solidFill>
                   <a:srgbClr val="000000"/>
                 </a:solidFill>
@@ -2318,7 +2342,7 @@
         <p:spPr>
           <a:xfrm>
             <a:off x="3884760" y="8685360"/>
-            <a:ext cx="2971440" cy="458280"/>
+            <a:ext cx="2971080" cy="457920"/>
           </a:xfrm>
           <a:prstGeom prst="rect">
             <a:avLst/>
@@ -2338,7 +2362,10 @@
                 <a:spcPct val="100000"/>
               </a:lnSpc>
               <a:buNone/>
-              <a:defRPr lang="en-US" sz="1200" b="0" u="none" strike="noStrike">
+              <a:tabLst>
+                <a:tab pos="0" algn="l"/>
+              </a:tabLst>
+              <a:defRPr lang="pt-BR" sz="1200" b="0" u="none" strike="noStrike">
                 <a:solidFill>
                   <a:schemeClr val="dk1"/>
                 </a:solidFill>
@@ -2355,9 +2382,12 @@
                 <a:spcPct val="100000"/>
               </a:lnSpc>
               <a:buNone/>
-            </a:pPr>
-            <a:fld id="{D18A94FB-2E99-4EC4-9999-FD9002CF456B}" type="slidenum">
-              <a:rPr lang="en-US" sz="1200" b="0" u="none" strike="noStrike">
+              <a:tabLst>
+                <a:tab pos="0" algn="l"/>
+              </a:tabLst>
+            </a:pPr>
+            <a:fld id="{55C64262-909F-412B-AE3C-B05B9C8856D5}" type="slidenum">
+              <a:rPr lang="pt-BR" sz="1200" b="0" u="none" strike="noStrike">
                 <a:solidFill>
                   <a:schemeClr val="dk1"/>
                 </a:solidFill>
@@ -2366,7 +2396,7 @@
                 <a:latin typeface="+mn-lt"/>
                 <a:ea typeface="+mn-ea"/>
               </a:rPr>
-              <a:t>&lt;number&gt;</a:t>
+              <a:t>1</a:t>
             </a:fld>
             <a:endParaRPr lang="pt-BR" sz="1200" b="0" u="none" strike="noStrike">
               <a:solidFill>
@@ -2414,7 +2444,7 @@
         <p:spPr>
           <a:xfrm>
             <a:off x="685800" y="1143000"/>
-            <a:ext cx="5486040" cy="3085920"/>
+            <a:ext cx="5485680" cy="3085560"/>
           </a:xfrm>
           <a:prstGeom prst="rect">
             <a:avLst/>
@@ -2437,7 +2467,7 @@
         <p:spPr>
           <a:xfrm>
             <a:off x="685800" y="4400640"/>
-            <a:ext cx="5486040" cy="3600000"/>
+            <a:ext cx="5485680" cy="3599640"/>
           </a:xfrm>
           <a:prstGeom prst="rect">
             <a:avLst/>
@@ -2457,9 +2487,12 @@
                 <a:spcPct val="100000"/>
               </a:lnSpc>
               <a:buNone/>
-            </a:pPr>
-            <a:r>
-              <a:rPr lang="en-US" sz="2000" b="0" u="none" strike="noStrike">
+              <a:tabLst>
+                <a:tab pos="0" algn="l"/>
+              </a:tabLst>
+            </a:pPr>
+            <a:r>
+              <a:rPr lang="pt-BR" sz="2000" b="0" u="none" strike="noStrike">
                 <a:solidFill>
                   <a:srgbClr val="000000"/>
                 </a:solidFill>
@@ -2493,7 +2526,7 @@
         <p:spPr>
           <a:xfrm>
             <a:off x="3884760" y="8685360"/>
-            <a:ext cx="2971440" cy="458280"/>
+            <a:ext cx="2971080" cy="457920"/>
           </a:xfrm>
           <a:prstGeom prst="rect">
             <a:avLst/>
@@ -2513,7 +2546,10 @@
                 <a:spcPct val="100000"/>
               </a:lnSpc>
               <a:buNone/>
-              <a:defRPr lang="en-US" sz="1200" b="0" u="none" strike="noStrike">
+              <a:tabLst>
+                <a:tab pos="0" algn="l"/>
+              </a:tabLst>
+              <a:defRPr lang="pt-BR" sz="1200" b="0" u="none" strike="noStrike">
                 <a:solidFill>
                   <a:schemeClr val="dk1"/>
                 </a:solidFill>
@@ -2530,9 +2566,12 @@
                 <a:spcPct val="100000"/>
               </a:lnSpc>
               <a:buNone/>
-            </a:pPr>
-            <a:fld id="{87E5D953-C737-4F0E-A4F3-BC0D0B9C8A25}" type="slidenum">
-              <a:rPr lang="en-US" sz="1200" b="0" u="none" strike="noStrike">
+              <a:tabLst>
+                <a:tab pos="0" algn="l"/>
+              </a:tabLst>
+            </a:pPr>
+            <a:fld id="{CA9E2F85-45BA-405A-A2A8-C33C65A3CA41}" type="slidenum">
+              <a:rPr lang="pt-BR" sz="1200" b="0" u="none" strike="noStrike">
                 <a:solidFill>
                   <a:schemeClr val="dk1"/>
                 </a:solidFill>
@@ -2541,7 +2580,7 @@
                 <a:latin typeface="+mn-lt"/>
                 <a:ea typeface="+mn-ea"/>
               </a:rPr>
-              <a:t>&lt;number&gt;</a:t>
+              <a:t>1</a:t>
             </a:fld>
             <a:endParaRPr lang="pt-BR" sz="1200" b="0" u="none" strike="noStrike">
               <a:solidFill>
@@ -2589,7 +2628,7 @@
         <p:spPr>
           <a:xfrm>
             <a:off x="685800" y="1143000"/>
-            <a:ext cx="5486040" cy="3085920"/>
+            <a:ext cx="5485680" cy="3085560"/>
           </a:xfrm>
           <a:prstGeom prst="rect">
             <a:avLst/>
@@ -2612,7 +2651,7 @@
         <p:spPr>
           <a:xfrm>
             <a:off x="685800" y="4400640"/>
-            <a:ext cx="5486040" cy="3600000"/>
+            <a:ext cx="5485680" cy="3599640"/>
           </a:xfrm>
           <a:prstGeom prst="rect">
             <a:avLst/>
@@ -2632,9 +2671,12 @@
                 <a:spcPct val="100000"/>
               </a:lnSpc>
               <a:buNone/>
-            </a:pPr>
-            <a:r>
-              <a:rPr lang="en-US" sz="2000" b="0" u="none" strike="noStrike">
+              <a:tabLst>
+                <a:tab pos="0" algn="l"/>
+              </a:tabLst>
+            </a:pPr>
+            <a:r>
+              <a:rPr lang="pt-BR" sz="2000" b="0" u="none" strike="noStrike">
                 <a:solidFill>
                   <a:srgbClr val="000000"/>
                 </a:solidFill>
@@ -2668,7 +2710,7 @@
         <p:spPr>
           <a:xfrm>
             <a:off x="3884760" y="8685360"/>
-            <a:ext cx="2971440" cy="458280"/>
+            <a:ext cx="2971080" cy="457920"/>
           </a:xfrm>
           <a:prstGeom prst="rect">
             <a:avLst/>
@@ -2688,7 +2730,10 @@
                 <a:spcPct val="100000"/>
               </a:lnSpc>
               <a:buNone/>
-              <a:defRPr lang="en-US" sz="1200" b="0" u="none" strike="noStrike">
+              <a:tabLst>
+                <a:tab pos="0" algn="l"/>
+              </a:tabLst>
+              <a:defRPr lang="pt-BR" sz="1200" b="0" u="none" strike="noStrike">
                 <a:solidFill>
                   <a:schemeClr val="dk1"/>
                 </a:solidFill>
@@ -2705,9 +2750,12 @@
                 <a:spcPct val="100000"/>
               </a:lnSpc>
               <a:buNone/>
-            </a:pPr>
-            <a:fld id="{026BCF59-B675-49E3-A93B-E9E496966099}" type="slidenum">
-              <a:rPr lang="en-US" sz="1200" b="0" u="none" strike="noStrike">
+              <a:tabLst>
+                <a:tab pos="0" algn="l"/>
+              </a:tabLst>
+            </a:pPr>
+            <a:fld id="{DF77A8AC-B577-4F08-B8B7-B284782B63E8}" type="slidenum">
+              <a:rPr lang="pt-BR" sz="1200" b="0" u="none" strike="noStrike">
                 <a:solidFill>
                   <a:schemeClr val="dk1"/>
                 </a:solidFill>
@@ -2716,7 +2764,7 @@
                 <a:latin typeface="+mn-lt"/>
                 <a:ea typeface="+mn-ea"/>
               </a:rPr>
-              <a:t>&lt;number&gt;</a:t>
+              <a:t>1</a:t>
             </a:fld>
             <a:endParaRPr lang="pt-BR" sz="1200" b="0" u="none" strike="noStrike">
               <a:solidFill>
@@ -2764,7 +2812,7 @@
         <p:spPr>
           <a:xfrm>
             <a:off x="685800" y="1143000"/>
-            <a:ext cx="5486040" cy="3085920"/>
+            <a:ext cx="5485680" cy="3085560"/>
           </a:xfrm>
           <a:prstGeom prst="rect">
             <a:avLst/>
@@ -2787,7 +2835,7 @@
         <p:spPr>
           <a:xfrm>
             <a:off x="685800" y="4400640"/>
-            <a:ext cx="5486040" cy="3600000"/>
+            <a:ext cx="5485680" cy="3599640"/>
           </a:xfrm>
           <a:prstGeom prst="rect">
             <a:avLst/>
@@ -2807,9 +2855,12 @@
                 <a:spcPct val="100000"/>
               </a:lnSpc>
               <a:buNone/>
-            </a:pPr>
-            <a:r>
-              <a:rPr lang="en-US" sz="2000" b="0" u="none" strike="noStrike">
+              <a:tabLst>
+                <a:tab pos="0" algn="l"/>
+              </a:tabLst>
+            </a:pPr>
+            <a:r>
+              <a:rPr lang="pt-BR" sz="2000" b="0" u="none" strike="noStrike">
                 <a:solidFill>
                   <a:srgbClr val="000000"/>
                 </a:solidFill>
@@ -2843,7 +2894,7 @@
         <p:spPr>
           <a:xfrm>
             <a:off x="3884760" y="8685360"/>
-            <a:ext cx="2971440" cy="458280"/>
+            <a:ext cx="2971080" cy="457920"/>
           </a:xfrm>
           <a:prstGeom prst="rect">
             <a:avLst/>
@@ -2863,7 +2914,10 @@
                 <a:spcPct val="100000"/>
               </a:lnSpc>
               <a:buNone/>
-              <a:defRPr lang="en-US" sz="1200" b="0" u="none" strike="noStrike">
+              <a:tabLst>
+                <a:tab pos="0" algn="l"/>
+              </a:tabLst>
+              <a:defRPr lang="pt-BR" sz="1200" b="0" u="none" strike="noStrike">
                 <a:solidFill>
                   <a:schemeClr val="dk1"/>
                 </a:solidFill>
@@ -2880,9 +2934,12 @@
                 <a:spcPct val="100000"/>
               </a:lnSpc>
               <a:buNone/>
-            </a:pPr>
-            <a:fld id="{4B71ADCC-7107-4F19-AAC2-8AEF139FDF8D}" type="slidenum">
-              <a:rPr lang="en-US" sz="1200" b="0" u="none" strike="noStrike">
+              <a:tabLst>
+                <a:tab pos="0" algn="l"/>
+              </a:tabLst>
+            </a:pPr>
+            <a:fld id="{392964E5-51D5-420E-B803-E3034AA017D2}" type="slidenum">
+              <a:rPr lang="pt-BR" sz="1200" b="0" u="none" strike="noStrike">
                 <a:solidFill>
                   <a:schemeClr val="dk1"/>
                 </a:solidFill>
@@ -2891,7 +2948,7 @@
                 <a:latin typeface="+mn-lt"/>
                 <a:ea typeface="+mn-ea"/>
               </a:rPr>
-              <a:t>&lt;number&gt;</a:t>
+              <a:t>1</a:t>
             </a:fld>
             <a:endParaRPr lang="pt-BR" sz="1200" b="0" u="none" strike="noStrike">
               <a:solidFill>
@@ -2939,7 +2996,7 @@
         <p:spPr>
           <a:xfrm>
             <a:off x="685800" y="1143000"/>
-            <a:ext cx="5486040" cy="3085920"/>
+            <a:ext cx="5485680" cy="3085560"/>
           </a:xfrm>
           <a:prstGeom prst="rect">
             <a:avLst/>
@@ -2962,7 +3019,7 @@
         <p:spPr>
           <a:xfrm>
             <a:off x="685800" y="4400640"/>
-            <a:ext cx="5486040" cy="3600000"/>
+            <a:ext cx="5485680" cy="3599640"/>
           </a:xfrm>
           <a:prstGeom prst="rect">
             <a:avLst/>
@@ -2982,9 +3039,12 @@
                 <a:spcPct val="100000"/>
               </a:lnSpc>
               <a:buNone/>
-            </a:pPr>
-            <a:r>
-              <a:rPr lang="en-US" sz="2000" b="0" u="none" strike="noStrike">
+              <a:tabLst>
+                <a:tab pos="0" algn="l"/>
+              </a:tabLst>
+            </a:pPr>
+            <a:r>
+              <a:rPr lang="pt-BR" sz="2000" b="0" u="none" strike="noStrike">
                 <a:solidFill>
                   <a:srgbClr val="000000"/>
                 </a:solidFill>
@@ -3018,7 +3078,7 @@
         <p:spPr>
           <a:xfrm>
             <a:off x="3884760" y="8685360"/>
-            <a:ext cx="2971440" cy="458280"/>
+            <a:ext cx="2971080" cy="457920"/>
           </a:xfrm>
           <a:prstGeom prst="rect">
             <a:avLst/>
@@ -3038,7 +3098,10 @@
                 <a:spcPct val="100000"/>
               </a:lnSpc>
               <a:buNone/>
-              <a:defRPr lang="en-US" sz="1200" b="0" u="none" strike="noStrike">
+              <a:tabLst>
+                <a:tab pos="0" algn="l"/>
+              </a:tabLst>
+              <a:defRPr lang="pt-BR" sz="1200" b="0" u="none" strike="noStrike">
                 <a:solidFill>
                   <a:schemeClr val="dk1"/>
                 </a:solidFill>
@@ -3055,9 +3118,12 @@
                 <a:spcPct val="100000"/>
               </a:lnSpc>
               <a:buNone/>
-            </a:pPr>
-            <a:fld id="{57E3554D-58C8-43A4-A657-D87B512E4027}" type="slidenum">
-              <a:rPr lang="en-US" sz="1200" b="0" u="none" strike="noStrike">
+              <a:tabLst>
+                <a:tab pos="0" algn="l"/>
+              </a:tabLst>
+            </a:pPr>
+            <a:fld id="{02941F3D-64B2-4AAA-AF81-F3A30904CD69}" type="slidenum">
+              <a:rPr lang="pt-BR" sz="1200" b="0" u="none" strike="noStrike">
                 <a:solidFill>
                   <a:schemeClr val="dk1"/>
                 </a:solidFill>
@@ -3066,7 +3132,7 @@
                 <a:latin typeface="+mn-lt"/>
                 <a:ea typeface="+mn-ea"/>
               </a:rPr>
-              <a:t>&lt;number&gt;</a:t>
+              <a:t>1</a:t>
             </a:fld>
             <a:endParaRPr lang="pt-BR" sz="1200" b="0" u="none" strike="noStrike">
               <a:solidFill>
@@ -3114,7 +3180,7 @@
         <p:spPr>
           <a:xfrm>
             <a:off x="685800" y="1143000"/>
-            <a:ext cx="5486040" cy="3085920"/>
+            <a:ext cx="5485680" cy="3085560"/>
           </a:xfrm>
           <a:prstGeom prst="rect">
             <a:avLst/>
@@ -3137,7 +3203,7 @@
         <p:spPr>
           <a:xfrm>
             <a:off x="685800" y="4400640"/>
-            <a:ext cx="5486040" cy="3600000"/>
+            <a:ext cx="5485680" cy="3599640"/>
           </a:xfrm>
           <a:prstGeom prst="rect">
             <a:avLst/>
@@ -3157,9 +3223,12 @@
                 <a:spcPct val="100000"/>
               </a:lnSpc>
               <a:buNone/>
-            </a:pPr>
-            <a:r>
-              <a:rPr lang="en-US" sz="2000" b="0" u="none" strike="noStrike">
+              <a:tabLst>
+                <a:tab pos="0" algn="l"/>
+              </a:tabLst>
+            </a:pPr>
+            <a:r>
+              <a:rPr lang="pt-BR" sz="2000" b="0" u="none" strike="noStrike">
                 <a:solidFill>
                   <a:srgbClr val="000000"/>
                 </a:solidFill>
@@ -3193,7 +3262,7 @@
         <p:spPr>
           <a:xfrm>
             <a:off x="3884760" y="8685360"/>
-            <a:ext cx="2971440" cy="458280"/>
+            <a:ext cx="2971080" cy="457920"/>
           </a:xfrm>
           <a:prstGeom prst="rect">
             <a:avLst/>
@@ -3213,7 +3282,10 @@
                 <a:spcPct val="100000"/>
               </a:lnSpc>
               <a:buNone/>
-              <a:defRPr lang="en-US" sz="1200" b="0" u="none" strike="noStrike">
+              <a:tabLst>
+                <a:tab pos="0" algn="l"/>
+              </a:tabLst>
+              <a:defRPr lang="pt-BR" sz="1200" b="0" u="none" strike="noStrike">
                 <a:solidFill>
                   <a:schemeClr val="dk1"/>
                 </a:solidFill>
@@ -3230,9 +3302,12 @@
                 <a:spcPct val="100000"/>
               </a:lnSpc>
               <a:buNone/>
-            </a:pPr>
-            <a:fld id="{23D3843A-E387-4308-8546-D31E837B6B8F}" type="slidenum">
-              <a:rPr lang="en-US" sz="1200" b="0" u="none" strike="noStrike">
+              <a:tabLst>
+                <a:tab pos="0" algn="l"/>
+              </a:tabLst>
+            </a:pPr>
+            <a:fld id="{7F636325-6951-430C-96AE-F39021E546B3}" type="slidenum">
+              <a:rPr lang="pt-BR" sz="1200" b="0" u="none" strike="noStrike">
                 <a:solidFill>
                   <a:schemeClr val="dk1"/>
                 </a:solidFill>
@@ -3241,7 +3316,7 @@
                 <a:latin typeface="+mn-lt"/>
                 <a:ea typeface="+mn-ea"/>
               </a:rPr>
-              <a:t>&lt;number&gt;</a:t>
+              <a:t>1</a:t>
             </a:fld>
             <a:endParaRPr lang="pt-BR" sz="1200" b="0" u="none" strike="noStrike">
               <a:solidFill>
@@ -3278,6 +3353,9 @@
       </p:grpSpPr>
     </p:spTree>
   </p:cSld>
+  <p:clrMapOvr>
+    <a:masterClrMapping/>
+  </p:clrMapOvr>
 </p:sldLayout>
 </file>
 
@@ -3335,6 +3413,9 @@
           <a:lstStyle>
             <a:lvl1pPr indent="0" algn="l">
               <a:buNone/>
+              <a:tabLst>
+                <a:tab pos="0" algn="l"/>
+              </a:tabLst>
               <a:defRPr lang="pt-BR" sz="1800" b="0" u="none" strike="noStrike">
                 <a:solidFill>
                   <a:schemeClr val="dk1"/>
@@ -3348,6 +3429,9 @@
           <a:p>
             <a:pPr indent="0" algn="l">
               <a:buNone/>
+              <a:tabLst>
+                <a:tab pos="0" algn="l"/>
+              </a:tabLst>
             </a:pPr>
             <a:r>
               <a:rPr lang="pt-BR" sz="1800" b="0" u="none" strike="noStrike">
@@ -3534,7 +3618,7 @@
             </a:lvl7pPr>
           </a:lstStyle>
           <a:p>
-            <a:pPr marL="432000" indent="-324000" algn="l">
+            <a:pPr indent="-324000" algn="l">
               <a:spcBef>
                 <a:spcPts val="1417"/>
               </a:spcBef>
@@ -3794,7 +3878,7 @@
         <p:spPr>
           <a:xfrm rot="5400000">
             <a:off x="0" y="0"/>
-            <a:ext cx="4480200" cy="4480200"/>
+            <a:ext cx="4479840" cy="4479840"/>
           </a:xfrm>
           <a:prstGeom prst="rtTriangle">
             <a:avLst/>
@@ -3820,6 +3904,7 @@
             <a:noAutofit/>
           </a:bodyPr>
           <a:p>
+            <a:pPr/>
             <a:endParaRPr lang="pt-BR" sz="1800" b="0" u="none" strike="noStrike">
               <a:solidFill>
                 <a:srgbClr val="FFFFFF"/>
@@ -3839,8 +3924,8 @@
         </p:nvSpPr>
         <p:spPr>
           <a:xfrm rot="10800000">
-            <a:off x="9117000" y="360"/>
-            <a:ext cx="3081240" cy="3081240"/>
+            <a:off x="9117360" y="720"/>
+            <a:ext cx="3080880" cy="3080880"/>
           </a:xfrm>
           <a:prstGeom prst="rtTriangle">
             <a:avLst/>
@@ -3866,6 +3951,7 @@
             <a:noAutofit/>
           </a:bodyPr>
           <a:p>
+            <a:pPr/>
             <a:endParaRPr lang="pt-BR" sz="1800" b="0" u="none" strike="noStrike">
               <a:solidFill>
                 <a:srgbClr val="000000"/>
@@ -3890,7 +3976,7 @@
         <p:spPr>
           <a:xfrm>
             <a:off x="10954440" y="612720"/>
-            <a:ext cx="664560" cy="306720"/>
+            <a:ext cx="664200" cy="306360"/>
           </a:xfrm>
           <a:prstGeom prst="rect">
             <a:avLst/>
@@ -3914,7 +4000,7 @@
         <p:spPr>
           <a:xfrm>
             <a:off x="8961120" y="4507920"/>
-            <a:ext cx="2212560" cy="1572480"/>
+            <a:ext cx="2212200" cy="1572120"/>
           </a:xfrm>
           <a:prstGeom prst="rect">
             <a:avLst/>
@@ -3934,7 +4020,7 @@
         <p:spPr>
           <a:xfrm>
             <a:off x="567000" y="4114800"/>
-            <a:ext cx="7863480" cy="319680"/>
+            <a:ext cx="7863120" cy="319320"/>
           </a:xfrm>
           <a:prstGeom prst="rect">
             <a:avLst/>
@@ -3964,7 +4050,7 @@
               </a:tabLst>
             </a:pPr>
             <a:r>
-              <a:rPr lang="en-US" sz="1300" b="1" u="none" strike="noStrike">
+              <a:rPr lang="pt-BR" sz="1300" b="1" u="none" strike="noStrike">
                 <a:solidFill>
                   <a:srgbClr val="5A5A5A"/>
                 </a:solidFill>
@@ -3995,7 +4081,7 @@
         <p:spPr>
           <a:xfrm>
             <a:off x="567000" y="4480560"/>
-            <a:ext cx="7863480" cy="868320"/>
+            <a:ext cx="7863120" cy="867960"/>
           </a:xfrm>
           <a:prstGeom prst="rect">
             <a:avLst/>
@@ -4025,7 +4111,7 @@
               </a:tabLst>
             </a:pPr>
             <a:r>
-              <a:rPr lang="en-US" sz="3200" b="1" u="none" strike="noStrike">
+              <a:rPr lang="pt-BR" sz="3200" b="1" u="none" strike="noStrike">
                 <a:solidFill>
                   <a:srgbClr val="00A59A"/>
                 </a:solidFill>
@@ -4056,7 +4142,7 @@
         <p:spPr>
           <a:xfrm>
             <a:off x="567000" y="5349240"/>
-            <a:ext cx="7863480" cy="456840"/>
+            <a:ext cx="7863120" cy="456480"/>
           </a:xfrm>
           <a:prstGeom prst="rect">
             <a:avLst/>
@@ -4086,7 +4172,7 @@
               </a:tabLst>
             </a:pPr>
             <a:r>
-              <a:rPr lang="en-US" sz="1500" b="0" u="none" strike="noStrike">
+              <a:rPr lang="pt-BR" sz="1500" b="0" u="none" strike="noStrike">
                 <a:solidFill>
                   <a:srgbClr val="333333"/>
                 </a:solidFill>
@@ -4117,7 +4203,7 @@
         <p:spPr>
           <a:xfrm>
             <a:off x="567000" y="5806440"/>
-            <a:ext cx="7863480" cy="456840"/>
+            <a:ext cx="7863120" cy="456480"/>
           </a:xfrm>
           <a:prstGeom prst="rect">
             <a:avLst/>
@@ -4147,7 +4233,7 @@
               </a:tabLst>
             </a:pPr>
             <a:r>
-              <a:rPr lang="en-US" sz="1250" b="0" u="none" strike="noStrike">
+              <a:rPr lang="pt-BR" sz="1250" b="0" u="none" strike="noStrike">
                 <a:solidFill>
                   <a:srgbClr val="5A5A5A"/>
                 </a:solidFill>
@@ -4208,7 +4294,7 @@
         <p:spPr>
           <a:xfrm rot="5400000">
             <a:off x="0" y="0"/>
-            <a:ext cx="2514240" cy="2514240"/>
+            <a:ext cx="2513880" cy="2513880"/>
           </a:xfrm>
           <a:prstGeom prst="rtTriangle">
             <a:avLst/>
@@ -4234,6 +4320,7 @@
             <a:noAutofit/>
           </a:bodyPr>
           <a:p>
+            <a:pPr/>
             <a:endParaRPr lang="pt-BR" sz="1800" b="0" u="none" strike="noStrike">
               <a:solidFill>
                 <a:srgbClr val="FFFFFF"/>
@@ -4253,8 +4340,8 @@
         </p:nvSpPr>
         <p:spPr>
           <a:xfrm rot="10800000">
-            <a:off x="9391320" y="0"/>
-            <a:ext cx="2806920" cy="2806920"/>
+            <a:off x="9391680" y="0"/>
+            <a:ext cx="2806560" cy="2806560"/>
           </a:xfrm>
           <a:prstGeom prst="rtTriangle">
             <a:avLst/>
@@ -4280,6 +4367,7 @@
             <a:noAutofit/>
           </a:bodyPr>
           <a:p>
+            <a:pPr/>
             <a:endParaRPr lang="pt-BR" sz="1800" b="0" u="none" strike="noStrike">
               <a:solidFill>
                 <a:srgbClr val="000000"/>
@@ -4304,7 +4392,7 @@
         <p:spPr>
           <a:xfrm>
             <a:off x="10954440" y="612720"/>
-            <a:ext cx="664560" cy="306720"/>
+            <a:ext cx="664200" cy="306360"/>
           </a:xfrm>
           <a:prstGeom prst="rect">
             <a:avLst/>
@@ -4324,7 +4412,7 @@
         <p:spPr>
           <a:xfrm>
             <a:off x="1691640" y="749880"/>
-            <a:ext cx="8503560" cy="658080"/>
+            <a:ext cx="8503200" cy="657720"/>
           </a:xfrm>
           <a:prstGeom prst="rect">
             <a:avLst/>
@@ -4354,7 +4442,7 @@
               </a:tabLst>
             </a:pPr>
             <a:r>
-              <a:rPr lang="en-US" sz="2800" b="1" u="none" strike="noStrike">
+              <a:rPr lang="pt-BR" sz="2800" b="1" u="none" strike="noStrike">
                 <a:solidFill>
                   <a:srgbClr val="00A59A"/>
                 </a:solidFill>
@@ -4385,7 +4473,7 @@
         <p:spPr>
           <a:xfrm>
             <a:off x="1691640" y="1389960"/>
-            <a:ext cx="8503560" cy="328680"/>
+            <a:ext cx="8503200" cy="328320"/>
           </a:xfrm>
           <a:prstGeom prst="rect">
             <a:avLst/>
@@ -4415,7 +4503,7 @@
               </a:tabLst>
             </a:pPr>
             <a:r>
-              <a:rPr lang="en-US" sz="1300" b="0" i="1" u="none" strike="noStrike">
+              <a:rPr lang="pt-BR" sz="1300" b="0" i="1" u="none" strike="noStrike">
                 <a:solidFill>
                   <a:srgbClr val="5A5A5A"/>
                 </a:solidFill>
@@ -4446,7 +4534,7 @@
         <p:spPr>
           <a:xfrm>
             <a:off x="658440" y="2121480"/>
-            <a:ext cx="5257440" cy="3885840"/>
+            <a:ext cx="5257080" cy="3885480"/>
           </a:xfrm>
           <a:prstGeom prst="roundRect">
             <a:avLst>
@@ -4474,6 +4562,7 @@
             <a:noAutofit/>
           </a:bodyPr>
           <a:p>
+            <a:pPr/>
             <a:endParaRPr lang="pt-BR" sz="1800" b="0" u="none" strike="noStrike">
               <a:solidFill>
                 <a:srgbClr val="000000"/>
@@ -4494,7 +4583,7 @@
         <p:spPr>
           <a:xfrm>
             <a:off x="896040" y="2322720"/>
-            <a:ext cx="4781880" cy="402120"/>
+            <a:ext cx="4781520" cy="401760"/>
           </a:xfrm>
           <a:prstGeom prst="rect">
             <a:avLst/>
@@ -4524,7 +4613,7 @@
               </a:tabLst>
             </a:pPr>
             <a:r>
-              <a:rPr lang="en-US" sz="1600" b="1" u="none" strike="noStrike">
+              <a:rPr lang="pt-BR" sz="1600" b="1" u="none" strike="noStrike">
                 <a:solidFill>
                   <a:srgbClr val="00695F"/>
                 </a:solidFill>
@@ -4555,7 +4644,7 @@
         <p:spPr>
           <a:xfrm>
             <a:off x="896040" y="2834640"/>
-            <a:ext cx="4781880" cy="2971440"/>
+            <a:ext cx="4781520" cy="2971080"/>
           </a:xfrm>
           <a:prstGeom prst="rect">
             <a:avLst/>
@@ -4590,7 +4679,7 @@
               <a:buChar char=""/>
             </a:pPr>
             <a:r>
-              <a:rPr lang="en-US" sz="1250" b="0" u="none" strike="noStrike">
+              <a:rPr lang="pt-BR" sz="1250" b="0" u="none" strike="noStrike">
                 <a:solidFill>
                   <a:srgbClr val="333333"/>
                 </a:solidFill>
@@ -4625,7 +4714,7 @@
               <a:buChar char=""/>
             </a:pPr>
             <a:r>
-              <a:rPr lang="en-US" sz="1250" b="0" u="none" strike="noStrike">
+              <a:rPr lang="pt-BR" sz="1250" b="0" u="none" strike="noStrike">
                 <a:solidFill>
                   <a:srgbClr val="333333"/>
                 </a:solidFill>
@@ -4660,7 +4749,7 @@
               <a:buChar char=""/>
             </a:pPr>
             <a:r>
-              <a:rPr lang="en-US" sz="1250" b="0" u="none" strike="noStrike">
+              <a:rPr lang="pt-BR" sz="1250" b="0" u="none" strike="noStrike">
                 <a:solidFill>
                   <a:srgbClr val="333333"/>
                 </a:solidFill>
@@ -4695,7 +4784,7 @@
               <a:buChar char=""/>
             </a:pPr>
             <a:r>
-              <a:rPr lang="en-US" sz="1250" b="0" u="none" strike="noStrike">
+              <a:rPr lang="pt-BR" sz="1250" b="0" u="none" strike="noStrike">
                 <a:solidFill>
                   <a:srgbClr val="333333"/>
                 </a:solidFill>
@@ -4730,7 +4819,7 @@
               <a:buChar char=""/>
             </a:pPr>
             <a:r>
-              <a:rPr lang="en-US" sz="1250" b="0" u="none" strike="noStrike">
+              <a:rPr lang="pt-BR" sz="1250" b="0" u="none" strike="noStrike">
                 <a:solidFill>
                   <a:srgbClr val="333333"/>
                 </a:solidFill>
@@ -4761,7 +4850,7 @@
         <p:spPr>
           <a:xfrm>
             <a:off x="6272640" y="2121480"/>
-            <a:ext cx="5257440" cy="3885840"/>
+            <a:ext cx="5257080" cy="3885480"/>
           </a:xfrm>
           <a:prstGeom prst="roundRect">
             <a:avLst>
@@ -4789,6 +4878,7 @@
             <a:noAutofit/>
           </a:bodyPr>
           <a:p>
+            <a:pPr/>
             <a:endParaRPr lang="pt-BR" sz="1800" b="0" u="none" strike="noStrike">
               <a:solidFill>
                 <a:srgbClr val="000000"/>
@@ -4809,7 +4899,7 @@
         <p:spPr>
           <a:xfrm>
             <a:off x="6510600" y="2322720"/>
-            <a:ext cx="4781880" cy="402120"/>
+            <a:ext cx="4781520" cy="401760"/>
           </a:xfrm>
           <a:prstGeom prst="rect">
             <a:avLst/>
@@ -4839,7 +4929,7 @@
               </a:tabLst>
             </a:pPr>
             <a:r>
-              <a:rPr lang="en-US" sz="1600" b="1" u="none" strike="noStrike">
+              <a:rPr lang="pt-BR" sz="1600" b="1" u="none" strike="noStrike">
                 <a:solidFill>
                   <a:srgbClr val="00695F"/>
                 </a:solidFill>
@@ -4870,7 +4960,7 @@
         <p:spPr>
           <a:xfrm>
             <a:off x="6510600" y="2834640"/>
-            <a:ext cx="4781880" cy="2971440"/>
+            <a:ext cx="4781520" cy="2971080"/>
           </a:xfrm>
           <a:prstGeom prst="rect">
             <a:avLst/>
@@ -4905,7 +4995,7 @@
               <a:buChar char=""/>
             </a:pPr>
             <a:r>
-              <a:rPr lang="en-US" sz="1250" b="0" u="none" strike="noStrike">
+              <a:rPr lang="pt-BR" sz="1250" b="0" u="none" strike="noStrike">
                 <a:solidFill>
                   <a:srgbClr val="333333"/>
                 </a:solidFill>
@@ -4940,7 +5030,7 @@
               <a:buChar char=""/>
             </a:pPr>
             <a:r>
-              <a:rPr lang="en-US" sz="1250" b="0" u="none" strike="noStrike">
+              <a:rPr lang="pt-BR" sz="1250" b="0" u="none" strike="noStrike">
                 <a:solidFill>
                   <a:srgbClr val="333333"/>
                 </a:solidFill>
@@ -4975,7 +5065,7 @@
               <a:buChar char=""/>
             </a:pPr>
             <a:r>
-              <a:rPr lang="en-US" sz="1250" b="0" u="none" strike="noStrike">
+              <a:rPr lang="pt-BR" sz="1250" b="0" u="none" strike="noStrike">
                 <a:solidFill>
                   <a:srgbClr val="333333"/>
                 </a:solidFill>
@@ -5010,7 +5100,7 @@
               <a:buChar char=""/>
             </a:pPr>
             <a:r>
-              <a:rPr lang="en-US" sz="1250" b="0" u="none" strike="noStrike">
+              <a:rPr lang="pt-BR" sz="1250" b="0" u="none" strike="noStrike">
                 <a:solidFill>
                   <a:srgbClr val="333333"/>
                 </a:solidFill>
@@ -5045,7 +5135,7 @@
               <a:buChar char=""/>
             </a:pPr>
             <a:r>
-              <a:rPr lang="en-US" sz="1250" b="0" u="none" strike="noStrike">
+              <a:rPr lang="pt-BR" sz="1250" b="0" u="none" strike="noStrike">
                 <a:solidFill>
                   <a:srgbClr val="333333"/>
                 </a:solidFill>
@@ -5076,7 +5166,7 @@
         <p:spPr>
           <a:xfrm>
             <a:off x="548640" y="6419160"/>
-            <a:ext cx="8229240" cy="273960"/>
+            <a:ext cx="8228880" cy="273600"/>
           </a:xfrm>
           <a:prstGeom prst="rect">
             <a:avLst/>
@@ -5106,7 +5196,7 @@
               </a:tabLst>
             </a:pPr>
             <a:r>
-              <a:rPr lang="en-US" sz="900" b="0" u="none" strike="noStrike">
+              <a:rPr lang="pt-BR" sz="900" b="0" u="none" strike="noStrike">
                 <a:solidFill>
                   <a:srgbClr val="5A5A5A"/>
                 </a:solidFill>
@@ -5173,8 +5263,8 @@
         </p:nvSpPr>
         <p:spPr>
           <a:xfrm rot="10800000">
-            <a:off x="9391320" y="0"/>
-            <a:ext cx="2806920" cy="2806920"/>
+            <a:off x="9391680" y="0"/>
+            <a:ext cx="2806560" cy="2806560"/>
           </a:xfrm>
           <a:prstGeom prst="rtTriangle">
             <a:avLst/>
@@ -5200,6 +5290,7 @@
             <a:noAutofit/>
           </a:bodyPr>
           <a:p>
+            <a:pPr/>
             <a:endParaRPr lang="pt-BR" sz="1800" b="0" u="none" strike="noStrike">
               <a:solidFill>
                 <a:srgbClr val="000000"/>
@@ -5224,7 +5315,7 @@
         <p:spPr>
           <a:xfrm>
             <a:off x="10954440" y="612720"/>
-            <a:ext cx="664560" cy="306720"/>
+            <a:ext cx="664200" cy="306360"/>
           </a:xfrm>
           <a:prstGeom prst="rect">
             <a:avLst/>
@@ -5244,7 +5335,7 @@
         <p:spPr>
           <a:xfrm>
             <a:off x="914400" y="2331720"/>
-            <a:ext cx="7772040" cy="319680"/>
+            <a:ext cx="7771680" cy="319320"/>
           </a:xfrm>
           <a:prstGeom prst="rect">
             <a:avLst/>
@@ -5274,7 +5365,7 @@
               </a:tabLst>
             </a:pPr>
             <a:r>
-              <a:rPr lang="en-US" sz="1300" b="1" u="none" spc="300" strike="noStrike">
+              <a:rPr lang="pt-BR" sz="1300" b="1" u="none" spc="300" strike="noStrike">
                 <a:solidFill>
                   <a:srgbClr val="FFDA1A"/>
                 </a:solidFill>
@@ -5305,7 +5396,7 @@
         <p:spPr>
           <a:xfrm>
             <a:off x="914400" y="2697480"/>
-            <a:ext cx="8229240" cy="1096920"/>
+            <a:ext cx="8228880" cy="1096560"/>
           </a:xfrm>
           <a:prstGeom prst="rect">
             <a:avLst/>
@@ -5335,7 +5426,7 @@
               </a:tabLst>
             </a:pPr>
             <a:r>
-              <a:rPr lang="en-US" sz="3600" b="1" u="none" strike="noStrike">
+              <a:rPr lang="pt-BR" sz="3600" b="1" u="none" strike="noStrike">
                 <a:solidFill>
                   <a:srgbClr val="FFFFFF"/>
                 </a:solidFill>
@@ -5366,7 +5457,7 @@
         <p:spPr>
           <a:xfrm>
             <a:off x="914400" y="3840480"/>
-            <a:ext cx="8046360" cy="822600"/>
+            <a:ext cx="8046000" cy="822240"/>
           </a:xfrm>
           <a:prstGeom prst="rect">
             <a:avLst/>
@@ -5396,7 +5487,7 @@
               </a:tabLst>
             </a:pPr>
             <a:r>
-              <a:rPr lang="en-US" sz="1500" b="0" u="none" strike="noStrike">
+              <a:rPr lang="pt-BR" sz="1500" b="0" u="none" strike="noStrike">
                 <a:solidFill>
                   <a:srgbClr val="D8F1EE"/>
                 </a:solidFill>
@@ -5457,7 +5548,7 @@
         <p:spPr>
           <a:xfrm rot="5400000">
             <a:off x="0" y="0"/>
-            <a:ext cx="2514240" cy="2514240"/>
+            <a:ext cx="2513880" cy="2513880"/>
           </a:xfrm>
           <a:prstGeom prst="rtTriangle">
             <a:avLst/>
@@ -5483,6 +5574,7 @@
             <a:noAutofit/>
           </a:bodyPr>
           <a:p>
+            <a:pPr/>
             <a:endParaRPr lang="pt-BR" sz="1800" b="0" u="none" strike="noStrike">
               <a:solidFill>
                 <a:srgbClr val="FFFFFF"/>
@@ -5502,8 +5594,8 @@
         </p:nvSpPr>
         <p:spPr>
           <a:xfrm rot="10800000">
-            <a:off x="9391320" y="0"/>
-            <a:ext cx="2806920" cy="2806920"/>
+            <a:off x="9391680" y="0"/>
+            <a:ext cx="2806560" cy="2806560"/>
           </a:xfrm>
           <a:prstGeom prst="rtTriangle">
             <a:avLst/>
@@ -5529,6 +5621,7 @@
             <a:noAutofit/>
           </a:bodyPr>
           <a:p>
+            <a:pPr/>
             <a:endParaRPr lang="pt-BR" sz="1800" b="0" u="none" strike="noStrike">
               <a:solidFill>
                 <a:srgbClr val="000000"/>
@@ -5553,7 +5646,7 @@
         <p:spPr>
           <a:xfrm>
             <a:off x="10954440" y="612720"/>
-            <a:ext cx="664560" cy="306720"/>
+            <a:ext cx="664200" cy="306360"/>
           </a:xfrm>
           <a:prstGeom prst="rect">
             <a:avLst/>
@@ -5573,7 +5666,7 @@
         <p:spPr>
           <a:xfrm>
             <a:off x="1691640" y="749880"/>
-            <a:ext cx="8503560" cy="658080"/>
+            <a:ext cx="8503200" cy="657720"/>
           </a:xfrm>
           <a:prstGeom prst="rect">
             <a:avLst/>
@@ -5603,7 +5696,7 @@
               </a:tabLst>
             </a:pPr>
             <a:r>
-              <a:rPr lang="en-US" sz="2200" b="1" u="none" strike="noStrike">
+              <a:rPr lang="pt-BR" sz="2200" b="1" u="none" strike="noStrike">
                 <a:solidFill>
                   <a:srgbClr val="00A59A"/>
                 </a:solidFill>
@@ -5634,7 +5727,7 @@
         <p:spPr>
           <a:xfrm>
             <a:off x="1691640" y="1389960"/>
-            <a:ext cx="8503560" cy="328680"/>
+            <a:ext cx="8503200" cy="328320"/>
           </a:xfrm>
           <a:prstGeom prst="rect">
             <a:avLst/>
@@ -5664,7 +5757,7 @@
               </a:tabLst>
             </a:pPr>
             <a:r>
-              <a:rPr lang="en-US" sz="1300" b="0" i="1" u="none" strike="noStrike">
+              <a:rPr lang="pt-BR" sz="1300" b="0" i="1" u="none" strike="noStrike">
                 <a:solidFill>
                   <a:srgbClr val="5A5A5A"/>
                 </a:solidFill>
@@ -5695,7 +5788,7 @@
         <p:spPr>
           <a:xfrm>
             <a:off x="658440" y="2148840"/>
-            <a:ext cx="6766200" cy="4141800"/>
+            <a:ext cx="6765840" cy="4141440"/>
           </a:xfrm>
           <a:prstGeom prst="roundRect">
             <a:avLst>
@@ -5723,6 +5816,7 @@
             <a:noAutofit/>
           </a:bodyPr>
           <a:p>
+            <a:pPr/>
             <a:endParaRPr lang="pt-BR" sz="1800" b="0" u="none" strike="noStrike">
               <a:solidFill>
                 <a:srgbClr val="FFFFFF"/>
@@ -5743,7 +5837,7 @@
         <p:spPr>
           <a:xfrm>
             <a:off x="868680" y="2313360"/>
-            <a:ext cx="6345720" cy="3812760"/>
+            <a:ext cx="6345360" cy="3812400"/>
           </a:xfrm>
           <a:prstGeom prst="rect">
             <a:avLst/>
@@ -5773,7 +5867,7 @@
               </a:tabLst>
             </a:pPr>
             <a:r>
-              <a:rPr lang="en-US" sz="1100" b="0" u="none" strike="noStrike">
+              <a:rPr lang="pt-BR" sz="1100" b="0" u="none" strike="noStrike">
                 <a:solidFill>
                   <a:srgbClr val="E8F4F2"/>
                 </a:solidFill>
@@ -5803,7 +5897,7 @@
               </a:tabLst>
             </a:pPr>
             <a:r>
-              <a:rPr lang="en-US" sz="1100" b="0" u="none" strike="noStrike">
+              <a:rPr lang="pt-BR" sz="1100" b="0" u="none" strike="noStrike">
                 <a:solidFill>
                   <a:srgbClr val="E8F4F2"/>
                 </a:solidFill>
@@ -5833,7 +5927,7 @@
               </a:tabLst>
             </a:pPr>
             <a:r>
-              <a:rPr lang="en-US" sz="1100" b="0" u="none" strike="noStrike">
+              <a:rPr lang="pt-BR" sz="1100" b="0" u="none" strike="noStrike">
                 <a:solidFill>
                   <a:srgbClr val="E8F4F2"/>
                 </a:solidFill>
@@ -5863,7 +5957,7 @@
               </a:tabLst>
             </a:pPr>
             <a:r>
-              <a:rPr lang="en-US" sz="1100" b="0" u="none" strike="noStrike">
+              <a:rPr lang="pt-BR" sz="1100" b="0" u="none" strike="noStrike">
                 <a:solidFill>
                   <a:srgbClr val="E8F4F2"/>
                 </a:solidFill>
@@ -5893,7 +5987,7 @@
               </a:tabLst>
             </a:pPr>
             <a:r>
-              <a:rPr lang="en-US" sz="1100" b="0" u="none" strike="noStrike">
+              <a:rPr lang="pt-BR" sz="1100" b="0" u="none" strike="noStrike">
                 <a:solidFill>
                   <a:srgbClr val="E8F4F2"/>
                 </a:solidFill>
@@ -5941,7 +6035,7 @@
               </a:tabLst>
             </a:pPr>
             <a:r>
-              <a:rPr lang="en-US" sz="1100" b="0" u="none" strike="noStrike">
+              <a:rPr lang="pt-BR" sz="1100" b="0" u="none" strike="noStrike">
                 <a:solidFill>
                   <a:srgbClr val="E8F4F2"/>
                 </a:solidFill>
@@ -5971,7 +6065,7 @@
               </a:tabLst>
             </a:pPr>
             <a:r>
-              <a:rPr lang="en-US" sz="1100" b="0" u="none" strike="noStrike">
+              <a:rPr lang="pt-BR" sz="1100" b="0" u="none" strike="noStrike">
                 <a:solidFill>
                   <a:srgbClr val="E8F4F2"/>
                 </a:solidFill>
@@ -6001,7 +6095,7 @@
               </a:tabLst>
             </a:pPr>
             <a:r>
-              <a:rPr lang="en-US" sz="1100" b="0" u="none" strike="noStrike">
+              <a:rPr lang="pt-BR" sz="1100" b="0" u="none" strike="noStrike">
                 <a:solidFill>
                   <a:srgbClr val="E8F4F2"/>
                 </a:solidFill>
@@ -6031,7 +6125,7 @@
               </a:tabLst>
             </a:pPr>
             <a:r>
-              <a:rPr lang="en-US" sz="1100" b="0" u="none" strike="noStrike">
+              <a:rPr lang="pt-BR" sz="1100" b="0" u="none" strike="noStrike">
                 <a:solidFill>
                   <a:srgbClr val="E8F4F2"/>
                 </a:solidFill>
@@ -6061,7 +6155,7 @@
               </a:tabLst>
             </a:pPr>
             <a:r>
-              <a:rPr lang="en-US" sz="1100" b="0" u="none" strike="noStrike">
+              <a:rPr lang="pt-BR" sz="1100" b="0" u="none" strike="noStrike">
                 <a:solidFill>
                   <a:srgbClr val="E8F4F2"/>
                 </a:solidFill>
@@ -6109,7 +6203,7 @@
               </a:tabLst>
             </a:pPr>
             <a:r>
-              <a:rPr lang="en-US" sz="1100" b="0" u="none" strike="noStrike">
+              <a:rPr lang="pt-BR" sz="1100" b="0" u="none" strike="noStrike">
                 <a:solidFill>
                   <a:srgbClr val="E8F4F2"/>
                 </a:solidFill>
@@ -6139,7 +6233,7 @@
               </a:tabLst>
             </a:pPr>
             <a:r>
-              <a:rPr lang="en-US" sz="1100" b="0" u="none" strike="noStrike">
+              <a:rPr lang="pt-BR" sz="1100" b="0" u="none" strike="noStrike">
                 <a:solidFill>
                   <a:srgbClr val="E8F4F2"/>
                 </a:solidFill>
@@ -6169,7 +6263,7 @@
               </a:tabLst>
             </a:pPr>
             <a:r>
-              <a:rPr lang="en-US" sz="1100" b="0" u="none" strike="noStrike">
+              <a:rPr lang="pt-BR" sz="1100" b="0" u="none" strike="noStrike">
                 <a:solidFill>
                   <a:srgbClr val="E8F4F2"/>
                 </a:solidFill>
@@ -6199,7 +6293,7 @@
               </a:tabLst>
             </a:pPr>
             <a:r>
-              <a:rPr lang="en-US" sz="1100" b="0" u="none" strike="noStrike">
+              <a:rPr lang="pt-BR" sz="1100" b="0" u="none" strike="noStrike">
                 <a:solidFill>
                   <a:srgbClr val="E8F4F2"/>
                 </a:solidFill>
@@ -6229,7 +6323,7 @@
               </a:tabLst>
             </a:pPr>
             <a:r>
-              <a:rPr lang="en-US" sz="1100" b="0" u="none" strike="noStrike">
+              <a:rPr lang="pt-BR" sz="1100" b="0" u="none" strike="noStrike">
                 <a:solidFill>
                   <a:srgbClr val="E8F4F2"/>
                 </a:solidFill>
@@ -6260,7 +6354,7 @@
         <p:spPr>
           <a:xfrm>
             <a:off x="7635240" y="2240280"/>
-            <a:ext cx="3885840" cy="3958920"/>
+            <a:ext cx="3885480" cy="3958560"/>
           </a:xfrm>
           <a:prstGeom prst="rect">
             <a:avLst/>
@@ -6295,7 +6389,7 @@
               <a:buChar char=""/>
             </a:pPr>
             <a:r>
-              <a:rPr lang="en-US" sz="1200" b="0" u="none" strike="noStrike">
+              <a:rPr lang="pt-BR" sz="1200" b="0" u="none" strike="noStrike">
                 <a:solidFill>
                   <a:srgbClr val="333333"/>
                 </a:solidFill>
@@ -6330,7 +6424,7 @@
               <a:buChar char=""/>
             </a:pPr>
             <a:r>
-              <a:rPr lang="en-US" sz="1200" b="0" u="none" strike="noStrike">
+              <a:rPr lang="pt-BR" sz="1200" b="0" u="none" strike="noStrike">
                 <a:solidFill>
                   <a:srgbClr val="333333"/>
                 </a:solidFill>
@@ -6365,7 +6459,7 @@
               <a:buChar char=""/>
             </a:pPr>
             <a:r>
-              <a:rPr lang="en-US" sz="1200" b="0" u="none" strike="noStrike">
+              <a:rPr lang="pt-BR" sz="1200" b="0" u="none" strike="noStrike">
                 <a:solidFill>
                   <a:srgbClr val="333333"/>
                 </a:solidFill>
@@ -6400,7 +6494,7 @@
               <a:buChar char=""/>
             </a:pPr>
             <a:r>
-              <a:rPr lang="en-US" sz="1200" b="0" u="none" strike="noStrike">
+              <a:rPr lang="pt-BR" sz="1200" b="0" u="none" strike="noStrike">
                 <a:solidFill>
                   <a:srgbClr val="333333"/>
                 </a:solidFill>
@@ -6435,7 +6529,7 @@
               <a:buChar char=""/>
             </a:pPr>
             <a:r>
-              <a:rPr lang="en-US" sz="1200" b="0" u="none" strike="noStrike">
+              <a:rPr lang="pt-BR" sz="1200" b="0" u="none" strike="noStrike">
                 <a:solidFill>
                   <a:srgbClr val="333333"/>
                 </a:solidFill>
@@ -6466,7 +6560,7 @@
         <p:spPr>
           <a:xfrm>
             <a:off x="548640" y="6419160"/>
-            <a:ext cx="8229240" cy="273960"/>
+            <a:ext cx="8228880" cy="273600"/>
           </a:xfrm>
           <a:prstGeom prst="rect">
             <a:avLst/>
@@ -6496,7 +6590,7 @@
               </a:tabLst>
             </a:pPr>
             <a:r>
-              <a:rPr lang="en-US" sz="900" b="0" u="none" strike="noStrike">
+              <a:rPr lang="pt-BR" sz="900" b="0" u="none" strike="noStrike">
                 <a:solidFill>
                   <a:srgbClr val="5A5A5A"/>
                 </a:solidFill>
@@ -6557,7 +6651,7 @@
         <p:spPr>
           <a:xfrm rot="5400000">
             <a:off x="0" y="0"/>
-            <a:ext cx="2514240" cy="2514240"/>
+            <a:ext cx="2513880" cy="2513880"/>
           </a:xfrm>
           <a:prstGeom prst="rtTriangle">
             <a:avLst/>
@@ -6583,6 +6677,7 @@
             <a:noAutofit/>
           </a:bodyPr>
           <a:p>
+            <a:pPr/>
             <a:endParaRPr lang="pt-BR" sz="1800" b="0" u="none" strike="noStrike">
               <a:solidFill>
                 <a:srgbClr val="FFFFFF"/>
@@ -6602,8 +6697,8 @@
         </p:nvSpPr>
         <p:spPr>
           <a:xfrm rot="10800000">
-            <a:off x="9391320" y="0"/>
-            <a:ext cx="2806920" cy="2806920"/>
+            <a:off x="9391680" y="0"/>
+            <a:ext cx="2806560" cy="2806560"/>
           </a:xfrm>
           <a:prstGeom prst="rtTriangle">
             <a:avLst/>
@@ -6629,6 +6724,7 @@
             <a:noAutofit/>
           </a:bodyPr>
           <a:p>
+            <a:pPr/>
             <a:endParaRPr lang="pt-BR" sz="1800" b="0" u="none" strike="noStrike">
               <a:solidFill>
                 <a:srgbClr val="000000"/>
@@ -6653,7 +6749,7 @@
         <p:spPr>
           <a:xfrm>
             <a:off x="10954440" y="612720"/>
-            <a:ext cx="664560" cy="306720"/>
+            <a:ext cx="664200" cy="306360"/>
           </a:xfrm>
           <a:prstGeom prst="rect">
             <a:avLst/>
@@ -6673,7 +6769,7 @@
         <p:spPr>
           <a:xfrm>
             <a:off x="1691640" y="749880"/>
-            <a:ext cx="8503560" cy="658080"/>
+            <a:ext cx="8503200" cy="657720"/>
           </a:xfrm>
           <a:prstGeom prst="rect">
             <a:avLst/>
@@ -6703,7 +6799,7 @@
               </a:tabLst>
             </a:pPr>
             <a:r>
-              <a:rPr lang="en-US" sz="2800" b="1" u="none" strike="noStrike">
+              <a:rPr lang="pt-BR" sz="2800" b="1" u="none" strike="noStrike">
                 <a:solidFill>
                   <a:srgbClr val="00A59A"/>
                 </a:solidFill>
@@ -6734,7 +6830,7 @@
         <p:spPr>
           <a:xfrm>
             <a:off x="1691640" y="1389960"/>
-            <a:ext cx="8503560" cy="328680"/>
+            <a:ext cx="8503200" cy="328320"/>
           </a:xfrm>
           <a:prstGeom prst="rect">
             <a:avLst/>
@@ -6764,7 +6860,7 @@
               </a:tabLst>
             </a:pPr>
             <a:r>
-              <a:rPr lang="en-US" sz="1300" b="0" i="1" u="none" strike="noStrike">
+              <a:rPr lang="pt-BR" sz="1300" b="0" i="1" u="none" strike="noStrike">
                 <a:solidFill>
                   <a:srgbClr val="5A5A5A"/>
                 </a:solidFill>
@@ -6795,7 +6891,7 @@
         <p:spPr>
           <a:xfrm>
             <a:off x="658440" y="2148840"/>
-            <a:ext cx="6766200" cy="4141800"/>
+            <a:ext cx="6765840" cy="4141440"/>
           </a:xfrm>
           <a:prstGeom prst="roundRect">
             <a:avLst>
@@ -6823,6 +6919,7 @@
             <a:noAutofit/>
           </a:bodyPr>
           <a:p>
+            <a:pPr/>
             <a:endParaRPr lang="pt-BR" sz="1800" b="0" u="none" strike="noStrike">
               <a:solidFill>
                 <a:srgbClr val="FFFFFF"/>
@@ -6843,7 +6940,7 @@
         <p:spPr>
           <a:xfrm>
             <a:off x="868680" y="2313360"/>
-            <a:ext cx="6345720" cy="3812760"/>
+            <a:ext cx="6345360" cy="3812400"/>
           </a:xfrm>
           <a:prstGeom prst="rect">
             <a:avLst/>
@@ -6873,7 +6970,7 @@
               </a:tabLst>
             </a:pPr>
             <a:r>
-              <a:rPr lang="en-US" sz="1150" b="0" u="none" strike="noStrike">
+              <a:rPr lang="pt-BR" sz="1150" b="0" u="none" strike="noStrike">
                 <a:solidFill>
                   <a:srgbClr val="E8F4F2"/>
                 </a:solidFill>
@@ -6903,7 +7000,7 @@
               </a:tabLst>
             </a:pPr>
             <a:r>
-              <a:rPr lang="en-US" sz="1150" b="0" u="none" strike="noStrike">
+              <a:rPr lang="pt-BR" sz="1150" b="0" u="none" strike="noStrike">
                 <a:solidFill>
                   <a:srgbClr val="E8F4F2"/>
                 </a:solidFill>
@@ -6951,7 +7048,7 @@
               </a:tabLst>
             </a:pPr>
             <a:r>
-              <a:rPr lang="en-US" sz="1150" b="0" u="none" strike="noStrike">
+              <a:rPr lang="pt-BR" sz="1150" b="0" u="none" strike="noStrike">
                 <a:solidFill>
                   <a:srgbClr val="E8F4F2"/>
                 </a:solidFill>
@@ -6981,7 +7078,7 @@
               </a:tabLst>
             </a:pPr>
             <a:r>
-              <a:rPr lang="en-US" sz="1150" b="0" u="none" strike="noStrike">
+              <a:rPr lang="pt-BR" sz="1150" b="0" u="none" strike="noStrike">
                 <a:solidFill>
                   <a:srgbClr val="E8F4F2"/>
                 </a:solidFill>
@@ -7011,7 +7108,7 @@
               </a:tabLst>
             </a:pPr>
             <a:r>
-              <a:rPr lang="en-US" sz="1150" b="0" u="none" strike="noStrike">
+              <a:rPr lang="pt-BR" sz="1150" b="0" u="none" strike="noStrike">
                 <a:solidFill>
                   <a:srgbClr val="E8F4F2"/>
                 </a:solidFill>
@@ -7059,7 +7156,7 @@
               </a:tabLst>
             </a:pPr>
             <a:r>
-              <a:rPr lang="en-US" sz="1150" b="0" u="none" strike="noStrike">
+              <a:rPr lang="pt-BR" sz="1150" b="0" u="none" strike="noStrike">
                 <a:solidFill>
                   <a:srgbClr val="E8F4F2"/>
                 </a:solidFill>
@@ -7107,7 +7204,7 @@
               </a:tabLst>
             </a:pPr>
             <a:r>
-              <a:rPr lang="en-US" sz="1150" b="0" u="none" strike="noStrike">
+              <a:rPr lang="pt-BR" sz="1150" b="0" u="none" strike="noStrike">
                 <a:solidFill>
                   <a:srgbClr val="E8F4F2"/>
                 </a:solidFill>
@@ -7137,7 +7234,7 @@
               </a:tabLst>
             </a:pPr>
             <a:r>
-              <a:rPr lang="en-US" sz="1150" b="0" u="none" strike="noStrike">
+              <a:rPr lang="pt-BR" sz="1150" b="0" u="none" strike="noStrike">
                 <a:solidFill>
                   <a:srgbClr val="E8F4F2"/>
                 </a:solidFill>
@@ -7167,7 +7264,7 @@
               </a:tabLst>
             </a:pPr>
             <a:r>
-              <a:rPr lang="en-US" sz="1150" b="0" u="none" strike="noStrike">
+              <a:rPr lang="pt-BR" sz="1150" b="0" u="none" strike="noStrike">
                 <a:solidFill>
                   <a:srgbClr val="E8F4F2"/>
                 </a:solidFill>
@@ -7215,7 +7312,7 @@
               </a:tabLst>
             </a:pPr>
             <a:r>
-              <a:rPr lang="en-US" sz="1150" b="0" u="none" strike="noStrike">
+              <a:rPr lang="pt-BR" sz="1150" b="0" u="none" strike="noStrike">
                 <a:solidFill>
                   <a:srgbClr val="E8F4F2"/>
                 </a:solidFill>
@@ -7245,7 +7342,7 @@
               </a:tabLst>
             </a:pPr>
             <a:r>
-              <a:rPr lang="en-US" sz="1150" b="0" u="none" strike="noStrike">
+              <a:rPr lang="pt-BR" sz="1150" b="0" u="none" strike="noStrike">
                 <a:solidFill>
                   <a:srgbClr val="E8F4F2"/>
                 </a:solidFill>
@@ -7275,7 +7372,7 @@
               </a:tabLst>
             </a:pPr>
             <a:r>
-              <a:rPr lang="en-US" sz="1150" b="0" u="none" strike="noStrike">
+              <a:rPr lang="pt-BR" sz="1150" b="0" u="none" strike="noStrike">
                 <a:solidFill>
                   <a:srgbClr val="E8F4F2"/>
                 </a:solidFill>
@@ -7305,7 +7402,7 @@
               </a:tabLst>
             </a:pPr>
             <a:r>
-              <a:rPr lang="en-US" sz="1150" b="0" u="none" strike="noStrike">
+              <a:rPr lang="pt-BR" sz="1150" b="0" u="none" strike="noStrike">
                 <a:solidFill>
                   <a:srgbClr val="E8F4F2"/>
                 </a:solidFill>
@@ -7335,7 +7432,7 @@
               </a:tabLst>
             </a:pPr>
             <a:r>
-              <a:rPr lang="en-US" sz="1150" b="0" u="none" strike="noStrike">
+              <a:rPr lang="pt-BR" sz="1150" b="0" u="none" strike="noStrike">
                 <a:solidFill>
                   <a:srgbClr val="E8F4F2"/>
                 </a:solidFill>
@@ -7366,7 +7463,7 @@
         <p:spPr>
           <a:xfrm>
             <a:off x="7635240" y="2240280"/>
-            <a:ext cx="3885840" cy="3958920"/>
+            <a:ext cx="3885480" cy="3958560"/>
           </a:xfrm>
           <a:prstGeom prst="rect">
             <a:avLst/>
@@ -7401,7 +7498,7 @@
               <a:buChar char=""/>
             </a:pPr>
             <a:r>
-              <a:rPr lang="en-US" sz="1200" b="0" u="none" strike="noStrike">
+              <a:rPr lang="pt-BR" sz="1200" b="0" u="none" strike="noStrike">
                 <a:solidFill>
                   <a:srgbClr val="333333"/>
                 </a:solidFill>
@@ -7436,7 +7533,7 @@
               <a:buChar char=""/>
             </a:pPr>
             <a:r>
-              <a:rPr lang="en-US" sz="1200" b="0" u="none" strike="noStrike">
+              <a:rPr lang="pt-BR" sz="1200" b="0" u="none" strike="noStrike">
                 <a:solidFill>
                   <a:srgbClr val="333333"/>
                 </a:solidFill>
@@ -7471,7 +7568,7 @@
               <a:buChar char=""/>
             </a:pPr>
             <a:r>
-              <a:rPr lang="en-US" sz="1200" b="0" u="none" strike="noStrike">
+              <a:rPr lang="pt-BR" sz="1200" b="0" u="none" strike="noStrike">
                 <a:solidFill>
                   <a:srgbClr val="333333"/>
                 </a:solidFill>
@@ -7506,7 +7603,7 @@
               <a:buChar char=""/>
             </a:pPr>
             <a:r>
-              <a:rPr lang="en-US" sz="1200" b="0" u="none" strike="noStrike">
+              <a:rPr lang="pt-BR" sz="1200" b="0" u="none" strike="noStrike">
                 <a:solidFill>
                   <a:srgbClr val="333333"/>
                 </a:solidFill>
@@ -7541,7 +7638,7 @@
               <a:buChar char=""/>
             </a:pPr>
             <a:r>
-              <a:rPr lang="en-US" sz="1200" b="0" u="none" strike="noStrike">
+              <a:rPr lang="pt-BR" sz="1200" b="0" u="none" strike="noStrike">
                 <a:solidFill>
                   <a:srgbClr val="333333"/>
                 </a:solidFill>
@@ -7572,7 +7669,7 @@
         <p:spPr>
           <a:xfrm>
             <a:off x="548640" y="6419160"/>
-            <a:ext cx="8229240" cy="273960"/>
+            <a:ext cx="8228880" cy="273600"/>
           </a:xfrm>
           <a:prstGeom prst="rect">
             <a:avLst/>
@@ -7602,7 +7699,7 @@
               </a:tabLst>
             </a:pPr>
             <a:r>
-              <a:rPr lang="en-US" sz="900" b="0" u="none" strike="noStrike">
+              <a:rPr lang="pt-BR" sz="900" b="0" u="none" strike="noStrike">
                 <a:solidFill>
                   <a:srgbClr val="5A5A5A"/>
                 </a:solidFill>
@@ -7663,7 +7760,7 @@
         <p:spPr>
           <a:xfrm rot="5400000">
             <a:off x="0" y="0"/>
-            <a:ext cx="2514240" cy="2514240"/>
+            <a:ext cx="2513880" cy="2513880"/>
           </a:xfrm>
           <a:prstGeom prst="rtTriangle">
             <a:avLst/>
@@ -7689,6 +7786,7 @@
             <a:noAutofit/>
           </a:bodyPr>
           <a:p>
+            <a:pPr/>
             <a:endParaRPr lang="pt-BR" sz="1800" b="0" u="none" strike="noStrike">
               <a:solidFill>
                 <a:srgbClr val="FFFFFF"/>
@@ -7708,8 +7806,8 @@
         </p:nvSpPr>
         <p:spPr>
           <a:xfrm rot="10800000">
-            <a:off x="9391320" y="0"/>
-            <a:ext cx="2806920" cy="2806920"/>
+            <a:off x="9391680" y="0"/>
+            <a:ext cx="2806560" cy="2806560"/>
           </a:xfrm>
           <a:prstGeom prst="rtTriangle">
             <a:avLst/>
@@ -7735,6 +7833,7 @@
             <a:noAutofit/>
           </a:bodyPr>
           <a:p>
+            <a:pPr/>
             <a:endParaRPr lang="pt-BR" sz="1800" b="0" u="none" strike="noStrike">
               <a:solidFill>
                 <a:srgbClr val="000000"/>
@@ -7759,7 +7858,7 @@
         <p:spPr>
           <a:xfrm>
             <a:off x="10954440" y="612720"/>
-            <a:ext cx="664560" cy="306720"/>
+            <a:ext cx="664200" cy="306360"/>
           </a:xfrm>
           <a:prstGeom prst="rect">
             <a:avLst/>
@@ -7779,7 +7878,7 @@
         <p:spPr>
           <a:xfrm>
             <a:off x="1691640" y="749880"/>
-            <a:ext cx="8503560" cy="658080"/>
+            <a:ext cx="8503200" cy="657720"/>
           </a:xfrm>
           <a:prstGeom prst="rect">
             <a:avLst/>
@@ -7809,7 +7908,7 @@
               </a:tabLst>
             </a:pPr>
             <a:r>
-              <a:rPr lang="en-US" sz="2800" b="1" u="none" strike="noStrike">
+              <a:rPr lang="pt-BR" sz="2800" b="1" u="none" strike="noStrike">
                 <a:solidFill>
                   <a:srgbClr val="00A59A"/>
                 </a:solidFill>
@@ -7840,7 +7939,7 @@
         <p:spPr>
           <a:xfrm>
             <a:off x="713160" y="2020680"/>
-            <a:ext cx="109440" cy="109440"/>
+            <a:ext cx="109080" cy="109080"/>
           </a:xfrm>
           <a:prstGeom prst="rect">
             <a:avLst/>
@@ -7862,10 +7961,11 @@
           <a:fontRef idx="minor"/>
         </p:style>
         <p:txBody>
-          <a:bodyPr lIns="90000" tIns="45000" rIns="90000" bIns="45000" anchor="t">
-            <a:noAutofit/>
-          </a:bodyPr>
-          <a:p>
+          <a:bodyPr lIns="54720" tIns="45000" rIns="54720" bIns="45000" anchor="t">
+            <a:noAutofit/>
+          </a:bodyPr>
+          <a:p>
+            <a:pPr/>
             <a:endParaRPr lang="pt-BR" sz="1800" b="0" u="none" strike="noStrike">
               <a:solidFill>
                 <a:srgbClr val="000000"/>
@@ -7886,7 +7986,7 @@
         <p:spPr>
           <a:xfrm>
             <a:off x="960120" y="1938600"/>
-            <a:ext cx="10515240" cy="773280"/>
+            <a:ext cx="10514880" cy="772920"/>
           </a:xfrm>
           <a:prstGeom prst="rect">
             <a:avLst/>
@@ -7916,7 +8016,7 @@
               </a:tabLst>
             </a:pPr>
             <a:r>
-              <a:rPr lang="en-US" sz="1350" b="1" u="none" strike="noStrike">
+              <a:rPr lang="pt-BR" sz="1350" b="1" u="none" strike="noStrike">
                 <a:solidFill>
                   <a:srgbClr val="00695F"/>
                 </a:solidFill>
@@ -7946,7 +8046,7 @@
               </a:tabLst>
             </a:pPr>
             <a:r>
-              <a:rPr lang="en-US" sz="1350" b="0" u="none" strike="noStrike">
+              <a:rPr lang="pt-BR" sz="1350" b="0" u="none" strike="noStrike">
                 <a:solidFill>
                   <a:srgbClr val="333333"/>
                 </a:solidFill>
@@ -7977,7 +8077,7 @@
         <p:spPr>
           <a:xfrm>
             <a:off x="713160" y="2867400"/>
-            <a:ext cx="109440" cy="109440"/>
+            <a:ext cx="109080" cy="109080"/>
           </a:xfrm>
           <a:prstGeom prst="rect">
             <a:avLst/>
@@ -7999,10 +8099,11 @@
           <a:fontRef idx="minor"/>
         </p:style>
         <p:txBody>
-          <a:bodyPr lIns="90000" tIns="45000" rIns="90000" bIns="45000" anchor="t">
-            <a:noAutofit/>
-          </a:bodyPr>
-          <a:p>
+          <a:bodyPr lIns="54720" tIns="45000" rIns="54720" bIns="45000" anchor="t">
+            <a:noAutofit/>
+          </a:bodyPr>
+          <a:p>
+            <a:pPr/>
             <a:endParaRPr lang="pt-BR" sz="1800" b="0" u="none" strike="noStrike">
               <a:solidFill>
                 <a:srgbClr val="000000"/>
@@ -8023,7 +8124,7 @@
         <p:spPr>
           <a:xfrm>
             <a:off x="960120" y="2785320"/>
-            <a:ext cx="10515240" cy="773280"/>
+            <a:ext cx="10514880" cy="772920"/>
           </a:xfrm>
           <a:prstGeom prst="rect">
             <a:avLst/>
@@ -8053,7 +8154,7 @@
               </a:tabLst>
             </a:pPr>
             <a:r>
-              <a:rPr lang="en-US" sz="1350" b="1" u="none" strike="noStrike">
+              <a:rPr lang="pt-BR" sz="1350" b="1" u="none" strike="noStrike">
                 <a:solidFill>
                   <a:srgbClr val="00695F"/>
                 </a:solidFill>
@@ -8083,7 +8184,7 @@
               </a:tabLst>
             </a:pPr>
             <a:r>
-              <a:rPr lang="en-US" sz="1350" b="0" u="none" strike="noStrike">
+              <a:rPr lang="pt-BR" sz="1350" b="0" u="none" strike="noStrike">
                 <a:solidFill>
                   <a:srgbClr val="333333"/>
                 </a:solidFill>
@@ -8114,7 +8215,7 @@
         <p:spPr>
           <a:xfrm>
             <a:off x="713160" y="3714120"/>
-            <a:ext cx="109440" cy="109440"/>
+            <a:ext cx="109080" cy="109080"/>
           </a:xfrm>
           <a:prstGeom prst="rect">
             <a:avLst/>
@@ -8136,10 +8237,11 @@
           <a:fontRef idx="minor"/>
         </p:style>
         <p:txBody>
-          <a:bodyPr lIns="90000" tIns="45000" rIns="90000" bIns="45000" anchor="t">
-            <a:noAutofit/>
-          </a:bodyPr>
-          <a:p>
+          <a:bodyPr lIns="54720" tIns="45000" rIns="54720" bIns="45000" anchor="t">
+            <a:noAutofit/>
+          </a:bodyPr>
+          <a:p>
+            <a:pPr/>
             <a:endParaRPr lang="pt-BR" sz="1800" b="0" u="none" strike="noStrike">
               <a:solidFill>
                 <a:srgbClr val="000000"/>
@@ -8160,7 +8262,7 @@
         <p:spPr>
           <a:xfrm>
             <a:off x="960120" y="3632040"/>
-            <a:ext cx="10515240" cy="773280"/>
+            <a:ext cx="10514880" cy="772920"/>
           </a:xfrm>
           <a:prstGeom prst="rect">
             <a:avLst/>
@@ -8190,7 +8292,7 @@
               </a:tabLst>
             </a:pPr>
             <a:r>
-              <a:rPr lang="en-US" sz="1350" b="1" u="none" strike="noStrike">
+              <a:rPr lang="pt-BR" sz="1350" b="1" u="none" strike="noStrike">
                 <a:solidFill>
                   <a:srgbClr val="00695F"/>
                 </a:solidFill>
@@ -8220,7 +8322,7 @@
               </a:tabLst>
             </a:pPr>
             <a:r>
-              <a:rPr lang="en-US" sz="1350" b="0" u="none" strike="noStrike">
+              <a:rPr lang="pt-BR" sz="1350" b="0" u="none" strike="noStrike">
                 <a:solidFill>
                   <a:srgbClr val="333333"/>
                 </a:solidFill>
@@ -8251,7 +8353,7 @@
         <p:spPr>
           <a:xfrm>
             <a:off x="713160" y="4561200"/>
-            <a:ext cx="109440" cy="109440"/>
+            <a:ext cx="109080" cy="109080"/>
           </a:xfrm>
           <a:prstGeom prst="rect">
             <a:avLst/>
@@ -8273,10 +8375,11 @@
           <a:fontRef idx="minor"/>
         </p:style>
         <p:txBody>
-          <a:bodyPr lIns="90000" tIns="45000" rIns="90000" bIns="45000" anchor="t">
-            <a:noAutofit/>
-          </a:bodyPr>
-          <a:p>
+          <a:bodyPr lIns="54720" tIns="45000" rIns="54720" bIns="45000" anchor="t">
+            <a:noAutofit/>
+          </a:bodyPr>
+          <a:p>
+            <a:pPr/>
             <a:endParaRPr lang="pt-BR" sz="1800" b="0" u="none" strike="noStrike">
               <a:solidFill>
                 <a:srgbClr val="000000"/>
@@ -8297,7 +8400,7 @@
         <p:spPr>
           <a:xfrm>
             <a:off x="960120" y="4478760"/>
-            <a:ext cx="10515240" cy="773280"/>
+            <a:ext cx="10514880" cy="772920"/>
           </a:xfrm>
           <a:prstGeom prst="rect">
             <a:avLst/>
@@ -8327,7 +8430,7 @@
               </a:tabLst>
             </a:pPr>
             <a:r>
-              <a:rPr lang="en-US" sz="1350" b="1" u="none" strike="noStrike">
+              <a:rPr lang="pt-BR" sz="1350" b="1" u="none" strike="noStrike">
                 <a:solidFill>
                   <a:srgbClr val="00695F"/>
                 </a:solidFill>
@@ -8357,7 +8460,7 @@
               </a:tabLst>
             </a:pPr>
             <a:r>
-              <a:rPr lang="en-US" sz="1350" b="0" u="none" strike="noStrike">
+              <a:rPr lang="pt-BR" sz="1350" b="0" u="none" strike="noStrike">
                 <a:solidFill>
                   <a:srgbClr val="333333"/>
                 </a:solidFill>
@@ -8388,7 +8491,7 @@
         <p:spPr>
           <a:xfrm>
             <a:off x="713160" y="5407920"/>
-            <a:ext cx="109440" cy="109440"/>
+            <a:ext cx="109080" cy="109080"/>
           </a:xfrm>
           <a:prstGeom prst="rect">
             <a:avLst/>
@@ -8410,10 +8513,11 @@
           <a:fontRef idx="minor"/>
         </p:style>
         <p:txBody>
-          <a:bodyPr lIns="90000" tIns="45000" rIns="90000" bIns="45000" anchor="t">
-            <a:noAutofit/>
-          </a:bodyPr>
-          <a:p>
+          <a:bodyPr lIns="54720" tIns="45000" rIns="54720" bIns="45000" anchor="t">
+            <a:noAutofit/>
+          </a:bodyPr>
+          <a:p>
+            <a:pPr/>
             <a:endParaRPr lang="pt-BR" sz="1800" b="0" u="none" strike="noStrike">
               <a:solidFill>
                 <a:srgbClr val="000000"/>
@@ -8434,7 +8538,7 @@
         <p:spPr>
           <a:xfrm>
             <a:off x="960120" y="5325480"/>
-            <a:ext cx="10515240" cy="773280"/>
+            <a:ext cx="10514880" cy="772920"/>
           </a:xfrm>
           <a:prstGeom prst="rect">
             <a:avLst/>
@@ -8464,7 +8568,7 @@
               </a:tabLst>
             </a:pPr>
             <a:r>
-              <a:rPr lang="en-US" sz="1350" b="1" u="none" strike="noStrike">
+              <a:rPr lang="pt-BR" sz="1350" b="1" u="none" strike="noStrike">
                 <a:solidFill>
                   <a:srgbClr val="00695F"/>
                 </a:solidFill>
@@ -8494,7 +8598,7 @@
               </a:tabLst>
             </a:pPr>
             <a:r>
-              <a:rPr lang="en-US" sz="1350" b="0" u="none" strike="noStrike">
+              <a:rPr lang="pt-BR" sz="1350" b="0" u="none" strike="noStrike">
                 <a:solidFill>
                   <a:srgbClr val="333333"/>
                 </a:solidFill>
@@ -8525,7 +8629,7 @@
         <p:spPr>
           <a:xfrm>
             <a:off x="548640" y="6419160"/>
-            <a:ext cx="8229240" cy="273960"/>
+            <a:ext cx="8228880" cy="273600"/>
           </a:xfrm>
           <a:prstGeom prst="rect">
             <a:avLst/>
@@ -8555,7 +8659,7 @@
               </a:tabLst>
             </a:pPr>
             <a:r>
-              <a:rPr lang="en-US" sz="900" b="0" u="none" strike="noStrike">
+              <a:rPr lang="pt-BR" sz="900" b="0" u="none" strike="noStrike">
                 <a:solidFill>
                   <a:srgbClr val="5A5A5A"/>
                 </a:solidFill>
@@ -8616,7 +8720,7 @@
         <p:spPr>
           <a:xfrm rot="5400000">
             <a:off x="0" y="0"/>
-            <a:ext cx="2514240" cy="2514240"/>
+            <a:ext cx="2513880" cy="2513880"/>
           </a:xfrm>
           <a:prstGeom prst="rtTriangle">
             <a:avLst/>
@@ -8642,6 +8746,7 @@
             <a:noAutofit/>
           </a:bodyPr>
           <a:p>
+            <a:pPr/>
             <a:endParaRPr lang="pt-BR" sz="1800" b="0" u="none" strike="noStrike">
               <a:solidFill>
                 <a:srgbClr val="FFFFFF"/>
@@ -8661,8 +8766,8 @@
         </p:nvSpPr>
         <p:spPr>
           <a:xfrm rot="10800000">
-            <a:off x="9391320" y="0"/>
-            <a:ext cx="2806920" cy="2806920"/>
+            <a:off x="9391680" y="0"/>
+            <a:ext cx="2806560" cy="2806560"/>
           </a:xfrm>
           <a:prstGeom prst="rtTriangle">
             <a:avLst/>
@@ -8688,6 +8793,7 @@
             <a:noAutofit/>
           </a:bodyPr>
           <a:p>
+            <a:pPr/>
             <a:endParaRPr lang="pt-BR" sz="1800" b="0" u="none" strike="noStrike">
               <a:solidFill>
                 <a:srgbClr val="000000"/>
@@ -8712,7 +8818,7 @@
         <p:spPr>
           <a:xfrm>
             <a:off x="10954440" y="612720"/>
-            <a:ext cx="664560" cy="306720"/>
+            <a:ext cx="664200" cy="306360"/>
           </a:xfrm>
           <a:prstGeom prst="rect">
             <a:avLst/>
@@ -8732,7 +8838,7 @@
         <p:spPr>
           <a:xfrm>
             <a:off x="1691640" y="749880"/>
-            <a:ext cx="8503560" cy="658080"/>
+            <a:ext cx="8503200" cy="657720"/>
           </a:xfrm>
           <a:prstGeom prst="rect">
             <a:avLst/>
@@ -8762,7 +8868,7 @@
               </a:tabLst>
             </a:pPr>
             <a:r>
-              <a:rPr lang="en-US" sz="2500" b="1" u="none" strike="noStrike">
+              <a:rPr lang="pt-BR" sz="2500" b="1" u="none" strike="noStrike">
                 <a:solidFill>
                   <a:srgbClr val="00A59A"/>
                 </a:solidFill>
@@ -8793,7 +8899,7 @@
         <p:spPr>
           <a:xfrm>
             <a:off x="713160" y="2020680"/>
-            <a:ext cx="109440" cy="109440"/>
+            <a:ext cx="109080" cy="109080"/>
           </a:xfrm>
           <a:prstGeom prst="rect">
             <a:avLst/>
@@ -8815,10 +8921,11 @@
           <a:fontRef idx="minor"/>
         </p:style>
         <p:txBody>
-          <a:bodyPr lIns="90000" tIns="45000" rIns="90000" bIns="45000" anchor="t">
-            <a:noAutofit/>
-          </a:bodyPr>
-          <a:p>
+          <a:bodyPr lIns="54720" tIns="45000" rIns="54720" bIns="45000" anchor="t">
+            <a:noAutofit/>
+          </a:bodyPr>
+          <a:p>
+            <a:pPr/>
             <a:endParaRPr lang="pt-BR" sz="1800" b="0" u="none" strike="noStrike">
               <a:solidFill>
                 <a:srgbClr val="000000"/>
@@ -8839,7 +8946,7 @@
         <p:spPr>
           <a:xfrm>
             <a:off x="960120" y="1938600"/>
-            <a:ext cx="10515240" cy="773280"/>
+            <a:ext cx="10514880" cy="772920"/>
           </a:xfrm>
           <a:prstGeom prst="rect">
             <a:avLst/>
@@ -8869,7 +8976,7 @@
               </a:tabLst>
             </a:pPr>
             <a:r>
-              <a:rPr lang="en-US" sz="1400" b="1" u="none" strike="noStrike">
+              <a:rPr lang="pt-BR" sz="1400" b="1" u="none" strike="noStrike">
                 <a:solidFill>
                   <a:srgbClr val="00695F"/>
                 </a:solidFill>
@@ -8899,7 +9006,7 @@
               </a:tabLst>
             </a:pPr>
             <a:r>
-              <a:rPr lang="en-US" sz="1400" b="0" u="none" strike="noStrike">
+              <a:rPr lang="pt-BR" sz="1400" b="0" u="none" strike="noStrike">
                 <a:solidFill>
                   <a:srgbClr val="333333"/>
                 </a:solidFill>
@@ -8930,7 +9037,7 @@
         <p:spPr>
           <a:xfrm>
             <a:off x="713160" y="2867400"/>
-            <a:ext cx="109440" cy="109440"/>
+            <a:ext cx="109080" cy="109080"/>
           </a:xfrm>
           <a:prstGeom prst="rect">
             <a:avLst/>
@@ -8952,10 +9059,11 @@
           <a:fontRef idx="minor"/>
         </p:style>
         <p:txBody>
-          <a:bodyPr lIns="90000" tIns="45000" rIns="90000" bIns="45000" anchor="t">
-            <a:noAutofit/>
-          </a:bodyPr>
-          <a:p>
+          <a:bodyPr lIns="54720" tIns="45000" rIns="54720" bIns="45000" anchor="t">
+            <a:noAutofit/>
+          </a:bodyPr>
+          <a:p>
+            <a:pPr/>
             <a:endParaRPr lang="pt-BR" sz="1800" b="0" u="none" strike="noStrike">
               <a:solidFill>
                 <a:srgbClr val="000000"/>
@@ -8976,7 +9084,7 @@
         <p:spPr>
           <a:xfrm>
             <a:off x="960120" y="2785320"/>
-            <a:ext cx="10515240" cy="773280"/>
+            <a:ext cx="10514880" cy="772920"/>
           </a:xfrm>
           <a:prstGeom prst="rect">
             <a:avLst/>
@@ -9006,7 +9114,7 @@
               </a:tabLst>
             </a:pPr>
             <a:r>
-              <a:rPr lang="en-US" sz="1400" b="1" u="none" strike="noStrike">
+              <a:rPr lang="pt-BR" sz="1400" b="1" u="none" strike="noStrike">
                 <a:solidFill>
                   <a:srgbClr val="00695F"/>
                 </a:solidFill>
@@ -9036,7 +9144,7 @@
               </a:tabLst>
             </a:pPr>
             <a:r>
-              <a:rPr lang="en-US" sz="1400" b="0" u="none" strike="noStrike">
+              <a:rPr lang="pt-BR" sz="1400" b="0" u="none" strike="noStrike">
                 <a:solidFill>
                   <a:srgbClr val="333333"/>
                 </a:solidFill>
@@ -9067,7 +9175,7 @@
         <p:spPr>
           <a:xfrm>
             <a:off x="713160" y="3714120"/>
-            <a:ext cx="109440" cy="109440"/>
+            <a:ext cx="109080" cy="109080"/>
           </a:xfrm>
           <a:prstGeom prst="rect">
             <a:avLst/>
@@ -9089,10 +9197,11 @@
           <a:fontRef idx="minor"/>
         </p:style>
         <p:txBody>
-          <a:bodyPr lIns="90000" tIns="45000" rIns="90000" bIns="45000" anchor="t">
-            <a:noAutofit/>
-          </a:bodyPr>
-          <a:p>
+          <a:bodyPr lIns="54720" tIns="45000" rIns="54720" bIns="45000" anchor="t">
+            <a:noAutofit/>
+          </a:bodyPr>
+          <a:p>
+            <a:pPr/>
             <a:endParaRPr lang="pt-BR" sz="1800" b="0" u="none" strike="noStrike">
               <a:solidFill>
                 <a:srgbClr val="000000"/>
@@ -9113,7 +9222,7 @@
         <p:spPr>
           <a:xfrm>
             <a:off x="960120" y="3632040"/>
-            <a:ext cx="10515240" cy="773280"/>
+            <a:ext cx="10514880" cy="772920"/>
           </a:xfrm>
           <a:prstGeom prst="rect">
             <a:avLst/>
@@ -9143,7 +9252,7 @@
               </a:tabLst>
             </a:pPr>
             <a:r>
-              <a:rPr lang="en-US" sz="1400" b="1" u="none" strike="noStrike">
+              <a:rPr lang="pt-BR" sz="1400" b="1" u="none" strike="noStrike">
                 <a:solidFill>
                   <a:srgbClr val="00695F"/>
                 </a:solidFill>
@@ -9173,7 +9282,7 @@
               </a:tabLst>
             </a:pPr>
             <a:r>
-              <a:rPr lang="en-US" sz="1400" b="0" u="none" strike="noStrike">
+              <a:rPr lang="pt-BR" sz="1400" b="0" u="none" strike="noStrike">
                 <a:solidFill>
                   <a:srgbClr val="333333"/>
                 </a:solidFill>
@@ -9204,7 +9313,7 @@
         <p:spPr>
           <a:xfrm>
             <a:off x="713160" y="4561200"/>
-            <a:ext cx="109440" cy="109440"/>
+            <a:ext cx="109080" cy="109080"/>
           </a:xfrm>
           <a:prstGeom prst="rect">
             <a:avLst/>
@@ -9226,10 +9335,11 @@
           <a:fontRef idx="minor"/>
         </p:style>
         <p:txBody>
-          <a:bodyPr lIns="90000" tIns="45000" rIns="90000" bIns="45000" anchor="t">
-            <a:noAutofit/>
-          </a:bodyPr>
-          <a:p>
+          <a:bodyPr lIns="54720" tIns="45000" rIns="54720" bIns="45000" anchor="t">
+            <a:noAutofit/>
+          </a:bodyPr>
+          <a:p>
+            <a:pPr/>
             <a:endParaRPr lang="pt-BR" sz="1800" b="0" u="none" strike="noStrike">
               <a:solidFill>
                 <a:srgbClr val="000000"/>
@@ -9250,7 +9360,7 @@
         <p:spPr>
           <a:xfrm>
             <a:off x="960120" y="4478760"/>
-            <a:ext cx="10515240" cy="773280"/>
+            <a:ext cx="10514880" cy="772920"/>
           </a:xfrm>
           <a:prstGeom prst="rect">
             <a:avLst/>
@@ -9280,7 +9390,7 @@
               </a:tabLst>
             </a:pPr>
             <a:r>
-              <a:rPr lang="en-US" sz="1400" b="1" u="none" strike="noStrike">
+              <a:rPr lang="pt-BR" sz="1400" b="1" u="none" strike="noStrike">
                 <a:solidFill>
                   <a:srgbClr val="00695F"/>
                 </a:solidFill>
@@ -9310,7 +9420,7 @@
               </a:tabLst>
             </a:pPr>
             <a:r>
-              <a:rPr lang="en-US" sz="1400" b="0" u="none" strike="noStrike">
+              <a:rPr lang="pt-BR" sz="1400" b="0" u="none" strike="noStrike">
                 <a:solidFill>
                   <a:srgbClr val="333333"/>
                 </a:solidFill>
@@ -9341,7 +9451,7 @@
         <p:spPr>
           <a:xfrm>
             <a:off x="713160" y="5407920"/>
-            <a:ext cx="109440" cy="109440"/>
+            <a:ext cx="109080" cy="109080"/>
           </a:xfrm>
           <a:prstGeom prst="rect">
             <a:avLst/>
@@ -9363,10 +9473,11 @@
           <a:fontRef idx="minor"/>
         </p:style>
         <p:txBody>
-          <a:bodyPr lIns="90000" tIns="45000" rIns="90000" bIns="45000" anchor="t">
-            <a:noAutofit/>
-          </a:bodyPr>
-          <a:p>
+          <a:bodyPr lIns="54720" tIns="45000" rIns="54720" bIns="45000" anchor="t">
+            <a:noAutofit/>
+          </a:bodyPr>
+          <a:p>
+            <a:pPr/>
             <a:endParaRPr lang="pt-BR" sz="1800" b="0" u="none" strike="noStrike">
               <a:solidFill>
                 <a:srgbClr val="000000"/>
@@ -9387,7 +9498,7 @@
         <p:spPr>
           <a:xfrm>
             <a:off x="960120" y="5325480"/>
-            <a:ext cx="10515240" cy="773280"/>
+            <a:ext cx="10514880" cy="772920"/>
           </a:xfrm>
           <a:prstGeom prst="rect">
             <a:avLst/>
@@ -9417,7 +9528,7 @@
               </a:tabLst>
             </a:pPr>
             <a:r>
-              <a:rPr lang="en-US" sz="1400" b="1" u="none" strike="noStrike">
+              <a:rPr lang="pt-BR" sz="1400" b="1" u="none" strike="noStrike">
                 <a:solidFill>
                   <a:srgbClr val="00695F"/>
                 </a:solidFill>
@@ -9447,7 +9558,7 @@
               </a:tabLst>
             </a:pPr>
             <a:r>
-              <a:rPr lang="en-US" sz="1400" b="0" u="none" strike="noStrike">
+              <a:rPr lang="pt-BR" sz="1400" b="0" u="none" strike="noStrike">
                 <a:solidFill>
                   <a:srgbClr val="333333"/>
                 </a:solidFill>
@@ -9478,7 +9589,7 @@
         <p:spPr>
           <a:xfrm>
             <a:off x="548640" y="6419160"/>
-            <a:ext cx="8229240" cy="273960"/>
+            <a:ext cx="8228880" cy="273600"/>
           </a:xfrm>
           <a:prstGeom prst="rect">
             <a:avLst/>
@@ -9508,7 +9619,7 @@
               </a:tabLst>
             </a:pPr>
             <a:r>
-              <a:rPr lang="en-US" sz="900" b="0" u="none" strike="noStrike">
+              <a:rPr lang="pt-BR" sz="900" b="0" u="none" strike="noStrike">
                 <a:solidFill>
                   <a:srgbClr val="5A5A5A"/>
                 </a:solidFill>
@@ -9580,7 +9691,7 @@
         <p:spPr>
           <a:xfrm>
             <a:off x="4718160" y="2057400"/>
-            <a:ext cx="2742840" cy="1956600"/>
+            <a:ext cx="2742480" cy="1956240"/>
           </a:xfrm>
           <a:prstGeom prst="rect">
             <a:avLst/>
@@ -9600,7 +9711,7 @@
         <p:spPr>
           <a:xfrm>
             <a:off x="1371600" y="4251960"/>
-            <a:ext cx="9445320" cy="548280"/>
+            <a:ext cx="9444960" cy="547920"/>
           </a:xfrm>
           <a:prstGeom prst="rect">
             <a:avLst/>
@@ -9630,7 +9741,7 @@
               </a:tabLst>
             </a:pPr>
             <a:r>
-              <a:rPr lang="en-US" sz="2000" b="1" u="none" strike="noStrike">
+              <a:rPr lang="pt-BR" sz="2000" b="1" u="none" strike="noStrike">
                 <a:solidFill>
                   <a:srgbClr val="1A1A1A"/>
                 </a:solidFill>
@@ -9661,7 +9772,7 @@
         <p:spPr>
           <a:xfrm>
             <a:off x="1371600" y="4800600"/>
-            <a:ext cx="9445320" cy="548280"/>
+            <a:ext cx="9444960" cy="547920"/>
           </a:xfrm>
           <a:prstGeom prst="rect">
             <a:avLst/>
@@ -9691,7 +9802,7 @@
               </a:tabLst>
             </a:pPr>
             <a:r>
-              <a:rPr lang="en-US" sz="1300" b="0" u="none" strike="noStrike">
+              <a:rPr lang="pt-BR" sz="1300" b="0" u="none" strike="noStrike">
                 <a:solidFill>
                   <a:srgbClr val="3A3A3A"/>
                 </a:solidFill>
@@ -9752,7 +9863,7 @@
         <p:spPr>
           <a:xfrm rot="5400000">
             <a:off x="0" y="0"/>
-            <a:ext cx="2514240" cy="2514240"/>
+            <a:ext cx="2513880" cy="2513880"/>
           </a:xfrm>
           <a:prstGeom prst="rtTriangle">
             <a:avLst/>
@@ -9778,6 +9889,7 @@
             <a:noAutofit/>
           </a:bodyPr>
           <a:p>
+            <a:pPr/>
             <a:endParaRPr lang="pt-BR" sz="1800" b="0" u="none" strike="noStrike">
               <a:solidFill>
                 <a:srgbClr val="FFFFFF"/>
@@ -9797,8 +9909,8 @@
         </p:nvSpPr>
         <p:spPr>
           <a:xfrm rot="10800000">
-            <a:off x="9391320" y="0"/>
-            <a:ext cx="2806920" cy="2806920"/>
+            <a:off x="9391680" y="0"/>
+            <a:ext cx="2806560" cy="2806560"/>
           </a:xfrm>
           <a:prstGeom prst="rtTriangle">
             <a:avLst/>
@@ -9824,6 +9936,7 @@
             <a:noAutofit/>
           </a:bodyPr>
           <a:p>
+            <a:pPr/>
             <a:endParaRPr lang="pt-BR" sz="1800" b="0" u="none" strike="noStrike">
               <a:solidFill>
                 <a:srgbClr val="000000"/>
@@ -9848,7 +9961,7 @@
         <p:spPr>
           <a:xfrm>
             <a:off x="10954440" y="612720"/>
-            <a:ext cx="664560" cy="306720"/>
+            <a:ext cx="664200" cy="306360"/>
           </a:xfrm>
           <a:prstGeom prst="rect">
             <a:avLst/>
@@ -9868,7 +9981,7 @@
         <p:spPr>
           <a:xfrm>
             <a:off x="1691640" y="749880"/>
-            <a:ext cx="8503560" cy="658080"/>
+            <a:ext cx="8503200" cy="657720"/>
           </a:xfrm>
           <a:prstGeom prst="rect">
             <a:avLst/>
@@ -9898,7 +10011,7 @@
               </a:tabLst>
             </a:pPr>
             <a:r>
-              <a:rPr lang="en-US" sz="2800" b="1" u="none" strike="noStrike">
+              <a:rPr lang="pt-BR" sz="2800" b="1" u="none" strike="noStrike">
                 <a:solidFill>
                   <a:srgbClr val="00A59A"/>
                 </a:solidFill>
@@ -9929,7 +10042,7 @@
         <p:spPr>
           <a:xfrm>
             <a:off x="713160" y="2020680"/>
-            <a:ext cx="109440" cy="109440"/>
+            <a:ext cx="109080" cy="109080"/>
           </a:xfrm>
           <a:prstGeom prst="rect">
             <a:avLst/>
@@ -9951,10 +10064,11 @@
           <a:fontRef idx="minor"/>
         </p:style>
         <p:txBody>
-          <a:bodyPr lIns="90000" tIns="45000" rIns="90000" bIns="45000" anchor="t">
-            <a:noAutofit/>
-          </a:bodyPr>
-          <a:p>
+          <a:bodyPr lIns="54720" tIns="45000" rIns="54720" bIns="45000" anchor="t">
+            <a:noAutofit/>
+          </a:bodyPr>
+          <a:p>
+            <a:pPr/>
             <a:endParaRPr lang="pt-BR" sz="1800" b="0" u="none" strike="noStrike">
               <a:solidFill>
                 <a:srgbClr val="000000"/>
@@ -9975,7 +10089,7 @@
         <p:spPr>
           <a:xfrm>
             <a:off x="960120" y="1938600"/>
-            <a:ext cx="10515240" cy="773280"/>
+            <a:ext cx="10514880" cy="772920"/>
           </a:xfrm>
           <a:prstGeom prst="rect">
             <a:avLst/>
@@ -10005,7 +10119,7 @@
               </a:tabLst>
             </a:pPr>
             <a:r>
-              <a:rPr lang="en-US" sz="1400" b="1" u="none" strike="noStrike">
+              <a:rPr lang="pt-BR" sz="1400" b="1" u="none" strike="noStrike">
                 <a:solidFill>
                   <a:srgbClr val="00695F"/>
                 </a:solidFill>
@@ -10035,7 +10149,7 @@
               </a:tabLst>
             </a:pPr>
             <a:r>
-              <a:rPr lang="en-US" sz="1400" b="0" u="none" strike="noStrike">
+              <a:rPr lang="pt-BR" sz="1400" b="0" u="none" strike="noStrike">
                 <a:solidFill>
                   <a:srgbClr val="333333"/>
                 </a:solidFill>
@@ -10066,7 +10180,7 @@
         <p:spPr>
           <a:xfrm>
             <a:off x="713160" y="2867400"/>
-            <a:ext cx="109440" cy="109440"/>
+            <a:ext cx="109080" cy="109080"/>
           </a:xfrm>
           <a:prstGeom prst="rect">
             <a:avLst/>
@@ -10088,10 +10202,11 @@
           <a:fontRef idx="minor"/>
         </p:style>
         <p:txBody>
-          <a:bodyPr lIns="90000" tIns="45000" rIns="90000" bIns="45000" anchor="t">
-            <a:noAutofit/>
-          </a:bodyPr>
-          <a:p>
+          <a:bodyPr lIns="54720" tIns="45000" rIns="54720" bIns="45000" anchor="t">
+            <a:noAutofit/>
+          </a:bodyPr>
+          <a:p>
+            <a:pPr/>
             <a:endParaRPr lang="pt-BR" sz="1800" b="0" u="none" strike="noStrike">
               <a:solidFill>
                 <a:srgbClr val="000000"/>
@@ -10112,7 +10227,7 @@
         <p:spPr>
           <a:xfrm>
             <a:off x="960120" y="2785320"/>
-            <a:ext cx="10515240" cy="773280"/>
+            <a:ext cx="10514880" cy="772920"/>
           </a:xfrm>
           <a:prstGeom prst="rect">
             <a:avLst/>
@@ -10142,7 +10257,7 @@
               </a:tabLst>
             </a:pPr>
             <a:r>
-              <a:rPr lang="en-US" sz="1400" b="1" u="none" strike="noStrike">
+              <a:rPr lang="pt-BR" sz="1400" b="1" u="none" strike="noStrike">
                 <a:solidFill>
                   <a:srgbClr val="00695F"/>
                 </a:solidFill>
@@ -10172,7 +10287,7 @@
               </a:tabLst>
             </a:pPr>
             <a:r>
-              <a:rPr lang="en-US" sz="1400" b="0" u="none" strike="noStrike">
+              <a:rPr lang="pt-BR" sz="1400" b="0" u="none" strike="noStrike">
                 <a:solidFill>
                   <a:srgbClr val="333333"/>
                 </a:solidFill>
@@ -10203,7 +10318,7 @@
         <p:spPr>
           <a:xfrm>
             <a:off x="713160" y="3714120"/>
-            <a:ext cx="109440" cy="109440"/>
+            <a:ext cx="109080" cy="109080"/>
           </a:xfrm>
           <a:prstGeom prst="rect">
             <a:avLst/>
@@ -10225,10 +10340,11 @@
           <a:fontRef idx="minor"/>
         </p:style>
         <p:txBody>
-          <a:bodyPr lIns="90000" tIns="45000" rIns="90000" bIns="45000" anchor="t">
-            <a:noAutofit/>
-          </a:bodyPr>
-          <a:p>
+          <a:bodyPr lIns="54720" tIns="45000" rIns="54720" bIns="45000" anchor="t">
+            <a:noAutofit/>
+          </a:bodyPr>
+          <a:p>
+            <a:pPr/>
             <a:endParaRPr lang="pt-BR" sz="1800" b="0" u="none" strike="noStrike">
               <a:solidFill>
                 <a:srgbClr val="000000"/>
@@ -10249,7 +10365,7 @@
         <p:spPr>
           <a:xfrm>
             <a:off x="960120" y="3632040"/>
-            <a:ext cx="10515240" cy="773280"/>
+            <a:ext cx="10514880" cy="772920"/>
           </a:xfrm>
           <a:prstGeom prst="rect">
             <a:avLst/>
@@ -10279,7 +10395,7 @@
               </a:tabLst>
             </a:pPr>
             <a:r>
-              <a:rPr lang="en-US" sz="1400" b="1" u="none" strike="noStrike">
+              <a:rPr lang="pt-BR" sz="1400" b="1" u="none" strike="noStrike">
                 <a:solidFill>
                   <a:srgbClr val="00695F"/>
                 </a:solidFill>
@@ -10309,7 +10425,7 @@
               </a:tabLst>
             </a:pPr>
             <a:r>
-              <a:rPr lang="en-US" sz="1400" b="0" u="none" strike="noStrike">
+              <a:rPr lang="pt-BR" sz="1400" b="0" u="none" strike="noStrike">
                 <a:solidFill>
                   <a:srgbClr val="333333"/>
                 </a:solidFill>
@@ -10340,7 +10456,7 @@
         <p:spPr>
           <a:xfrm>
             <a:off x="713160" y="4561200"/>
-            <a:ext cx="109440" cy="109440"/>
+            <a:ext cx="109080" cy="109080"/>
           </a:xfrm>
           <a:prstGeom prst="rect">
             <a:avLst/>
@@ -10362,10 +10478,11 @@
           <a:fontRef idx="minor"/>
         </p:style>
         <p:txBody>
-          <a:bodyPr lIns="90000" tIns="45000" rIns="90000" bIns="45000" anchor="t">
-            <a:noAutofit/>
-          </a:bodyPr>
-          <a:p>
+          <a:bodyPr lIns="54720" tIns="45000" rIns="54720" bIns="45000" anchor="t">
+            <a:noAutofit/>
+          </a:bodyPr>
+          <a:p>
+            <a:pPr/>
             <a:endParaRPr lang="pt-BR" sz="1800" b="0" u="none" strike="noStrike">
               <a:solidFill>
                 <a:srgbClr val="000000"/>
@@ -10386,7 +10503,7 @@
         <p:spPr>
           <a:xfrm>
             <a:off x="960120" y="4478760"/>
-            <a:ext cx="10515240" cy="773280"/>
+            <a:ext cx="10514880" cy="772920"/>
           </a:xfrm>
           <a:prstGeom prst="rect">
             <a:avLst/>
@@ -10416,7 +10533,7 @@
               </a:tabLst>
             </a:pPr>
             <a:r>
-              <a:rPr lang="en-US" sz="1400" b="1" u="none" strike="noStrike">
+              <a:rPr lang="pt-BR" sz="1400" b="1" u="none" strike="noStrike">
                 <a:solidFill>
                   <a:srgbClr val="00695F"/>
                 </a:solidFill>
@@ -10446,7 +10563,7 @@
               </a:tabLst>
             </a:pPr>
             <a:r>
-              <a:rPr lang="en-US" sz="1400" b="0" u="none" strike="noStrike">
+              <a:rPr lang="pt-BR" sz="1400" b="0" u="none" strike="noStrike">
                 <a:solidFill>
                   <a:srgbClr val="333333"/>
                 </a:solidFill>
@@ -10477,7 +10594,7 @@
         <p:spPr>
           <a:xfrm>
             <a:off x="713160" y="5407920"/>
-            <a:ext cx="109440" cy="109440"/>
+            <a:ext cx="109080" cy="109080"/>
           </a:xfrm>
           <a:prstGeom prst="rect">
             <a:avLst/>
@@ -10499,10 +10616,11 @@
           <a:fontRef idx="minor"/>
         </p:style>
         <p:txBody>
-          <a:bodyPr lIns="90000" tIns="45000" rIns="90000" bIns="45000" anchor="t">
-            <a:noAutofit/>
-          </a:bodyPr>
-          <a:p>
+          <a:bodyPr lIns="54720" tIns="45000" rIns="54720" bIns="45000" anchor="t">
+            <a:noAutofit/>
+          </a:bodyPr>
+          <a:p>
+            <a:pPr/>
             <a:endParaRPr lang="pt-BR" sz="1800" b="0" u="none" strike="noStrike">
               <a:solidFill>
                 <a:srgbClr val="000000"/>
@@ -10523,7 +10641,7 @@
         <p:spPr>
           <a:xfrm>
             <a:off x="960120" y="5325480"/>
-            <a:ext cx="10515240" cy="773280"/>
+            <a:ext cx="10514880" cy="772920"/>
           </a:xfrm>
           <a:prstGeom prst="rect">
             <a:avLst/>
@@ -10553,7 +10671,7 @@
               </a:tabLst>
             </a:pPr>
             <a:r>
-              <a:rPr lang="en-US" sz="1400" b="1" u="none" strike="noStrike">
+              <a:rPr lang="pt-BR" sz="1400" b="1" u="none" strike="noStrike">
                 <a:solidFill>
                   <a:srgbClr val="00695F"/>
                 </a:solidFill>
@@ -10583,7 +10701,7 @@
               </a:tabLst>
             </a:pPr>
             <a:r>
-              <a:rPr lang="en-US" sz="1400" b="0" u="none" strike="noStrike">
+              <a:rPr lang="pt-BR" sz="1400" b="0" u="none" strike="noStrike">
                 <a:solidFill>
                   <a:srgbClr val="333333"/>
                 </a:solidFill>
@@ -10614,7 +10732,7 @@
         <p:spPr>
           <a:xfrm>
             <a:off x="548640" y="6419160"/>
-            <a:ext cx="8229240" cy="273960"/>
+            <a:ext cx="8228880" cy="273600"/>
           </a:xfrm>
           <a:prstGeom prst="rect">
             <a:avLst/>
@@ -10644,7 +10762,7 @@
               </a:tabLst>
             </a:pPr>
             <a:r>
-              <a:rPr lang="en-US" sz="900" b="0" u="none" strike="noStrike">
+              <a:rPr lang="pt-BR" sz="900" b="0" u="none" strike="noStrike">
                 <a:solidFill>
                   <a:srgbClr val="5A5A5A"/>
                 </a:solidFill>
@@ -10711,8 +10829,8 @@
         </p:nvSpPr>
         <p:spPr>
           <a:xfrm rot="10800000">
-            <a:off x="9391320" y="0"/>
-            <a:ext cx="2806920" cy="2806920"/>
+            <a:off x="9391680" y="0"/>
+            <a:ext cx="2806560" cy="2806560"/>
           </a:xfrm>
           <a:prstGeom prst="rtTriangle">
             <a:avLst/>
@@ -10738,6 +10856,7 @@
             <a:noAutofit/>
           </a:bodyPr>
           <a:p>
+            <a:pPr/>
             <a:endParaRPr lang="pt-BR" sz="1800" b="0" u="none" strike="noStrike">
               <a:solidFill>
                 <a:srgbClr val="000000"/>
@@ -10762,7 +10881,7 @@
         <p:spPr>
           <a:xfrm>
             <a:off x="10954440" y="612720"/>
-            <a:ext cx="664560" cy="306720"/>
+            <a:ext cx="664200" cy="306360"/>
           </a:xfrm>
           <a:prstGeom prst="rect">
             <a:avLst/>
@@ -10782,7 +10901,7 @@
         <p:spPr>
           <a:xfrm>
             <a:off x="1005840" y="1965960"/>
-            <a:ext cx="7314840" cy="319680"/>
+            <a:ext cx="7314480" cy="319320"/>
           </a:xfrm>
           <a:prstGeom prst="rect">
             <a:avLst/>
@@ -10812,7 +10931,7 @@
               </a:tabLst>
             </a:pPr>
             <a:r>
-              <a:rPr lang="en-US" sz="1200" b="1" u="none" spc="300" strike="noStrike">
+              <a:rPr lang="pt-BR" sz="1200" b="1" u="none" spc="300" strike="noStrike">
                 <a:solidFill>
                   <a:srgbClr val="FFDA1A"/>
                 </a:solidFill>
@@ -10843,7 +10962,7 @@
         <p:spPr>
           <a:xfrm>
             <a:off x="1005840" y="2377440"/>
-            <a:ext cx="9692280" cy="2102760"/>
+            <a:ext cx="9691920" cy="2102400"/>
           </a:xfrm>
           <a:prstGeom prst="rect">
             <a:avLst/>
@@ -10873,7 +10992,7 @@
               </a:tabLst>
             </a:pPr>
             <a:r>
-              <a:rPr lang="en-US" sz="2500" b="1" u="none" strike="noStrike">
+              <a:rPr lang="pt-BR" sz="2500" b="1" u="none" strike="noStrike">
                 <a:solidFill>
                   <a:srgbClr val="FFFFFF"/>
                 </a:solidFill>
@@ -10904,7 +11023,7 @@
         <p:spPr>
           <a:xfrm>
             <a:off x="1005840" y="4754880"/>
-            <a:ext cx="9692280" cy="548280"/>
+            <a:ext cx="9691920" cy="547920"/>
           </a:xfrm>
           <a:prstGeom prst="rect">
             <a:avLst/>
@@ -10934,7 +11053,7 @@
               </a:tabLst>
             </a:pPr>
             <a:r>
-              <a:rPr lang="en-US" sz="1300" b="0" i="1" u="none" strike="noStrike">
+              <a:rPr lang="pt-BR" sz="1300" b="0" i="1" u="none" strike="noStrike">
                 <a:solidFill>
                   <a:srgbClr val="9BD8D2"/>
                 </a:solidFill>
@@ -10995,7 +11114,7 @@
         <p:spPr>
           <a:xfrm rot="5400000">
             <a:off x="0" y="0"/>
-            <a:ext cx="2514240" cy="2514240"/>
+            <a:ext cx="2513880" cy="2513880"/>
           </a:xfrm>
           <a:prstGeom prst="rtTriangle">
             <a:avLst/>
@@ -11021,6 +11140,7 @@
             <a:noAutofit/>
           </a:bodyPr>
           <a:p>
+            <a:pPr/>
             <a:endParaRPr lang="pt-BR" sz="1800" b="0" u="none" strike="noStrike">
               <a:solidFill>
                 <a:srgbClr val="FFFFFF"/>
@@ -11040,8 +11160,8 @@
         </p:nvSpPr>
         <p:spPr>
           <a:xfrm rot="10800000">
-            <a:off x="9391320" y="0"/>
-            <a:ext cx="2806920" cy="2806920"/>
+            <a:off x="9391680" y="0"/>
+            <a:ext cx="2806560" cy="2806560"/>
           </a:xfrm>
           <a:prstGeom prst="rtTriangle">
             <a:avLst/>
@@ -11067,6 +11187,7 @@
             <a:noAutofit/>
           </a:bodyPr>
           <a:p>
+            <a:pPr/>
             <a:endParaRPr lang="pt-BR" sz="1800" b="0" u="none" strike="noStrike">
               <a:solidFill>
                 <a:srgbClr val="000000"/>
@@ -11091,7 +11212,7 @@
         <p:spPr>
           <a:xfrm>
             <a:off x="10954440" y="612720"/>
-            <a:ext cx="664560" cy="306720"/>
+            <a:ext cx="664200" cy="306360"/>
           </a:xfrm>
           <a:prstGeom prst="rect">
             <a:avLst/>
@@ -11111,7 +11232,7 @@
         <p:spPr>
           <a:xfrm>
             <a:off x="1691640" y="749880"/>
-            <a:ext cx="8503560" cy="658080"/>
+            <a:ext cx="8503200" cy="657720"/>
           </a:xfrm>
           <a:prstGeom prst="rect">
             <a:avLst/>
@@ -11141,7 +11262,7 @@
               </a:tabLst>
             </a:pPr>
             <a:r>
-              <a:rPr lang="en-US" sz="2800" b="1" u="none" strike="noStrike">
+              <a:rPr lang="pt-BR" sz="2800" b="1" u="none" strike="noStrike">
                 <a:solidFill>
                   <a:srgbClr val="00A59A"/>
                 </a:solidFill>
@@ -11172,7 +11293,7 @@
         <p:spPr>
           <a:xfrm>
             <a:off x="1691640" y="1389960"/>
-            <a:ext cx="8503560" cy="328680"/>
+            <a:ext cx="8503200" cy="328320"/>
           </a:xfrm>
           <a:prstGeom prst="rect">
             <a:avLst/>
@@ -11202,7 +11323,7 @@
               </a:tabLst>
             </a:pPr>
             <a:r>
-              <a:rPr lang="en-US" sz="1300" b="0" i="1" u="none" strike="noStrike">
+              <a:rPr lang="pt-BR" sz="1300" b="0" i="1" u="none" strike="noStrike">
                 <a:solidFill>
                   <a:srgbClr val="5A5A5A"/>
                 </a:solidFill>
@@ -11233,7 +11354,7 @@
         <p:spPr>
           <a:xfrm>
             <a:off x="658440" y="2121480"/>
-            <a:ext cx="3419640" cy="3108600"/>
+            <a:ext cx="3419280" cy="3108240"/>
           </a:xfrm>
           <a:prstGeom prst="roundRect">
             <a:avLst>
@@ -11261,6 +11382,7 @@
             <a:noAutofit/>
           </a:bodyPr>
           <a:p>
+            <a:pPr/>
             <a:endParaRPr lang="pt-BR" sz="1800" b="0" u="none" strike="noStrike">
               <a:solidFill>
                 <a:srgbClr val="000000"/>
@@ -11281,7 +11403,7 @@
         <p:spPr>
           <a:xfrm>
             <a:off x="859680" y="2304360"/>
-            <a:ext cx="310680" cy="310680"/>
+            <a:ext cx="310320" cy="310320"/>
           </a:xfrm>
           <a:prstGeom prst="roundRect">
             <a:avLst>
@@ -11309,6 +11431,7 @@
             <a:noAutofit/>
           </a:bodyPr>
           <a:p>
+            <a:pPr/>
             <a:endParaRPr lang="pt-BR" sz="1800" b="0" u="none" strike="noStrike">
               <a:solidFill>
                 <a:srgbClr val="FFFFFF"/>
@@ -11329,7 +11452,7 @@
         <p:spPr>
           <a:xfrm>
             <a:off x="859680" y="2304360"/>
-            <a:ext cx="310680" cy="310680"/>
+            <a:ext cx="310320" cy="310320"/>
           </a:xfrm>
           <a:prstGeom prst="rect">
             <a:avLst/>
@@ -11359,7 +11482,7 @@
               </a:tabLst>
             </a:pPr>
             <a:r>
-              <a:rPr lang="en-US" sz="1300" b="1" u="none" strike="noStrike">
+              <a:rPr lang="pt-BR" sz="1300" b="1" u="none" strike="noStrike">
                 <a:solidFill>
                   <a:srgbClr val="FFFFFF"/>
                 </a:solidFill>
@@ -11390,7 +11513,7 @@
         <p:spPr>
           <a:xfrm>
             <a:off x="1261800" y="2304360"/>
-            <a:ext cx="2614680" cy="328680"/>
+            <a:ext cx="2614320" cy="328320"/>
           </a:xfrm>
           <a:prstGeom prst="rect">
             <a:avLst/>
@@ -11420,7 +11543,7 @@
               </a:tabLst>
             </a:pPr>
             <a:r>
-              <a:rPr lang="en-US" sz="1400" b="1" u="none" strike="noStrike">
+              <a:rPr lang="pt-BR" sz="1400" b="1" u="none" strike="noStrike">
                 <a:solidFill>
                   <a:srgbClr val="00695F"/>
                 </a:solidFill>
@@ -11451,7 +11574,7 @@
         <p:spPr>
           <a:xfrm>
             <a:off x="859680" y="2724840"/>
-            <a:ext cx="3017160" cy="2322360"/>
+            <a:ext cx="3016800" cy="2322000"/>
           </a:xfrm>
           <a:prstGeom prst="rect">
             <a:avLst/>
@@ -11481,7 +11604,7 @@
               </a:tabLst>
             </a:pPr>
             <a:r>
-              <a:rPr lang="en-US" sz="1250" b="0" u="none" strike="noStrike">
+              <a:rPr lang="pt-BR" sz="1250" b="0" u="none" strike="noStrike">
                 <a:solidFill>
                   <a:srgbClr val="333333"/>
                 </a:solidFill>
@@ -11512,7 +11635,7 @@
         <p:spPr>
           <a:xfrm>
             <a:off x="4334400" y="2121480"/>
-            <a:ext cx="3419640" cy="3108600"/>
+            <a:ext cx="3419280" cy="3108240"/>
           </a:xfrm>
           <a:prstGeom prst="roundRect">
             <a:avLst>
@@ -11540,6 +11663,7 @@
             <a:noAutofit/>
           </a:bodyPr>
           <a:p>
+            <a:pPr/>
             <a:endParaRPr lang="pt-BR" sz="1800" b="0" u="none" strike="noStrike">
               <a:solidFill>
                 <a:srgbClr val="000000"/>
@@ -11560,7 +11684,7 @@
         <p:spPr>
           <a:xfrm>
             <a:off x="4535280" y="2304360"/>
-            <a:ext cx="310680" cy="310680"/>
+            <a:ext cx="310320" cy="310320"/>
           </a:xfrm>
           <a:prstGeom prst="roundRect">
             <a:avLst>
@@ -11588,6 +11712,7 @@
             <a:noAutofit/>
           </a:bodyPr>
           <a:p>
+            <a:pPr/>
             <a:endParaRPr lang="pt-BR" sz="1800" b="0" u="none" strike="noStrike">
               <a:solidFill>
                 <a:srgbClr val="FFFFFF"/>
@@ -11608,7 +11733,7 @@
         <p:spPr>
           <a:xfrm>
             <a:off x="4535280" y="2304360"/>
-            <a:ext cx="310680" cy="310680"/>
+            <a:ext cx="310320" cy="310320"/>
           </a:xfrm>
           <a:prstGeom prst="rect">
             <a:avLst/>
@@ -11638,7 +11763,7 @@
               </a:tabLst>
             </a:pPr>
             <a:r>
-              <a:rPr lang="en-US" sz="1300" b="1" u="none" strike="noStrike">
+              <a:rPr lang="pt-BR" sz="1300" b="1" u="none" strike="noStrike">
                 <a:solidFill>
                   <a:srgbClr val="FFFFFF"/>
                 </a:solidFill>
@@ -11669,7 +11794,7 @@
         <p:spPr>
           <a:xfrm>
             <a:off x="4937760" y="2304360"/>
-            <a:ext cx="2614680" cy="328680"/>
+            <a:ext cx="2614320" cy="328320"/>
           </a:xfrm>
           <a:prstGeom prst="rect">
             <a:avLst/>
@@ -11699,7 +11824,7 @@
               </a:tabLst>
             </a:pPr>
             <a:r>
-              <a:rPr lang="en-US" sz="1400" b="1" u="none" strike="noStrike">
+              <a:rPr lang="pt-BR" sz="1400" b="1" u="none" strike="noStrike">
                 <a:solidFill>
                   <a:srgbClr val="00695F"/>
                 </a:solidFill>
@@ -11730,7 +11855,7 @@
         <p:spPr>
           <a:xfrm>
             <a:off x="4535280" y="2724840"/>
-            <a:ext cx="3017160" cy="2322360"/>
+            <a:ext cx="3016800" cy="2322000"/>
           </a:xfrm>
           <a:prstGeom prst="rect">
             <a:avLst/>
@@ -11760,7 +11885,7 @@
               </a:tabLst>
             </a:pPr>
             <a:r>
-              <a:rPr lang="en-US" sz="1250" b="0" u="none" strike="noStrike">
+              <a:rPr lang="pt-BR" sz="1250" b="0" u="none" strike="noStrike">
                 <a:solidFill>
                   <a:srgbClr val="333333"/>
                 </a:solidFill>
@@ -11791,7 +11916,7 @@
         <p:spPr>
           <a:xfrm>
             <a:off x="8010000" y="2121480"/>
-            <a:ext cx="3419640" cy="3108600"/>
+            <a:ext cx="3419280" cy="3108240"/>
           </a:xfrm>
           <a:prstGeom prst="roundRect">
             <a:avLst>
@@ -11819,6 +11944,7 @@
             <a:noAutofit/>
           </a:bodyPr>
           <a:p>
+            <a:pPr/>
             <a:endParaRPr lang="pt-BR" sz="1800" b="0" u="none" strike="noStrike">
               <a:solidFill>
                 <a:srgbClr val="000000"/>
@@ -11839,7 +11965,7 @@
         <p:spPr>
           <a:xfrm>
             <a:off x="8211240" y="2304360"/>
-            <a:ext cx="310680" cy="310680"/>
+            <a:ext cx="310320" cy="310320"/>
           </a:xfrm>
           <a:prstGeom prst="roundRect">
             <a:avLst>
@@ -11867,6 +11993,7 @@
             <a:noAutofit/>
           </a:bodyPr>
           <a:p>
+            <a:pPr/>
             <a:endParaRPr lang="pt-BR" sz="1800" b="0" u="none" strike="noStrike">
               <a:solidFill>
                 <a:srgbClr val="FFFFFF"/>
@@ -11887,7 +12014,7 @@
         <p:spPr>
           <a:xfrm>
             <a:off x="8211240" y="2304360"/>
-            <a:ext cx="310680" cy="310680"/>
+            <a:ext cx="310320" cy="310320"/>
           </a:xfrm>
           <a:prstGeom prst="rect">
             <a:avLst/>
@@ -11917,7 +12044,7 @@
               </a:tabLst>
             </a:pPr>
             <a:r>
-              <a:rPr lang="en-US" sz="1300" b="1" u="none" strike="noStrike">
+              <a:rPr lang="pt-BR" sz="1300" b="1" u="none" strike="noStrike">
                 <a:solidFill>
                   <a:srgbClr val="FFFFFF"/>
                 </a:solidFill>
@@ -11948,7 +12075,7 @@
         <p:spPr>
           <a:xfrm>
             <a:off x="8613720" y="2304360"/>
-            <a:ext cx="2614680" cy="328680"/>
+            <a:ext cx="2614320" cy="328320"/>
           </a:xfrm>
           <a:prstGeom prst="rect">
             <a:avLst/>
@@ -11978,7 +12105,7 @@
               </a:tabLst>
             </a:pPr>
             <a:r>
-              <a:rPr lang="en-US" sz="1400" b="1" u="none" strike="noStrike">
+              <a:rPr lang="pt-BR" sz="1400" b="1" u="none" strike="noStrike">
                 <a:solidFill>
                   <a:srgbClr val="00695F"/>
                 </a:solidFill>
@@ -12009,7 +12136,7 @@
         <p:spPr>
           <a:xfrm>
             <a:off x="8211240" y="2724840"/>
-            <a:ext cx="3017160" cy="2322360"/>
+            <a:ext cx="3016800" cy="2322000"/>
           </a:xfrm>
           <a:prstGeom prst="rect">
             <a:avLst/>
@@ -12039,7 +12166,7 @@
               </a:tabLst>
             </a:pPr>
             <a:r>
-              <a:rPr lang="en-US" sz="1250" b="0" u="none" strike="noStrike">
+              <a:rPr lang="pt-BR" sz="1250" b="0" u="none" strike="noStrike">
                 <a:solidFill>
                   <a:srgbClr val="333333"/>
                 </a:solidFill>
@@ -12070,7 +12197,7 @@
         <p:spPr>
           <a:xfrm>
             <a:off x="548640" y="6419160"/>
-            <a:ext cx="8229240" cy="273960"/>
+            <a:ext cx="8228880" cy="273600"/>
           </a:xfrm>
           <a:prstGeom prst="rect">
             <a:avLst/>
@@ -12100,7 +12227,7 @@
               </a:tabLst>
             </a:pPr>
             <a:r>
-              <a:rPr lang="en-US" sz="900" b="0" u="none" strike="noStrike">
+              <a:rPr lang="pt-BR" sz="900" b="0" u="none" strike="noStrike">
                 <a:solidFill>
                   <a:srgbClr val="5A5A5A"/>
                 </a:solidFill>
@@ -12167,8 +12294,8 @@
         </p:nvSpPr>
         <p:spPr>
           <a:xfrm rot="10800000">
-            <a:off x="9391320" y="0"/>
-            <a:ext cx="2806920" cy="2806920"/>
+            <a:off x="9391680" y="0"/>
+            <a:ext cx="2806560" cy="2806560"/>
           </a:xfrm>
           <a:prstGeom prst="rtTriangle">
             <a:avLst/>
@@ -12194,6 +12321,7 @@
             <a:noAutofit/>
           </a:bodyPr>
           <a:p>
+            <a:pPr/>
             <a:endParaRPr lang="pt-BR" sz="1800" b="0" u="none" strike="noStrike">
               <a:solidFill>
                 <a:srgbClr val="000000"/>
@@ -12218,7 +12346,7 @@
         <p:spPr>
           <a:xfrm>
             <a:off x="10954440" y="612720"/>
-            <a:ext cx="664560" cy="306720"/>
+            <a:ext cx="664200" cy="306360"/>
           </a:xfrm>
           <a:prstGeom prst="rect">
             <a:avLst/>
@@ -12238,7 +12366,7 @@
         <p:spPr>
           <a:xfrm>
             <a:off x="914400" y="2331720"/>
-            <a:ext cx="7772040" cy="319680"/>
+            <a:ext cx="7771680" cy="319320"/>
           </a:xfrm>
           <a:prstGeom prst="rect">
             <a:avLst/>
@@ -12268,7 +12396,7 @@
               </a:tabLst>
             </a:pPr>
             <a:r>
-              <a:rPr lang="en-US" sz="1300" b="1" u="none" spc="300" strike="noStrike">
+              <a:rPr lang="pt-BR" sz="1300" b="1" u="none" spc="300" strike="noStrike">
                 <a:solidFill>
                   <a:srgbClr val="FFDA1A"/>
                 </a:solidFill>
@@ -12299,7 +12427,7 @@
         <p:spPr>
           <a:xfrm>
             <a:off x="914400" y="2697480"/>
-            <a:ext cx="8229240" cy="1096920"/>
+            <a:ext cx="8228880" cy="1096560"/>
           </a:xfrm>
           <a:prstGeom prst="rect">
             <a:avLst/>
@@ -12329,7 +12457,7 @@
               </a:tabLst>
             </a:pPr>
             <a:r>
-              <a:rPr lang="en-US" sz="3600" b="1" u="none" strike="noStrike">
+              <a:rPr lang="pt-BR" sz="3600" b="1" u="none" strike="noStrike">
                 <a:solidFill>
                   <a:srgbClr val="FFFFFF"/>
                 </a:solidFill>
@@ -12360,7 +12488,7 @@
         <p:spPr>
           <a:xfrm>
             <a:off x="914400" y="3840480"/>
-            <a:ext cx="8046360" cy="822600"/>
+            <a:ext cx="8046000" cy="822240"/>
           </a:xfrm>
           <a:prstGeom prst="rect">
             <a:avLst/>
@@ -12390,7 +12518,7 @@
               </a:tabLst>
             </a:pPr>
             <a:r>
-              <a:rPr lang="en-US" sz="1500" b="0" u="none" strike="noStrike">
+              <a:rPr lang="pt-BR" sz="1500" b="0" u="none" strike="noStrike">
                 <a:solidFill>
                   <a:srgbClr val="D8F1EE"/>
                 </a:solidFill>
@@ -12451,7 +12579,7 @@
         <p:spPr>
           <a:xfrm rot="5400000">
             <a:off x="0" y="0"/>
-            <a:ext cx="2514240" cy="2514240"/>
+            <a:ext cx="2513880" cy="2513880"/>
           </a:xfrm>
           <a:prstGeom prst="rtTriangle">
             <a:avLst/>
@@ -12477,6 +12605,7 @@
             <a:noAutofit/>
           </a:bodyPr>
           <a:p>
+            <a:pPr/>
             <a:endParaRPr lang="pt-BR" sz="1800" b="0" u="none" strike="noStrike">
               <a:solidFill>
                 <a:srgbClr val="FFFFFF"/>
@@ -12496,8 +12625,8 @@
         </p:nvSpPr>
         <p:spPr>
           <a:xfrm rot="10800000">
-            <a:off x="9391320" y="0"/>
-            <a:ext cx="2806920" cy="2806920"/>
+            <a:off x="9391680" y="0"/>
+            <a:ext cx="2806560" cy="2806560"/>
           </a:xfrm>
           <a:prstGeom prst="rtTriangle">
             <a:avLst/>
@@ -12523,6 +12652,7 @@
             <a:noAutofit/>
           </a:bodyPr>
           <a:p>
+            <a:pPr/>
             <a:endParaRPr lang="pt-BR" sz="1800" b="0" u="none" strike="noStrike">
               <a:solidFill>
                 <a:srgbClr val="000000"/>
@@ -12547,7 +12677,7 @@
         <p:spPr>
           <a:xfrm>
             <a:off x="10954440" y="612720"/>
-            <a:ext cx="664560" cy="306720"/>
+            <a:ext cx="664200" cy="306360"/>
           </a:xfrm>
           <a:prstGeom prst="rect">
             <a:avLst/>
@@ -12567,7 +12697,7 @@
         <p:spPr>
           <a:xfrm>
             <a:off x="1691640" y="749880"/>
-            <a:ext cx="8503560" cy="658080"/>
+            <a:ext cx="8503200" cy="657720"/>
           </a:xfrm>
           <a:prstGeom prst="rect">
             <a:avLst/>
@@ -12597,7 +12727,7 @@
               </a:tabLst>
             </a:pPr>
             <a:r>
-              <a:rPr lang="en-US" sz="2800" b="1" u="none" strike="noStrike">
+              <a:rPr lang="pt-BR" sz="2800" b="1" u="none" strike="noStrike">
                 <a:solidFill>
                   <a:srgbClr val="00A59A"/>
                 </a:solidFill>
@@ -12628,7 +12758,7 @@
         <p:spPr>
           <a:xfrm>
             <a:off x="1691640" y="1389960"/>
-            <a:ext cx="8503560" cy="328680"/>
+            <a:ext cx="8503200" cy="328320"/>
           </a:xfrm>
           <a:prstGeom prst="rect">
             <a:avLst/>
@@ -12658,7 +12788,7 @@
               </a:tabLst>
             </a:pPr>
             <a:r>
-              <a:rPr lang="en-US" sz="1300" b="0" i="1" u="none" strike="noStrike">
+              <a:rPr lang="pt-BR" sz="1300" b="0" i="1" u="none" strike="noStrike">
                 <a:solidFill>
                   <a:srgbClr val="5A5A5A"/>
                 </a:solidFill>
@@ -12689,7 +12819,7 @@
         <p:spPr>
           <a:xfrm>
             <a:off x="658440" y="2148840"/>
-            <a:ext cx="6766200" cy="4141800"/>
+            <a:ext cx="6765840" cy="4141440"/>
           </a:xfrm>
           <a:prstGeom prst="roundRect">
             <a:avLst>
@@ -12717,6 +12847,7 @@
             <a:noAutofit/>
           </a:bodyPr>
           <a:p>
+            <a:pPr/>
             <a:endParaRPr lang="pt-BR" sz="1800" b="0" u="none" strike="noStrike">
               <a:solidFill>
                 <a:srgbClr val="FFFFFF"/>
@@ -12737,7 +12868,7 @@
         <p:spPr>
           <a:xfrm>
             <a:off x="868680" y="2313360"/>
-            <a:ext cx="6345720" cy="3812760"/>
+            <a:ext cx="6345360" cy="3812400"/>
           </a:xfrm>
           <a:prstGeom prst="rect">
             <a:avLst/>
@@ -12767,7 +12898,7 @@
               </a:tabLst>
             </a:pPr>
             <a:r>
-              <a:rPr lang="en-US" sz="1030" b="0" u="none" strike="noStrike">
+              <a:rPr lang="pt-BR" sz="1030" b="0" u="none" strike="noStrike">
                 <a:solidFill>
                   <a:srgbClr val="E8F4F2"/>
                 </a:solidFill>
@@ -12815,7 +12946,7 @@
               </a:tabLst>
             </a:pPr>
             <a:r>
-              <a:rPr lang="en-US" sz="1030" b="0" u="none" strike="noStrike">
+              <a:rPr lang="pt-BR" sz="1030" b="0" u="none" strike="noStrike">
                 <a:solidFill>
                   <a:srgbClr val="E8F4F2"/>
                 </a:solidFill>
@@ -12845,7 +12976,7 @@
               </a:tabLst>
             </a:pPr>
             <a:r>
-              <a:rPr lang="en-US" sz="1030" b="0" u="none" strike="noStrike">
+              <a:rPr lang="pt-BR" sz="1030" b="0" u="none" strike="noStrike">
                 <a:solidFill>
                   <a:srgbClr val="E8F4F2"/>
                 </a:solidFill>
@@ -12875,7 +13006,7 @@
               </a:tabLst>
             </a:pPr>
             <a:r>
-              <a:rPr lang="en-US" sz="1030" b="0" u="none" strike="noStrike">
+              <a:rPr lang="pt-BR" sz="1030" b="0" u="none" strike="noStrike">
                 <a:solidFill>
                   <a:srgbClr val="E8F4F2"/>
                 </a:solidFill>
@@ -12905,7 +13036,7 @@
               </a:tabLst>
             </a:pPr>
             <a:r>
-              <a:rPr lang="en-US" sz="1030" b="0" u="none" strike="noStrike">
+              <a:rPr lang="pt-BR" sz="1030" b="0" u="none" strike="noStrike">
                 <a:solidFill>
                   <a:srgbClr val="E8F4F2"/>
                 </a:solidFill>
@@ -12953,7 +13084,7 @@
               </a:tabLst>
             </a:pPr>
             <a:r>
-              <a:rPr lang="en-US" sz="1030" b="0" u="none" strike="noStrike">
+              <a:rPr lang="pt-BR" sz="1030" b="0" u="none" strike="noStrike">
                 <a:solidFill>
                   <a:srgbClr val="E8F4F2"/>
                 </a:solidFill>
@@ -12983,7 +13114,7 @@
               </a:tabLst>
             </a:pPr>
             <a:r>
-              <a:rPr lang="en-US" sz="1030" b="0" u="none" strike="noStrike">
+              <a:rPr lang="pt-BR" sz="1030" b="0" u="none" strike="noStrike">
                 <a:solidFill>
                   <a:srgbClr val="E8F4F2"/>
                 </a:solidFill>
@@ -13013,7 +13144,7 @@
               </a:tabLst>
             </a:pPr>
             <a:r>
-              <a:rPr lang="en-US" sz="1030" b="0" u="none" strike="noStrike">
+              <a:rPr lang="pt-BR" sz="1030" b="0" u="none" strike="noStrike">
                 <a:solidFill>
                   <a:srgbClr val="E8F4F2"/>
                 </a:solidFill>
@@ -13043,7 +13174,7 @@
               </a:tabLst>
             </a:pPr>
             <a:r>
-              <a:rPr lang="en-US" sz="1030" b="0" u="none" strike="noStrike">
+              <a:rPr lang="pt-BR" sz="1030" b="0" u="none" strike="noStrike">
                 <a:solidFill>
                   <a:srgbClr val="E8F4F2"/>
                 </a:solidFill>
@@ -13073,7 +13204,7 @@
               </a:tabLst>
             </a:pPr>
             <a:r>
-              <a:rPr lang="en-US" sz="1030" b="0" u="none" strike="noStrike">
+              <a:rPr lang="pt-BR" sz="1030" b="0" u="none" strike="noStrike">
                 <a:solidFill>
                   <a:srgbClr val="E8F4F2"/>
                 </a:solidFill>
@@ -13121,7 +13252,7 @@
               </a:tabLst>
             </a:pPr>
             <a:r>
-              <a:rPr lang="en-US" sz="1030" b="0" u="none" strike="noStrike">
+              <a:rPr lang="pt-BR" sz="1030" b="0" u="none" strike="noStrike">
                 <a:solidFill>
                   <a:srgbClr val="E8F4F2"/>
                 </a:solidFill>
@@ -13151,7 +13282,7 @@
               </a:tabLst>
             </a:pPr>
             <a:r>
-              <a:rPr lang="en-US" sz="1030" b="0" u="none" strike="noStrike">
+              <a:rPr lang="pt-BR" sz="1030" b="0" u="none" strike="noStrike">
                 <a:solidFill>
                   <a:srgbClr val="E8F4F2"/>
                 </a:solidFill>
@@ -13181,7 +13312,7 @@
               </a:tabLst>
             </a:pPr>
             <a:r>
-              <a:rPr lang="en-US" sz="1030" b="0" u="none" strike="noStrike">
+              <a:rPr lang="pt-BR" sz="1030" b="0" u="none" strike="noStrike">
                 <a:solidFill>
                   <a:srgbClr val="E8F4F2"/>
                 </a:solidFill>
@@ -13229,7 +13360,7 @@
               </a:tabLst>
             </a:pPr>
             <a:r>
-              <a:rPr lang="en-US" sz="1030" b="0" u="none" strike="noStrike">
+              <a:rPr lang="pt-BR" sz="1030" b="0" u="none" strike="noStrike">
                 <a:solidFill>
                   <a:srgbClr val="E8F4F2"/>
                 </a:solidFill>
@@ -13259,7 +13390,7 @@
               </a:tabLst>
             </a:pPr>
             <a:r>
-              <a:rPr lang="en-US" sz="1030" b="0" u="none" strike="noStrike">
+              <a:rPr lang="pt-BR" sz="1030" b="0" u="none" strike="noStrike">
                 <a:solidFill>
                   <a:srgbClr val="E8F4F2"/>
                 </a:solidFill>
@@ -13289,7 +13420,7 @@
               </a:tabLst>
             </a:pPr>
             <a:r>
-              <a:rPr lang="en-US" sz="1030" b="0" u="none" strike="noStrike">
+              <a:rPr lang="pt-BR" sz="1030" b="0" u="none" strike="noStrike">
                 <a:solidFill>
                   <a:srgbClr val="E8F4F2"/>
                 </a:solidFill>
@@ -13319,7 +13450,7 @@
               </a:tabLst>
             </a:pPr>
             <a:r>
-              <a:rPr lang="en-US" sz="1030" b="0" u="none" strike="noStrike">
+              <a:rPr lang="pt-BR" sz="1030" b="0" u="none" strike="noStrike">
                 <a:solidFill>
                   <a:srgbClr val="E8F4F2"/>
                 </a:solidFill>
@@ -13350,7 +13481,7 @@
         <p:spPr>
           <a:xfrm>
             <a:off x="7635240" y="2240280"/>
-            <a:ext cx="3885840" cy="3958920"/>
+            <a:ext cx="3885480" cy="3958560"/>
           </a:xfrm>
           <a:prstGeom prst="rect">
             <a:avLst/>
@@ -13385,7 +13516,7 @@
               <a:buChar char=""/>
             </a:pPr>
             <a:r>
-              <a:rPr lang="en-US" sz="1200" b="0" u="none" strike="noStrike">
+              <a:rPr lang="pt-BR" sz="1200" b="0" u="none" strike="noStrike">
                 <a:solidFill>
                   <a:srgbClr val="333333"/>
                 </a:solidFill>
@@ -13420,7 +13551,7 @@
               <a:buChar char=""/>
             </a:pPr>
             <a:r>
-              <a:rPr lang="en-US" sz="1200" b="0" u="none" strike="noStrike">
+              <a:rPr lang="pt-BR" sz="1200" b="0" u="none" strike="noStrike">
                 <a:solidFill>
                   <a:srgbClr val="333333"/>
                 </a:solidFill>
@@ -13455,7 +13586,7 @@
               <a:buChar char=""/>
             </a:pPr>
             <a:r>
-              <a:rPr lang="en-US" sz="1200" b="0" u="none" strike="noStrike">
+              <a:rPr lang="pt-BR" sz="1200" b="0" u="none" strike="noStrike">
                 <a:solidFill>
                   <a:srgbClr val="333333"/>
                 </a:solidFill>
@@ -13490,7 +13621,7 @@
               <a:buChar char=""/>
             </a:pPr>
             <a:r>
-              <a:rPr lang="en-US" sz="1200" b="0" u="none" strike="noStrike">
+              <a:rPr lang="pt-BR" sz="1200" b="0" u="none" strike="noStrike">
                 <a:solidFill>
                   <a:srgbClr val="333333"/>
                 </a:solidFill>
@@ -13525,7 +13656,7 @@
               <a:buChar char=""/>
             </a:pPr>
             <a:r>
-              <a:rPr lang="en-US" sz="1200" b="0" u="none" strike="noStrike">
+              <a:rPr lang="pt-BR" sz="1200" b="0" u="none" strike="noStrike">
                 <a:solidFill>
                   <a:srgbClr val="333333"/>
                 </a:solidFill>
@@ -13556,7 +13687,7 @@
         <p:spPr>
           <a:xfrm>
             <a:off x="548640" y="6419160"/>
-            <a:ext cx="8229240" cy="273960"/>
+            <a:ext cx="8228880" cy="273600"/>
           </a:xfrm>
           <a:prstGeom prst="rect">
             <a:avLst/>
@@ -13586,7 +13717,7 @@
               </a:tabLst>
             </a:pPr>
             <a:r>
-              <a:rPr lang="en-US" sz="900" b="0" u="none" strike="noStrike">
+              <a:rPr lang="pt-BR" sz="900" b="0" u="none" strike="noStrike">
                 <a:solidFill>
                   <a:srgbClr val="5A5A5A"/>
                 </a:solidFill>
@@ -13647,7 +13778,7 @@
         <p:spPr>
           <a:xfrm rot="5400000">
             <a:off x="0" y="0"/>
-            <a:ext cx="2514240" cy="2514240"/>
+            <a:ext cx="2513880" cy="2513880"/>
           </a:xfrm>
           <a:prstGeom prst="rtTriangle">
             <a:avLst/>
@@ -13673,6 +13804,7 @@
             <a:noAutofit/>
           </a:bodyPr>
           <a:p>
+            <a:pPr/>
             <a:endParaRPr lang="pt-BR" sz="1800" b="0" u="none" strike="noStrike">
               <a:solidFill>
                 <a:srgbClr val="FFFFFF"/>
@@ -13692,8 +13824,8 @@
         </p:nvSpPr>
         <p:spPr>
           <a:xfrm rot="10800000">
-            <a:off x="9391320" y="0"/>
-            <a:ext cx="2806920" cy="2806920"/>
+            <a:off x="9391680" y="0"/>
+            <a:ext cx="2806560" cy="2806560"/>
           </a:xfrm>
           <a:prstGeom prst="rtTriangle">
             <a:avLst/>
@@ -13719,6 +13851,7 @@
             <a:noAutofit/>
           </a:bodyPr>
           <a:p>
+            <a:pPr/>
             <a:endParaRPr lang="pt-BR" sz="1800" b="0" u="none" strike="noStrike">
               <a:solidFill>
                 <a:srgbClr val="000000"/>
@@ -13743,7 +13876,7 @@
         <p:spPr>
           <a:xfrm>
             <a:off x="10954440" y="612720"/>
-            <a:ext cx="664560" cy="306720"/>
+            <a:ext cx="664200" cy="306360"/>
           </a:xfrm>
           <a:prstGeom prst="rect">
             <a:avLst/>
@@ -13763,7 +13896,7 @@
         <p:spPr>
           <a:xfrm>
             <a:off x="1691640" y="749880"/>
-            <a:ext cx="8503560" cy="658080"/>
+            <a:ext cx="8503200" cy="657720"/>
           </a:xfrm>
           <a:prstGeom prst="rect">
             <a:avLst/>
@@ -13793,7 +13926,7 @@
               </a:tabLst>
             </a:pPr>
             <a:r>
-              <a:rPr lang="en-US" sz="2800" b="1" u="none" strike="noStrike">
+              <a:rPr lang="pt-BR" sz="2800" b="1" u="none" strike="noStrike">
                 <a:solidFill>
                   <a:srgbClr val="00A59A"/>
                 </a:solidFill>
@@ -13824,7 +13957,7 @@
         <p:spPr>
           <a:xfrm>
             <a:off x="1691640" y="1389960"/>
-            <a:ext cx="8503560" cy="328680"/>
+            <a:ext cx="8503200" cy="328320"/>
           </a:xfrm>
           <a:prstGeom prst="rect">
             <a:avLst/>
@@ -13854,7 +13987,7 @@
               </a:tabLst>
             </a:pPr>
             <a:r>
-              <a:rPr lang="en-US" sz="1300" b="0" i="1" u="none" strike="noStrike">
+              <a:rPr lang="pt-BR" sz="1300" b="0" i="1" u="none" strike="noStrike">
                 <a:solidFill>
                   <a:srgbClr val="5A5A5A"/>
                 </a:solidFill>
@@ -13885,7 +14018,7 @@
         <p:spPr>
           <a:xfrm>
             <a:off x="658440" y="2148840"/>
-            <a:ext cx="6766200" cy="4141800"/>
+            <a:ext cx="6765840" cy="4141440"/>
           </a:xfrm>
           <a:prstGeom prst="roundRect">
             <a:avLst>
@@ -13913,6 +14046,7 @@
             <a:noAutofit/>
           </a:bodyPr>
           <a:p>
+            <a:pPr/>
             <a:endParaRPr lang="pt-BR" sz="1800" b="0" u="none" strike="noStrike">
               <a:solidFill>
                 <a:srgbClr val="FFFFFF"/>
@@ -13933,7 +14067,7 @@
         <p:spPr>
           <a:xfrm>
             <a:off x="868680" y="2313360"/>
-            <a:ext cx="6345720" cy="3812760"/>
+            <a:ext cx="6345360" cy="3812400"/>
           </a:xfrm>
           <a:prstGeom prst="rect">
             <a:avLst/>
@@ -13963,7 +14097,7 @@
               </a:tabLst>
             </a:pPr>
             <a:r>
-              <a:rPr lang="en-US" sz="720" b="0" u="none" strike="noStrike">
+              <a:rPr lang="pt-BR" sz="720" b="0" u="none" strike="noStrike">
                 <a:solidFill>
                   <a:srgbClr val="E8F4F2"/>
                 </a:solidFill>
@@ -14011,7 +14145,7 @@
               </a:tabLst>
             </a:pPr>
             <a:r>
-              <a:rPr lang="en-US" sz="720" b="0" u="none" strike="noStrike">
+              <a:rPr lang="pt-BR" sz="720" b="0" u="none" strike="noStrike">
                 <a:solidFill>
                   <a:srgbClr val="E8F4F2"/>
                 </a:solidFill>
@@ -14041,7 +14175,7 @@
               </a:tabLst>
             </a:pPr>
             <a:r>
-              <a:rPr lang="en-US" sz="720" b="0" u="none" strike="noStrike">
+              <a:rPr lang="pt-BR" sz="720" b="0" u="none" strike="noStrike">
                 <a:solidFill>
                   <a:srgbClr val="E8F4F2"/>
                 </a:solidFill>
@@ -14071,7 +14205,7 @@
               </a:tabLst>
             </a:pPr>
             <a:r>
-              <a:rPr lang="en-US" sz="720" b="0" u="none" strike="noStrike">
+              <a:rPr lang="pt-BR" sz="720" b="0" u="none" strike="noStrike">
                 <a:solidFill>
                   <a:srgbClr val="E8F4F2"/>
                 </a:solidFill>
@@ -14101,7 +14235,7 @@
               </a:tabLst>
             </a:pPr>
             <a:r>
-              <a:rPr lang="en-US" sz="720" b="0" u="none" strike="noStrike">
+              <a:rPr lang="pt-BR" sz="720" b="0" u="none" strike="noStrike">
                 <a:solidFill>
                   <a:srgbClr val="E8F4F2"/>
                 </a:solidFill>
@@ -14131,7 +14265,7 @@
               </a:tabLst>
             </a:pPr>
             <a:r>
-              <a:rPr lang="en-US" sz="720" b="0" u="none" strike="noStrike">
+              <a:rPr lang="pt-BR" sz="720" b="0" u="none" strike="noStrike">
                 <a:solidFill>
                   <a:srgbClr val="E8F4F2"/>
                 </a:solidFill>
@@ -14161,7 +14295,7 @@
               </a:tabLst>
             </a:pPr>
             <a:r>
-              <a:rPr lang="en-US" sz="720" b="0" u="none" strike="noStrike">
+              <a:rPr lang="pt-BR" sz="720" b="0" u="none" strike="noStrike">
                 <a:solidFill>
                   <a:srgbClr val="E8F4F2"/>
                 </a:solidFill>
@@ -14209,7 +14343,7 @@
               </a:tabLst>
             </a:pPr>
             <a:r>
-              <a:rPr lang="en-US" sz="720" b="0" u="none" strike="noStrike">
+              <a:rPr lang="pt-BR" sz="720" b="0" u="none" strike="noStrike">
                 <a:solidFill>
                   <a:srgbClr val="E8F4F2"/>
                 </a:solidFill>
@@ -14239,7 +14373,7 @@
               </a:tabLst>
             </a:pPr>
             <a:r>
-              <a:rPr lang="en-US" sz="720" b="0" u="none" strike="noStrike">
+              <a:rPr lang="pt-BR" sz="720" b="0" u="none" strike="noStrike">
                 <a:solidFill>
                   <a:srgbClr val="E8F4F2"/>
                 </a:solidFill>
@@ -14269,7 +14403,7 @@
               </a:tabLst>
             </a:pPr>
             <a:r>
-              <a:rPr lang="en-US" sz="720" b="0" u="none" strike="noStrike">
+              <a:rPr lang="pt-BR" sz="720" b="0" u="none" strike="noStrike">
                 <a:solidFill>
                   <a:srgbClr val="E8F4F2"/>
                 </a:solidFill>
@@ -14299,7 +14433,7 @@
               </a:tabLst>
             </a:pPr>
             <a:r>
-              <a:rPr lang="en-US" sz="720" b="0" u="none" strike="noStrike">
+              <a:rPr lang="pt-BR" sz="720" b="0" u="none" strike="noStrike">
                 <a:solidFill>
                   <a:srgbClr val="E8F4F2"/>
                 </a:solidFill>
@@ -14329,7 +14463,7 @@
               </a:tabLst>
             </a:pPr>
             <a:r>
-              <a:rPr lang="en-US" sz="720" b="0" u="none" strike="noStrike">
+              <a:rPr lang="pt-BR" sz="720" b="0" u="none" strike="noStrike">
                 <a:solidFill>
                   <a:srgbClr val="E8F4F2"/>
                 </a:solidFill>
@@ -14359,7 +14493,7 @@
               </a:tabLst>
             </a:pPr>
             <a:r>
-              <a:rPr lang="en-US" sz="720" b="0" u="none" strike="noStrike">
+              <a:rPr lang="pt-BR" sz="720" b="0" u="none" strike="noStrike">
                 <a:solidFill>
                   <a:srgbClr val="E8F4F2"/>
                 </a:solidFill>
@@ -14389,7 +14523,7 @@
               </a:tabLst>
             </a:pPr>
             <a:r>
-              <a:rPr lang="en-US" sz="720" b="0" u="none" strike="noStrike">
+              <a:rPr lang="pt-BR" sz="720" b="0" u="none" strike="noStrike">
                 <a:solidFill>
                   <a:srgbClr val="E8F4F2"/>
                 </a:solidFill>
@@ -14419,7 +14553,7 @@
               </a:tabLst>
             </a:pPr>
             <a:r>
-              <a:rPr lang="en-US" sz="720" b="0" u="none" strike="noStrike">
+              <a:rPr lang="pt-BR" sz="720" b="0" u="none" strike="noStrike">
                 <a:solidFill>
                   <a:srgbClr val="E8F4F2"/>
                 </a:solidFill>
@@ -14449,7 +14583,7 @@
               </a:tabLst>
             </a:pPr>
             <a:r>
-              <a:rPr lang="en-US" sz="720" b="0" u="none" strike="noStrike">
+              <a:rPr lang="pt-BR" sz="720" b="0" u="none" strike="noStrike">
                 <a:solidFill>
                   <a:srgbClr val="E8F4F2"/>
                 </a:solidFill>
@@ -14479,7 +14613,7 @@
               </a:tabLst>
             </a:pPr>
             <a:r>
-              <a:rPr lang="en-US" sz="720" b="0" u="none" strike="noStrike">
+              <a:rPr lang="pt-BR" sz="720" b="0" u="none" strike="noStrike">
                 <a:solidFill>
                   <a:srgbClr val="E8F4F2"/>
                 </a:solidFill>
@@ -14509,7 +14643,7 @@
               </a:tabLst>
             </a:pPr>
             <a:r>
-              <a:rPr lang="en-US" sz="720" b="0" u="none" strike="noStrike">
+              <a:rPr lang="pt-BR" sz="720" b="0" u="none" strike="noStrike">
                 <a:solidFill>
                   <a:srgbClr val="E8F4F2"/>
                 </a:solidFill>
@@ -14539,7 +14673,7 @@
               </a:tabLst>
             </a:pPr>
             <a:r>
-              <a:rPr lang="en-US" sz="720" b="0" u="none" strike="noStrike">
+              <a:rPr lang="pt-BR" sz="720" b="0" u="none" strike="noStrike">
                 <a:solidFill>
                   <a:srgbClr val="E8F4F2"/>
                 </a:solidFill>
@@ -14587,7 +14721,7 @@
               </a:tabLst>
             </a:pPr>
             <a:r>
-              <a:rPr lang="en-US" sz="720" b="0" u="none" strike="noStrike">
+              <a:rPr lang="pt-BR" sz="720" b="0" u="none" strike="noStrike">
                 <a:solidFill>
                   <a:srgbClr val="E8F4F2"/>
                 </a:solidFill>
@@ -14617,7 +14751,7 @@
               </a:tabLst>
             </a:pPr>
             <a:r>
-              <a:rPr lang="en-US" sz="720" b="0" u="none" strike="noStrike">
+              <a:rPr lang="pt-BR" sz="720" b="0" u="none" strike="noStrike">
                 <a:solidFill>
                   <a:srgbClr val="E8F4F2"/>
                 </a:solidFill>
@@ -14647,7 +14781,7 @@
               </a:tabLst>
             </a:pPr>
             <a:r>
-              <a:rPr lang="en-US" sz="720" b="0" u="none" strike="noStrike">
+              <a:rPr lang="pt-BR" sz="720" b="0" u="none" strike="noStrike">
                 <a:solidFill>
                   <a:srgbClr val="E8F4F2"/>
                 </a:solidFill>
@@ -14677,7 +14811,7 @@
               </a:tabLst>
             </a:pPr>
             <a:r>
-              <a:rPr lang="en-US" sz="720" b="0" u="none" strike="noStrike">
+              <a:rPr lang="pt-BR" sz="720" b="0" u="none" strike="noStrike">
                 <a:solidFill>
                   <a:srgbClr val="E8F4F2"/>
                 </a:solidFill>
@@ -14707,7 +14841,7 @@
               </a:tabLst>
             </a:pPr>
             <a:r>
-              <a:rPr lang="en-US" sz="720" b="0" u="none" strike="noStrike">
+              <a:rPr lang="pt-BR" sz="720" b="0" u="none" strike="noStrike">
                 <a:solidFill>
                   <a:srgbClr val="E8F4F2"/>
                 </a:solidFill>
@@ -14737,7 +14871,7 @@
               </a:tabLst>
             </a:pPr>
             <a:r>
-              <a:rPr lang="en-US" sz="720" b="0" u="none" strike="noStrike">
+              <a:rPr lang="pt-BR" sz="720" b="0" u="none" strike="noStrike">
                 <a:solidFill>
                   <a:srgbClr val="E8F4F2"/>
                 </a:solidFill>
@@ -14767,7 +14901,7 @@
               </a:tabLst>
             </a:pPr>
             <a:r>
-              <a:rPr lang="en-US" sz="720" b="0" u="none" strike="noStrike">
+              <a:rPr lang="pt-BR" sz="720" b="0" u="none" strike="noStrike">
                 <a:solidFill>
                   <a:srgbClr val="E8F4F2"/>
                 </a:solidFill>
@@ -14797,7 +14931,7 @@
               </a:tabLst>
             </a:pPr>
             <a:r>
-              <a:rPr lang="en-US" sz="720" b="0" u="none" strike="noStrike">
+              <a:rPr lang="pt-BR" sz="720" b="0" u="none" strike="noStrike">
                 <a:solidFill>
                   <a:srgbClr val="E8F4F2"/>
                 </a:solidFill>
@@ -14828,7 +14962,7 @@
         <p:spPr>
           <a:xfrm>
             <a:off x="7635240" y="2240280"/>
-            <a:ext cx="3885840" cy="3958920"/>
+            <a:ext cx="3885480" cy="3958560"/>
           </a:xfrm>
           <a:prstGeom prst="rect">
             <a:avLst/>
@@ -14863,7 +14997,7 @@
               <a:buChar char=""/>
             </a:pPr>
             <a:r>
-              <a:rPr lang="en-US" sz="1200" b="0" u="none" strike="noStrike">
+              <a:rPr lang="pt-BR" sz="1200" b="0" u="none" strike="noStrike">
                 <a:solidFill>
                   <a:srgbClr val="333333"/>
                 </a:solidFill>
@@ -14898,7 +15032,7 @@
               <a:buChar char=""/>
             </a:pPr>
             <a:r>
-              <a:rPr lang="en-US" sz="1200" b="0" u="none" strike="noStrike">
+              <a:rPr lang="pt-BR" sz="1200" b="0" u="none" strike="noStrike">
                 <a:solidFill>
                   <a:srgbClr val="333333"/>
                 </a:solidFill>
@@ -14933,7 +15067,7 @@
               <a:buChar char=""/>
             </a:pPr>
             <a:r>
-              <a:rPr lang="en-US" sz="1200" b="0" u="none" strike="noStrike">
+              <a:rPr lang="pt-BR" sz="1200" b="0" u="none" strike="noStrike">
                 <a:solidFill>
                   <a:srgbClr val="333333"/>
                 </a:solidFill>
@@ -14968,7 +15102,7 @@
               <a:buChar char=""/>
             </a:pPr>
             <a:r>
-              <a:rPr lang="en-US" sz="1200" b="0" u="none" strike="noStrike">
+              <a:rPr lang="pt-BR" sz="1200" b="0" u="none" strike="noStrike">
                 <a:solidFill>
                   <a:srgbClr val="333333"/>
                 </a:solidFill>
@@ -15003,7 +15137,7 @@
               <a:buChar char=""/>
             </a:pPr>
             <a:r>
-              <a:rPr lang="en-US" sz="1200" b="0" u="none" strike="noStrike">
+              <a:rPr lang="pt-BR" sz="1200" b="0" u="none" strike="noStrike">
                 <a:solidFill>
                   <a:srgbClr val="333333"/>
                 </a:solidFill>
@@ -15034,7 +15168,7 @@
         <p:spPr>
           <a:xfrm>
             <a:off x="548640" y="6419160"/>
-            <a:ext cx="8229240" cy="273960"/>
+            <a:ext cx="8228880" cy="273600"/>
           </a:xfrm>
           <a:prstGeom prst="rect">
             <a:avLst/>
@@ -15064,7 +15198,7 @@
               </a:tabLst>
             </a:pPr>
             <a:r>
-              <a:rPr lang="en-US" sz="900" b="0" u="none" strike="noStrike">
+              <a:rPr lang="pt-BR" sz="900" b="0" u="none" strike="noStrike">
                 <a:solidFill>
                   <a:srgbClr val="5A5A5A"/>
                 </a:solidFill>
@@ -15125,7 +15259,7 @@
         <p:spPr>
           <a:xfrm rot="5400000">
             <a:off x="0" y="0"/>
-            <a:ext cx="2514240" cy="2514240"/>
+            <a:ext cx="2513880" cy="2513880"/>
           </a:xfrm>
           <a:prstGeom prst="rtTriangle">
             <a:avLst/>
@@ -15151,6 +15285,7 @@
             <a:noAutofit/>
           </a:bodyPr>
           <a:p>
+            <a:pPr/>
             <a:endParaRPr lang="pt-BR" sz="1800" b="0" u="none" strike="noStrike">
               <a:solidFill>
                 <a:srgbClr val="FFFFFF"/>
@@ -15170,8 +15305,8 @@
         </p:nvSpPr>
         <p:spPr>
           <a:xfrm rot="10800000">
-            <a:off x="9391320" y="0"/>
-            <a:ext cx="2806920" cy="2806920"/>
+            <a:off x="9391680" y="0"/>
+            <a:ext cx="2806560" cy="2806560"/>
           </a:xfrm>
           <a:prstGeom prst="rtTriangle">
             <a:avLst/>
@@ -15197,6 +15332,7 @@
             <a:noAutofit/>
           </a:bodyPr>
           <a:p>
+            <a:pPr/>
             <a:endParaRPr lang="pt-BR" sz="1800" b="0" u="none" strike="noStrike">
               <a:solidFill>
                 <a:srgbClr val="000000"/>
@@ -15221,7 +15357,7 @@
         <p:spPr>
           <a:xfrm>
             <a:off x="10954440" y="612720"/>
-            <a:ext cx="664560" cy="306720"/>
+            <a:ext cx="664200" cy="306360"/>
           </a:xfrm>
           <a:prstGeom prst="rect">
             <a:avLst/>
@@ -15241,7 +15377,7 @@
         <p:spPr>
           <a:xfrm>
             <a:off x="1691640" y="749880"/>
-            <a:ext cx="8503560" cy="658080"/>
+            <a:ext cx="8503200" cy="657720"/>
           </a:xfrm>
           <a:prstGeom prst="rect">
             <a:avLst/>
@@ -15271,7 +15407,7 @@
               </a:tabLst>
             </a:pPr>
             <a:r>
-              <a:rPr lang="en-US" sz="2800" b="1" u="none" strike="noStrike">
+              <a:rPr lang="pt-BR" sz="2800" b="1" u="none" strike="noStrike">
                 <a:solidFill>
                   <a:srgbClr val="00A59A"/>
                 </a:solidFill>
@@ -15302,7 +15438,7 @@
         <p:spPr>
           <a:xfrm>
             <a:off x="658440" y="1993320"/>
-            <a:ext cx="5257440" cy="3885840"/>
+            <a:ext cx="5257080" cy="3885480"/>
           </a:xfrm>
           <a:prstGeom prst="roundRect">
             <a:avLst>
@@ -15330,6 +15466,7 @@
             <a:noAutofit/>
           </a:bodyPr>
           <a:p>
+            <a:pPr/>
             <a:endParaRPr lang="pt-BR" sz="1800" b="0" u="none" strike="noStrike">
               <a:solidFill>
                 <a:srgbClr val="000000"/>
@@ -15350,7 +15487,7 @@
         <p:spPr>
           <a:xfrm>
             <a:off x="896040" y="2194560"/>
-            <a:ext cx="4781880" cy="402120"/>
+            <a:ext cx="4781520" cy="401760"/>
           </a:xfrm>
           <a:prstGeom prst="rect">
             <a:avLst/>
@@ -15380,7 +15517,7 @@
               </a:tabLst>
             </a:pPr>
             <a:r>
-              <a:rPr lang="en-US" sz="1600" b="1" u="none" strike="noStrike">
+              <a:rPr lang="pt-BR" sz="1600" b="1" u="none" strike="noStrike">
                 <a:solidFill>
                   <a:srgbClr val="00695F"/>
                 </a:solidFill>
@@ -15411,7 +15548,7 @@
         <p:spPr>
           <a:xfrm>
             <a:off x="896040" y="2706480"/>
-            <a:ext cx="4781880" cy="2971440"/>
+            <a:ext cx="4781520" cy="2971080"/>
           </a:xfrm>
           <a:prstGeom prst="rect">
             <a:avLst/>
@@ -15446,7 +15583,7 @@
               <a:buChar char=""/>
             </a:pPr>
             <a:r>
-              <a:rPr lang="en-US" sz="1250" b="0" u="none" strike="noStrike">
+              <a:rPr lang="pt-BR" sz="1250" b="0" u="none" strike="noStrike">
                 <a:solidFill>
                   <a:srgbClr val="333333"/>
                 </a:solidFill>
@@ -15481,7 +15618,7 @@
               <a:buChar char=""/>
             </a:pPr>
             <a:r>
-              <a:rPr lang="en-US" sz="1250" b="0" u="none" strike="noStrike">
+              <a:rPr lang="pt-BR" sz="1250" b="0" u="none" strike="noStrike">
                 <a:solidFill>
                   <a:srgbClr val="333333"/>
                 </a:solidFill>
@@ -15516,7 +15653,7 @@
               <a:buChar char=""/>
             </a:pPr>
             <a:r>
-              <a:rPr lang="en-US" sz="1250" b="0" u="none" strike="noStrike">
+              <a:rPr lang="pt-BR" sz="1250" b="0" u="none" strike="noStrike">
                 <a:solidFill>
                   <a:srgbClr val="333333"/>
                 </a:solidFill>
@@ -15551,7 +15688,7 @@
               <a:buChar char=""/>
             </a:pPr>
             <a:r>
-              <a:rPr lang="en-US" sz="1250" b="0" u="none" strike="noStrike">
+              <a:rPr lang="pt-BR" sz="1250" b="0" u="none" strike="noStrike">
                 <a:solidFill>
                   <a:srgbClr val="333333"/>
                 </a:solidFill>
@@ -15586,7 +15723,7 @@
               <a:buChar char=""/>
             </a:pPr>
             <a:r>
-              <a:rPr lang="en-US" sz="1250" b="0" u="none" strike="noStrike">
+              <a:rPr lang="pt-BR" sz="1250" b="0" u="none" strike="noStrike">
                 <a:solidFill>
                   <a:srgbClr val="333333"/>
                 </a:solidFill>
@@ -15617,7 +15754,7 @@
         <p:spPr>
           <a:xfrm>
             <a:off x="6272640" y="1993320"/>
-            <a:ext cx="5257440" cy="3885840"/>
+            <a:ext cx="5257080" cy="3885480"/>
           </a:xfrm>
           <a:prstGeom prst="roundRect">
             <a:avLst>
@@ -15645,6 +15782,7 @@
             <a:noAutofit/>
           </a:bodyPr>
           <a:p>
+            <a:pPr/>
             <a:endParaRPr lang="pt-BR" sz="1800" b="0" u="none" strike="noStrike">
               <a:solidFill>
                 <a:srgbClr val="000000"/>
@@ -15665,7 +15803,7 @@
         <p:spPr>
           <a:xfrm>
             <a:off x="6510600" y="2194560"/>
-            <a:ext cx="4781880" cy="402120"/>
+            <a:ext cx="4781520" cy="401760"/>
           </a:xfrm>
           <a:prstGeom prst="rect">
             <a:avLst/>
@@ -15695,7 +15833,7 @@
               </a:tabLst>
             </a:pPr>
             <a:r>
-              <a:rPr lang="en-US" sz="1600" b="1" u="none" strike="noStrike">
+              <a:rPr lang="pt-BR" sz="1600" b="1" u="none" strike="noStrike">
                 <a:solidFill>
                   <a:srgbClr val="00695F"/>
                 </a:solidFill>
@@ -15726,7 +15864,7 @@
         <p:spPr>
           <a:xfrm>
             <a:off x="6510600" y="2706480"/>
-            <a:ext cx="4781880" cy="2971440"/>
+            <a:ext cx="4781520" cy="2971080"/>
           </a:xfrm>
           <a:prstGeom prst="rect">
             <a:avLst/>
@@ -15761,7 +15899,7 @@
               <a:buChar char=""/>
             </a:pPr>
             <a:r>
-              <a:rPr lang="en-US" sz="1250" b="0" u="none" strike="noStrike">
+              <a:rPr lang="pt-BR" sz="1250" b="0" u="none" strike="noStrike">
                 <a:solidFill>
                   <a:srgbClr val="333333"/>
                 </a:solidFill>
@@ -15796,7 +15934,7 @@
               <a:buChar char=""/>
             </a:pPr>
             <a:r>
-              <a:rPr lang="en-US" sz="1250" b="0" u="none" strike="noStrike">
+              <a:rPr lang="pt-BR" sz="1250" b="0" u="none" strike="noStrike">
                 <a:solidFill>
                   <a:srgbClr val="333333"/>
                 </a:solidFill>
@@ -15831,7 +15969,7 @@
               <a:buChar char=""/>
             </a:pPr>
             <a:r>
-              <a:rPr lang="en-US" sz="1250" b="0" u="none" strike="noStrike">
+              <a:rPr lang="pt-BR" sz="1250" b="0" u="none" strike="noStrike">
                 <a:solidFill>
                   <a:srgbClr val="333333"/>
                 </a:solidFill>
@@ -15866,7 +16004,7 @@
               <a:buChar char=""/>
             </a:pPr>
             <a:r>
-              <a:rPr lang="en-US" sz="1250" b="0" u="none" strike="noStrike">
+              <a:rPr lang="pt-BR" sz="1250" b="0" u="none" strike="noStrike">
                 <a:solidFill>
                   <a:srgbClr val="333333"/>
                 </a:solidFill>
@@ -15901,7 +16039,7 @@
               <a:buChar char=""/>
             </a:pPr>
             <a:r>
-              <a:rPr lang="en-US" sz="1250" b="0" u="none" strike="noStrike">
+              <a:rPr lang="pt-BR" sz="1250" b="0" u="none" strike="noStrike">
                 <a:solidFill>
                   <a:srgbClr val="333333"/>
                 </a:solidFill>
@@ -15932,7 +16070,7 @@
         <p:spPr>
           <a:xfrm>
             <a:off x="548640" y="6419160"/>
-            <a:ext cx="8229240" cy="273960"/>
+            <a:ext cx="8228880" cy="273600"/>
           </a:xfrm>
           <a:prstGeom prst="rect">
             <a:avLst/>
@@ -15962,7 +16100,7 @@
               </a:tabLst>
             </a:pPr>
             <a:r>
-              <a:rPr lang="en-US" sz="900" b="0" u="none" strike="noStrike">
+              <a:rPr lang="pt-BR" sz="900" b="0" u="none" strike="noStrike">
                 <a:solidFill>
                   <a:srgbClr val="5A5A5A"/>
                 </a:solidFill>
@@ -16023,7 +16161,7 @@
         <p:spPr>
           <a:xfrm rot="5400000">
             <a:off x="0" y="0"/>
-            <a:ext cx="2514240" cy="2514240"/>
+            <a:ext cx="2513880" cy="2513880"/>
           </a:xfrm>
           <a:prstGeom prst="rtTriangle">
             <a:avLst/>
@@ -16049,6 +16187,7 @@
             <a:noAutofit/>
           </a:bodyPr>
           <a:p>
+            <a:pPr/>
             <a:endParaRPr lang="pt-BR" sz="1800" b="0" u="none" strike="noStrike">
               <a:solidFill>
                 <a:srgbClr val="FFFFFF"/>
@@ -16068,8 +16207,8 @@
         </p:nvSpPr>
         <p:spPr>
           <a:xfrm rot="10800000">
-            <a:off x="9391320" y="0"/>
-            <a:ext cx="2806920" cy="2806920"/>
+            <a:off x="9391680" y="0"/>
+            <a:ext cx="2806560" cy="2806560"/>
           </a:xfrm>
           <a:prstGeom prst="rtTriangle">
             <a:avLst/>
@@ -16095,6 +16234,7 @@
             <a:noAutofit/>
           </a:bodyPr>
           <a:p>
+            <a:pPr/>
             <a:endParaRPr lang="pt-BR" sz="1800" b="0" u="none" strike="noStrike">
               <a:solidFill>
                 <a:srgbClr val="000000"/>
@@ -16119,7 +16259,7 @@
         <p:spPr>
           <a:xfrm>
             <a:off x="10954440" y="612720"/>
-            <a:ext cx="664560" cy="306720"/>
+            <a:ext cx="664200" cy="306360"/>
           </a:xfrm>
           <a:prstGeom prst="rect">
             <a:avLst/>
@@ -16139,7 +16279,7 @@
         <p:spPr>
           <a:xfrm>
             <a:off x="1691640" y="749880"/>
-            <a:ext cx="8503560" cy="658080"/>
+            <a:ext cx="8503200" cy="657720"/>
           </a:xfrm>
           <a:prstGeom prst="rect">
             <a:avLst/>
@@ -16169,7 +16309,7 @@
               </a:tabLst>
             </a:pPr>
             <a:r>
-              <a:rPr lang="en-US" sz="2800" b="1" u="none" strike="noStrike">
+              <a:rPr lang="pt-BR" sz="2800" b="1" u="none" strike="noStrike">
                 <a:solidFill>
                   <a:srgbClr val="00A59A"/>
                 </a:solidFill>
@@ -16200,7 +16340,7 @@
         <p:spPr>
           <a:xfrm>
             <a:off x="1691640" y="1389960"/>
-            <a:ext cx="8503560" cy="328680"/>
+            <a:ext cx="8503200" cy="328320"/>
           </a:xfrm>
           <a:prstGeom prst="rect">
             <a:avLst/>
@@ -16230,7 +16370,7 @@
               </a:tabLst>
             </a:pPr>
             <a:r>
-              <a:rPr lang="en-US" sz="1300" b="0" i="1" u="none" strike="noStrike">
+              <a:rPr lang="pt-BR" sz="1300" b="0" i="1" u="none" strike="noStrike">
                 <a:solidFill>
                   <a:srgbClr val="5A5A5A"/>
                 </a:solidFill>
@@ -16261,7 +16401,7 @@
         <p:spPr>
           <a:xfrm>
             <a:off x="685800" y="2212920"/>
-            <a:ext cx="420120" cy="420120"/>
+            <a:ext cx="419760" cy="419760"/>
           </a:xfrm>
           <a:prstGeom prst="ellipse">
             <a:avLst/>
@@ -16287,6 +16427,7 @@
             <a:noAutofit/>
           </a:bodyPr>
           <a:p>
+            <a:pPr/>
             <a:endParaRPr lang="pt-BR" sz="1800" b="0" u="none" strike="noStrike">
               <a:solidFill>
                 <a:srgbClr val="FFFFFF"/>
@@ -16307,7 +16448,7 @@
         <p:spPr>
           <a:xfrm>
             <a:off x="685800" y="2212920"/>
-            <a:ext cx="420120" cy="420120"/>
+            <a:ext cx="419760" cy="419760"/>
           </a:xfrm>
           <a:prstGeom prst="rect">
             <a:avLst/>
@@ -16337,7 +16478,7 @@
               </a:tabLst>
             </a:pPr>
             <a:r>
-              <a:rPr lang="en-US" sz="1500" b="1" u="none" strike="noStrike">
+              <a:rPr lang="pt-BR" sz="1500" b="1" u="none" strike="noStrike">
                 <a:solidFill>
                   <a:srgbClr val="FFFFFF"/>
                 </a:solidFill>
@@ -16387,10 +16528,11 @@
           <a:fontRef idx="minor"/>
         </p:style>
         <p:txBody>
-          <a:bodyPr lIns="90000" tIns="45000" rIns="90000" bIns="45000" anchor="t" anchorCtr="1">
-            <a:noAutofit/>
-          </a:bodyPr>
-          <a:p>
+          <a:bodyPr lIns="0" tIns="45000" rIns="0" bIns="45000" anchor="t" anchorCtr="1">
+            <a:noAutofit/>
+          </a:bodyPr>
+          <a:p>
+            <a:pPr/>
             <a:endParaRPr lang="pt-BR" sz="1800" b="0" u="none" strike="noStrike">
               <a:solidFill>
                 <a:srgbClr val="000000"/>
@@ -16411,7 +16553,7 @@
         <p:spPr>
           <a:xfrm>
             <a:off x="1298520" y="2212920"/>
-            <a:ext cx="10149480" cy="822600"/>
+            <a:ext cx="10149120" cy="822240"/>
           </a:xfrm>
           <a:prstGeom prst="rect">
             <a:avLst/>
@@ -16441,7 +16583,7 @@
               </a:tabLst>
             </a:pPr>
             <a:r>
-              <a:rPr lang="en-US" sz="1250" b="1" u="none" strike="noStrike">
+              <a:rPr lang="pt-BR" sz="1250" b="1" u="none" strike="noStrike">
                 <a:solidFill>
                   <a:srgbClr val="00695F"/>
                 </a:solidFill>
@@ -16471,7 +16613,7 @@
               </a:tabLst>
             </a:pPr>
             <a:r>
-              <a:rPr lang="en-US" sz="1250" b="0" u="none" strike="noStrike">
+              <a:rPr lang="pt-BR" sz="1250" b="0" u="none" strike="noStrike">
                 <a:solidFill>
                   <a:srgbClr val="333333"/>
                 </a:solidFill>
@@ -16502,7 +16644,7 @@
         <p:spPr>
           <a:xfrm>
             <a:off x="685800" y="3127320"/>
-            <a:ext cx="420120" cy="420120"/>
+            <a:ext cx="419760" cy="419760"/>
           </a:xfrm>
           <a:prstGeom prst="ellipse">
             <a:avLst/>
@@ -16528,6 +16670,7 @@
             <a:noAutofit/>
           </a:bodyPr>
           <a:p>
+            <a:pPr/>
             <a:endParaRPr lang="pt-BR" sz="1800" b="0" u="none" strike="noStrike">
               <a:solidFill>
                 <a:srgbClr val="FFFFFF"/>
@@ -16548,7 +16691,7 @@
         <p:spPr>
           <a:xfrm>
             <a:off x="685800" y="3127320"/>
-            <a:ext cx="420120" cy="420120"/>
+            <a:ext cx="419760" cy="419760"/>
           </a:xfrm>
           <a:prstGeom prst="rect">
             <a:avLst/>
@@ -16578,7 +16721,7 @@
               </a:tabLst>
             </a:pPr>
             <a:r>
-              <a:rPr lang="en-US" sz="1500" b="1" u="none" strike="noStrike">
+              <a:rPr lang="pt-BR" sz="1500" b="1" u="none" strike="noStrike">
                 <a:solidFill>
                   <a:srgbClr val="FFFFFF"/>
                 </a:solidFill>
@@ -16628,10 +16771,11 @@
           <a:fontRef idx="minor"/>
         </p:style>
         <p:txBody>
-          <a:bodyPr lIns="90000" tIns="45000" rIns="90000" bIns="45000" anchor="t" anchorCtr="1">
-            <a:noAutofit/>
-          </a:bodyPr>
-          <a:p>
+          <a:bodyPr lIns="0" tIns="45000" rIns="0" bIns="45000" anchor="t" anchorCtr="1">
+            <a:noAutofit/>
+          </a:bodyPr>
+          <a:p>
+            <a:pPr/>
             <a:endParaRPr lang="pt-BR" sz="1800" b="0" u="none" strike="noStrike">
               <a:solidFill>
                 <a:srgbClr val="000000"/>
@@ -16652,7 +16796,7 @@
         <p:spPr>
           <a:xfrm>
             <a:off x="1298520" y="3127320"/>
-            <a:ext cx="10149480" cy="822600"/>
+            <a:ext cx="10149120" cy="822240"/>
           </a:xfrm>
           <a:prstGeom prst="rect">
             <a:avLst/>
@@ -16682,7 +16826,7 @@
               </a:tabLst>
             </a:pPr>
             <a:r>
-              <a:rPr lang="en-US" sz="1250" b="1" u="none" strike="noStrike">
+              <a:rPr lang="pt-BR" sz="1250" b="1" u="none" strike="noStrike">
                 <a:solidFill>
                   <a:srgbClr val="00695F"/>
                 </a:solidFill>
@@ -16712,7 +16856,7 @@
               </a:tabLst>
             </a:pPr>
             <a:r>
-              <a:rPr lang="en-US" sz="1250" b="0" u="none" strike="noStrike">
+              <a:rPr lang="pt-BR" sz="1250" b="0" u="none" strike="noStrike">
                 <a:solidFill>
                   <a:srgbClr val="333333"/>
                 </a:solidFill>
@@ -16743,7 +16887,7 @@
         <p:spPr>
           <a:xfrm>
             <a:off x="685800" y="4041720"/>
-            <a:ext cx="420120" cy="420120"/>
+            <a:ext cx="419760" cy="419760"/>
           </a:xfrm>
           <a:prstGeom prst="ellipse">
             <a:avLst/>
@@ -16769,6 +16913,7 @@
             <a:noAutofit/>
           </a:bodyPr>
           <a:p>
+            <a:pPr/>
             <a:endParaRPr lang="pt-BR" sz="1800" b="0" u="none" strike="noStrike">
               <a:solidFill>
                 <a:srgbClr val="FFFFFF"/>
@@ -16789,7 +16934,7 @@
         <p:spPr>
           <a:xfrm>
             <a:off x="685800" y="4041720"/>
-            <a:ext cx="420120" cy="420120"/>
+            <a:ext cx="419760" cy="419760"/>
           </a:xfrm>
           <a:prstGeom prst="rect">
             <a:avLst/>
@@ -16819,7 +16964,7 @@
               </a:tabLst>
             </a:pPr>
             <a:r>
-              <a:rPr lang="en-US" sz="1500" b="1" u="none" strike="noStrike">
+              <a:rPr lang="pt-BR" sz="1500" b="1" u="none" strike="noStrike">
                 <a:solidFill>
                   <a:srgbClr val="FFFFFF"/>
                 </a:solidFill>
@@ -16869,10 +17014,11 @@
           <a:fontRef idx="minor"/>
         </p:style>
         <p:txBody>
-          <a:bodyPr lIns="90000" tIns="45000" rIns="90000" bIns="45000" anchor="t" anchorCtr="1">
-            <a:noAutofit/>
-          </a:bodyPr>
-          <a:p>
+          <a:bodyPr lIns="0" tIns="45000" rIns="0" bIns="45000" anchor="t" anchorCtr="1">
+            <a:noAutofit/>
+          </a:bodyPr>
+          <a:p>
+            <a:pPr/>
             <a:endParaRPr lang="pt-BR" sz="1800" b="0" u="none" strike="noStrike">
               <a:solidFill>
                 <a:srgbClr val="000000"/>
@@ -16893,7 +17039,7 @@
         <p:spPr>
           <a:xfrm>
             <a:off x="1298520" y="4041720"/>
-            <a:ext cx="10149480" cy="822600"/>
+            <a:ext cx="10149120" cy="822240"/>
           </a:xfrm>
           <a:prstGeom prst="rect">
             <a:avLst/>
@@ -16923,7 +17069,7 @@
               </a:tabLst>
             </a:pPr>
             <a:r>
-              <a:rPr lang="en-US" sz="1250" b="1" u="none" strike="noStrike">
+              <a:rPr lang="pt-BR" sz="1250" b="1" u="none" strike="noStrike">
                 <a:solidFill>
                   <a:srgbClr val="00695F"/>
                 </a:solidFill>
@@ -16953,7 +17099,7 @@
               </a:tabLst>
             </a:pPr>
             <a:r>
-              <a:rPr lang="en-US" sz="1250" b="0" u="none" strike="noStrike">
+              <a:rPr lang="pt-BR" sz="1250" b="0" u="none" strike="noStrike">
                 <a:solidFill>
                   <a:srgbClr val="333333"/>
                 </a:solidFill>
@@ -16984,7 +17130,7 @@
         <p:spPr>
           <a:xfrm>
             <a:off x="685800" y="4956120"/>
-            <a:ext cx="420120" cy="420120"/>
+            <a:ext cx="419760" cy="419760"/>
           </a:xfrm>
           <a:prstGeom prst="ellipse">
             <a:avLst/>
@@ -17010,6 +17156,7 @@
             <a:noAutofit/>
           </a:bodyPr>
           <a:p>
+            <a:pPr/>
             <a:endParaRPr lang="pt-BR" sz="1800" b="0" u="none" strike="noStrike">
               <a:solidFill>
                 <a:srgbClr val="FFFFFF"/>
@@ -17030,7 +17177,7 @@
         <p:spPr>
           <a:xfrm>
             <a:off x="685800" y="4956120"/>
-            <a:ext cx="420120" cy="420120"/>
+            <a:ext cx="419760" cy="419760"/>
           </a:xfrm>
           <a:prstGeom prst="rect">
             <a:avLst/>
@@ -17060,7 +17207,7 @@
               </a:tabLst>
             </a:pPr>
             <a:r>
-              <a:rPr lang="en-US" sz="1500" b="1" u="none" strike="noStrike">
+              <a:rPr lang="pt-BR" sz="1500" b="1" u="none" strike="noStrike">
                 <a:solidFill>
                   <a:srgbClr val="FFFFFF"/>
                 </a:solidFill>
@@ -17091,7 +17238,7 @@
         <p:spPr>
           <a:xfrm>
             <a:off x="1298520" y="4956120"/>
-            <a:ext cx="10149480" cy="822600"/>
+            <a:ext cx="10149120" cy="822240"/>
           </a:xfrm>
           <a:prstGeom prst="rect">
             <a:avLst/>
@@ -17121,7 +17268,7 @@
               </a:tabLst>
             </a:pPr>
             <a:r>
-              <a:rPr lang="en-US" sz="1250" b="1" u="none" strike="noStrike">
+              <a:rPr lang="pt-BR" sz="1250" b="1" u="none" strike="noStrike">
                 <a:solidFill>
                   <a:srgbClr val="00695F"/>
                 </a:solidFill>
@@ -17151,7 +17298,7 @@
               </a:tabLst>
             </a:pPr>
             <a:r>
-              <a:rPr lang="en-US" sz="1250" b="0" u="none" strike="noStrike">
+              <a:rPr lang="pt-BR" sz="1250" b="0" u="none" strike="noStrike">
                 <a:solidFill>
                   <a:srgbClr val="333333"/>
                 </a:solidFill>
@@ -17182,7 +17329,7 @@
         <p:spPr>
           <a:xfrm>
             <a:off x="548640" y="6419160"/>
-            <a:ext cx="8229240" cy="273960"/>
+            <a:ext cx="8228880" cy="273600"/>
           </a:xfrm>
           <a:prstGeom prst="rect">
             <a:avLst/>
@@ -17212,7 +17359,7 @@
               </a:tabLst>
             </a:pPr>
             <a:r>
-              <a:rPr lang="en-US" sz="900" b="0" u="none" strike="noStrike">
+              <a:rPr lang="pt-BR" sz="900" b="0" u="none" strike="noStrike">
                 <a:solidFill>
                   <a:srgbClr val="5A5A5A"/>
                 </a:solidFill>
